--- a/exports/pptx/lessons/middle-module-10-herbs-aushadhi/day-02-tulasi.pptx
+++ b/exports/pptx/lessons/middle-module-10-herbs-aushadhi/day-02-tulasi.pptx
@@ -17,9 +17,15 @@
     <p:sldId id="265" r:id="rId11"/>
     <p:sldId id="266" r:id="rId12"/>
     <p:sldId id="267" r:id="rId13"/>
+    <p:sldId id="268" r:id="rId14"/>
+    <p:sldId id="269" r:id="rId15"/>
+    <p:sldId id="270" r:id="rId16"/>
+    <p:sldId id="271" r:id="rId17"/>
+    <p:sldId id="272" r:id="rId18"/>
+    <p:sldId id="273" r:id="rId19"/>
   </p:sldIdLst>
   <p:notesMasterIdLst>
-    <p:notesMasterId r:id="rId14"/>
+    <p:notesMasterId r:id="rId20"/>
   </p:notesMasterIdLst>
   <p:sldSz cx="9144000" cy="5143500"/>
   <p:notesSz cx="5143500" cy="9144000"/>
@@ -801,6 +807,534 @@
             <a:fld id="{F7021451-1387-4CA6-816F-3879F97B5CBC}" type="slidenum">
               <a:rPr lang="en-US"/>
               <a:t>12</a:t>
+            </a:fld>
+            <a:endParaRPr lang="en-US"/>
+          </a:p>
+        </p:txBody>
+      </p:sp>
+    </p:spTree>
+    <p:extLst>
+      <p:ext uri="{BB962C8B-B14F-4D97-AF65-F5344CB8AC3E}">
+        <p14:creationId xmlns:p14="http://schemas.microsoft.com/office/powerpoint/2010/main" val="1024086991"/>
+      </p:ext>
+    </p:extLst>
+  </p:cSld>
+  <p:clrMapOvr>
+    <a:masterClrMapping/>
+  </p:clrMapOvr>
+</p:notes>
+</file>
+
+<file path=ppt/notesSlides/notesSlide13.xml><?xml version="1.0" encoding="utf-8"?>
+<p:notes xmlns:a="http://schemas.openxmlformats.org/drawingml/2006/main" xmlns:r="http://schemas.openxmlformats.org/officeDocument/2006/relationships" xmlns:p="http://schemas.openxmlformats.org/presentationml/2006/main">
+  <p:cSld>
+    <p:spTree>
+      <p:nvGrpSpPr>
+        <p:cNvPr id="1" name=""/>
+        <p:cNvGrpSpPr/>
+        <p:nvPr/>
+      </p:nvGrpSpPr>
+      <p:grpSpPr>
+        <a:xfrm>
+          <a:off x="0" y="0"/>
+          <a:ext cx="0" cy="0"/>
+          <a:chOff x="0" y="0"/>
+          <a:chExt cx="0" cy="0"/>
+        </a:xfrm>
+      </p:grpSpPr>
+      <p:sp>
+        <p:nvSpPr>
+          <p:cNvPr id="2" name="Slide Image Placeholder 1"/>
+          <p:cNvSpPr>
+            <a:spLocks noGrp="1" noRot="1" noChangeAspect="1"/>
+          </p:cNvSpPr>
+          <p:nvPr>
+            <p:ph type="sldImg"/>
+          </p:nvPr>
+        </p:nvSpPr>
+        <p:spPr/>
+      </p:sp>
+      <p:sp>
+        <p:nvSpPr>
+          <p:cNvPr id="3" name="Notes Placeholder 2"/>
+          <p:cNvSpPr>
+            <a:spLocks noGrp="1"/>
+          </p:cNvSpPr>
+          <p:nvPr>
+            <p:ph type="body" idx="1"/>
+          </p:nvPr>
+        </p:nvSpPr>
+        <p:spPr/>
+        <p:txBody>
+          <a:bodyPr/>
+          <a:lstStyle/>
+          <a:p>
+            <a:r>
+              <a:rPr lang="en-US" dirty="0"/>
+              <a:t/>
+            </a:r>
+            <a:endParaRPr lang="en-US" dirty="0"/>
+          </a:p>
+        </p:txBody>
+      </p:sp>
+      <p:sp>
+        <p:nvSpPr>
+          <p:cNvPr id="4" name="Slide Number Placeholder 3"/>
+          <p:cNvSpPr>
+            <a:spLocks noGrp="1"/>
+          </p:cNvSpPr>
+          <p:nvPr>
+            <p:ph type="sldNum" sz="quarter" idx="10"/>
+          </p:nvPr>
+        </p:nvSpPr>
+        <p:spPr/>
+        <p:txBody>
+          <a:bodyPr/>
+          <a:lstStyle/>
+          <a:p>
+            <a:fld id="{F7021451-1387-4CA6-816F-3879F97B5CBC}" type="slidenum">
+              <a:rPr lang="en-US"/>
+              <a:t>13</a:t>
+            </a:fld>
+            <a:endParaRPr lang="en-US"/>
+          </a:p>
+        </p:txBody>
+      </p:sp>
+    </p:spTree>
+    <p:extLst>
+      <p:ext uri="{BB962C8B-B14F-4D97-AF65-F5344CB8AC3E}">
+        <p14:creationId xmlns:p14="http://schemas.microsoft.com/office/powerpoint/2010/main" val="1024086991"/>
+      </p:ext>
+    </p:extLst>
+  </p:cSld>
+  <p:clrMapOvr>
+    <a:masterClrMapping/>
+  </p:clrMapOvr>
+</p:notes>
+</file>
+
+<file path=ppt/notesSlides/notesSlide14.xml><?xml version="1.0" encoding="utf-8"?>
+<p:notes xmlns:a="http://schemas.openxmlformats.org/drawingml/2006/main" xmlns:r="http://schemas.openxmlformats.org/officeDocument/2006/relationships" xmlns:p="http://schemas.openxmlformats.org/presentationml/2006/main">
+  <p:cSld>
+    <p:spTree>
+      <p:nvGrpSpPr>
+        <p:cNvPr id="1" name=""/>
+        <p:cNvGrpSpPr/>
+        <p:nvPr/>
+      </p:nvGrpSpPr>
+      <p:grpSpPr>
+        <a:xfrm>
+          <a:off x="0" y="0"/>
+          <a:ext cx="0" cy="0"/>
+          <a:chOff x="0" y="0"/>
+          <a:chExt cx="0" cy="0"/>
+        </a:xfrm>
+      </p:grpSpPr>
+      <p:sp>
+        <p:nvSpPr>
+          <p:cNvPr id="2" name="Slide Image Placeholder 1"/>
+          <p:cNvSpPr>
+            <a:spLocks noGrp="1" noRot="1" noChangeAspect="1"/>
+          </p:cNvSpPr>
+          <p:nvPr>
+            <p:ph type="sldImg"/>
+          </p:nvPr>
+        </p:nvSpPr>
+        <p:spPr/>
+      </p:sp>
+      <p:sp>
+        <p:nvSpPr>
+          <p:cNvPr id="3" name="Notes Placeholder 2"/>
+          <p:cNvSpPr>
+            <a:spLocks noGrp="1"/>
+          </p:cNvSpPr>
+          <p:nvPr>
+            <p:ph type="body" idx="1"/>
+          </p:nvPr>
+        </p:nvSpPr>
+        <p:spPr/>
+        <p:txBody>
+          <a:bodyPr/>
+          <a:lstStyle/>
+          <a:p>
+            <a:r>
+              <a:rPr lang="en-US" dirty="0"/>
+              <a:t/>
+            </a:r>
+            <a:endParaRPr lang="en-US" dirty="0"/>
+          </a:p>
+        </p:txBody>
+      </p:sp>
+      <p:sp>
+        <p:nvSpPr>
+          <p:cNvPr id="4" name="Slide Number Placeholder 3"/>
+          <p:cNvSpPr>
+            <a:spLocks noGrp="1"/>
+          </p:cNvSpPr>
+          <p:nvPr>
+            <p:ph type="sldNum" sz="quarter" idx="10"/>
+          </p:nvPr>
+        </p:nvSpPr>
+        <p:spPr/>
+        <p:txBody>
+          <a:bodyPr/>
+          <a:lstStyle/>
+          <a:p>
+            <a:fld id="{F7021451-1387-4CA6-816F-3879F97B5CBC}" type="slidenum">
+              <a:rPr lang="en-US"/>
+              <a:t>14</a:t>
+            </a:fld>
+            <a:endParaRPr lang="en-US"/>
+          </a:p>
+        </p:txBody>
+      </p:sp>
+    </p:spTree>
+    <p:extLst>
+      <p:ext uri="{BB962C8B-B14F-4D97-AF65-F5344CB8AC3E}">
+        <p14:creationId xmlns:p14="http://schemas.microsoft.com/office/powerpoint/2010/main" val="1024086991"/>
+      </p:ext>
+    </p:extLst>
+  </p:cSld>
+  <p:clrMapOvr>
+    <a:masterClrMapping/>
+  </p:clrMapOvr>
+</p:notes>
+</file>
+
+<file path=ppt/notesSlides/notesSlide15.xml><?xml version="1.0" encoding="utf-8"?>
+<p:notes xmlns:a="http://schemas.openxmlformats.org/drawingml/2006/main" xmlns:r="http://schemas.openxmlformats.org/officeDocument/2006/relationships" xmlns:p="http://schemas.openxmlformats.org/presentationml/2006/main">
+  <p:cSld>
+    <p:spTree>
+      <p:nvGrpSpPr>
+        <p:cNvPr id="1" name=""/>
+        <p:cNvGrpSpPr/>
+        <p:nvPr/>
+      </p:nvGrpSpPr>
+      <p:grpSpPr>
+        <a:xfrm>
+          <a:off x="0" y="0"/>
+          <a:ext cx="0" cy="0"/>
+          <a:chOff x="0" y="0"/>
+          <a:chExt cx="0" cy="0"/>
+        </a:xfrm>
+      </p:grpSpPr>
+      <p:sp>
+        <p:nvSpPr>
+          <p:cNvPr id="2" name="Slide Image Placeholder 1"/>
+          <p:cNvSpPr>
+            <a:spLocks noGrp="1" noRot="1" noChangeAspect="1"/>
+          </p:cNvSpPr>
+          <p:nvPr>
+            <p:ph type="sldImg"/>
+          </p:nvPr>
+        </p:nvSpPr>
+        <p:spPr/>
+      </p:sp>
+      <p:sp>
+        <p:nvSpPr>
+          <p:cNvPr id="3" name="Notes Placeholder 2"/>
+          <p:cNvSpPr>
+            <a:spLocks noGrp="1"/>
+          </p:cNvSpPr>
+          <p:nvPr>
+            <p:ph type="body" idx="1"/>
+          </p:nvPr>
+        </p:nvSpPr>
+        <p:spPr/>
+        <p:txBody>
+          <a:bodyPr/>
+          <a:lstStyle/>
+          <a:p>
+            <a:r>
+              <a:rPr lang="en-US" dirty="0"/>
+              <a:t/>
+            </a:r>
+            <a:endParaRPr lang="en-US" dirty="0"/>
+          </a:p>
+        </p:txBody>
+      </p:sp>
+      <p:sp>
+        <p:nvSpPr>
+          <p:cNvPr id="4" name="Slide Number Placeholder 3"/>
+          <p:cNvSpPr>
+            <a:spLocks noGrp="1"/>
+          </p:cNvSpPr>
+          <p:nvPr>
+            <p:ph type="sldNum" sz="quarter" idx="10"/>
+          </p:nvPr>
+        </p:nvSpPr>
+        <p:spPr/>
+        <p:txBody>
+          <a:bodyPr/>
+          <a:lstStyle/>
+          <a:p>
+            <a:fld id="{F7021451-1387-4CA6-816F-3879F97B5CBC}" type="slidenum">
+              <a:rPr lang="en-US"/>
+              <a:t>15</a:t>
+            </a:fld>
+            <a:endParaRPr lang="en-US"/>
+          </a:p>
+        </p:txBody>
+      </p:sp>
+    </p:spTree>
+    <p:extLst>
+      <p:ext uri="{BB962C8B-B14F-4D97-AF65-F5344CB8AC3E}">
+        <p14:creationId xmlns:p14="http://schemas.microsoft.com/office/powerpoint/2010/main" val="1024086991"/>
+      </p:ext>
+    </p:extLst>
+  </p:cSld>
+  <p:clrMapOvr>
+    <a:masterClrMapping/>
+  </p:clrMapOvr>
+</p:notes>
+</file>
+
+<file path=ppt/notesSlides/notesSlide16.xml><?xml version="1.0" encoding="utf-8"?>
+<p:notes xmlns:a="http://schemas.openxmlformats.org/drawingml/2006/main" xmlns:r="http://schemas.openxmlformats.org/officeDocument/2006/relationships" xmlns:p="http://schemas.openxmlformats.org/presentationml/2006/main">
+  <p:cSld>
+    <p:spTree>
+      <p:nvGrpSpPr>
+        <p:cNvPr id="1" name=""/>
+        <p:cNvGrpSpPr/>
+        <p:nvPr/>
+      </p:nvGrpSpPr>
+      <p:grpSpPr>
+        <a:xfrm>
+          <a:off x="0" y="0"/>
+          <a:ext cx="0" cy="0"/>
+          <a:chOff x="0" y="0"/>
+          <a:chExt cx="0" cy="0"/>
+        </a:xfrm>
+      </p:grpSpPr>
+      <p:sp>
+        <p:nvSpPr>
+          <p:cNvPr id="2" name="Slide Image Placeholder 1"/>
+          <p:cNvSpPr>
+            <a:spLocks noGrp="1" noRot="1" noChangeAspect="1"/>
+          </p:cNvSpPr>
+          <p:nvPr>
+            <p:ph type="sldImg"/>
+          </p:nvPr>
+        </p:nvSpPr>
+        <p:spPr/>
+      </p:sp>
+      <p:sp>
+        <p:nvSpPr>
+          <p:cNvPr id="3" name="Notes Placeholder 2"/>
+          <p:cNvSpPr>
+            <a:spLocks noGrp="1"/>
+          </p:cNvSpPr>
+          <p:nvPr>
+            <p:ph type="body" idx="1"/>
+          </p:nvPr>
+        </p:nvSpPr>
+        <p:spPr/>
+        <p:txBody>
+          <a:bodyPr/>
+          <a:lstStyle/>
+          <a:p>
+            <a:r>
+              <a:rPr lang="en-US" dirty="0"/>
+              <a:t/>
+            </a:r>
+            <a:endParaRPr lang="en-US" dirty="0"/>
+          </a:p>
+        </p:txBody>
+      </p:sp>
+      <p:sp>
+        <p:nvSpPr>
+          <p:cNvPr id="4" name="Slide Number Placeholder 3"/>
+          <p:cNvSpPr>
+            <a:spLocks noGrp="1"/>
+          </p:cNvSpPr>
+          <p:nvPr>
+            <p:ph type="sldNum" sz="quarter" idx="10"/>
+          </p:nvPr>
+        </p:nvSpPr>
+        <p:spPr/>
+        <p:txBody>
+          <a:bodyPr/>
+          <a:lstStyle/>
+          <a:p>
+            <a:fld id="{F7021451-1387-4CA6-816F-3879F97B5CBC}" type="slidenum">
+              <a:rPr lang="en-US"/>
+              <a:t>16</a:t>
+            </a:fld>
+            <a:endParaRPr lang="en-US"/>
+          </a:p>
+        </p:txBody>
+      </p:sp>
+    </p:spTree>
+    <p:extLst>
+      <p:ext uri="{BB962C8B-B14F-4D97-AF65-F5344CB8AC3E}">
+        <p14:creationId xmlns:p14="http://schemas.microsoft.com/office/powerpoint/2010/main" val="1024086991"/>
+      </p:ext>
+    </p:extLst>
+  </p:cSld>
+  <p:clrMapOvr>
+    <a:masterClrMapping/>
+  </p:clrMapOvr>
+</p:notes>
+</file>
+
+<file path=ppt/notesSlides/notesSlide17.xml><?xml version="1.0" encoding="utf-8"?>
+<p:notes xmlns:a="http://schemas.openxmlformats.org/drawingml/2006/main" xmlns:r="http://schemas.openxmlformats.org/officeDocument/2006/relationships" xmlns:p="http://schemas.openxmlformats.org/presentationml/2006/main">
+  <p:cSld>
+    <p:spTree>
+      <p:nvGrpSpPr>
+        <p:cNvPr id="1" name=""/>
+        <p:cNvGrpSpPr/>
+        <p:nvPr/>
+      </p:nvGrpSpPr>
+      <p:grpSpPr>
+        <a:xfrm>
+          <a:off x="0" y="0"/>
+          <a:ext cx="0" cy="0"/>
+          <a:chOff x="0" y="0"/>
+          <a:chExt cx="0" cy="0"/>
+        </a:xfrm>
+      </p:grpSpPr>
+      <p:sp>
+        <p:nvSpPr>
+          <p:cNvPr id="2" name="Slide Image Placeholder 1"/>
+          <p:cNvSpPr>
+            <a:spLocks noGrp="1" noRot="1" noChangeAspect="1"/>
+          </p:cNvSpPr>
+          <p:nvPr>
+            <p:ph type="sldImg"/>
+          </p:nvPr>
+        </p:nvSpPr>
+        <p:spPr/>
+      </p:sp>
+      <p:sp>
+        <p:nvSpPr>
+          <p:cNvPr id="3" name="Notes Placeholder 2"/>
+          <p:cNvSpPr>
+            <a:spLocks noGrp="1"/>
+          </p:cNvSpPr>
+          <p:nvPr>
+            <p:ph type="body" idx="1"/>
+          </p:nvPr>
+        </p:nvSpPr>
+        <p:spPr/>
+        <p:txBody>
+          <a:bodyPr/>
+          <a:lstStyle/>
+          <a:p>
+            <a:r>
+              <a:rPr lang="en-US" dirty="0"/>
+              <a:t/>
+            </a:r>
+            <a:endParaRPr lang="en-US" dirty="0"/>
+          </a:p>
+        </p:txBody>
+      </p:sp>
+      <p:sp>
+        <p:nvSpPr>
+          <p:cNvPr id="4" name="Slide Number Placeholder 3"/>
+          <p:cNvSpPr>
+            <a:spLocks noGrp="1"/>
+          </p:cNvSpPr>
+          <p:nvPr>
+            <p:ph type="sldNum" sz="quarter" idx="10"/>
+          </p:nvPr>
+        </p:nvSpPr>
+        <p:spPr/>
+        <p:txBody>
+          <a:bodyPr/>
+          <a:lstStyle/>
+          <a:p>
+            <a:fld id="{F7021451-1387-4CA6-816F-3879F97B5CBC}" type="slidenum">
+              <a:rPr lang="en-US"/>
+              <a:t>17</a:t>
+            </a:fld>
+            <a:endParaRPr lang="en-US"/>
+          </a:p>
+        </p:txBody>
+      </p:sp>
+    </p:spTree>
+    <p:extLst>
+      <p:ext uri="{BB962C8B-B14F-4D97-AF65-F5344CB8AC3E}">
+        <p14:creationId xmlns:p14="http://schemas.microsoft.com/office/powerpoint/2010/main" val="1024086991"/>
+      </p:ext>
+    </p:extLst>
+  </p:cSld>
+  <p:clrMapOvr>
+    <a:masterClrMapping/>
+  </p:clrMapOvr>
+</p:notes>
+</file>
+
+<file path=ppt/notesSlides/notesSlide18.xml><?xml version="1.0" encoding="utf-8"?>
+<p:notes xmlns:a="http://schemas.openxmlformats.org/drawingml/2006/main" xmlns:r="http://schemas.openxmlformats.org/officeDocument/2006/relationships" xmlns:p="http://schemas.openxmlformats.org/presentationml/2006/main">
+  <p:cSld>
+    <p:spTree>
+      <p:nvGrpSpPr>
+        <p:cNvPr id="1" name=""/>
+        <p:cNvGrpSpPr/>
+        <p:nvPr/>
+      </p:nvGrpSpPr>
+      <p:grpSpPr>
+        <a:xfrm>
+          <a:off x="0" y="0"/>
+          <a:ext cx="0" cy="0"/>
+          <a:chOff x="0" y="0"/>
+          <a:chExt cx="0" cy="0"/>
+        </a:xfrm>
+      </p:grpSpPr>
+      <p:sp>
+        <p:nvSpPr>
+          <p:cNvPr id="2" name="Slide Image Placeholder 1"/>
+          <p:cNvSpPr>
+            <a:spLocks noGrp="1" noRot="1" noChangeAspect="1"/>
+          </p:cNvSpPr>
+          <p:nvPr>
+            <p:ph type="sldImg"/>
+          </p:nvPr>
+        </p:nvSpPr>
+        <p:spPr/>
+      </p:sp>
+      <p:sp>
+        <p:nvSpPr>
+          <p:cNvPr id="3" name="Notes Placeholder 2"/>
+          <p:cNvSpPr>
+            <a:spLocks noGrp="1"/>
+          </p:cNvSpPr>
+          <p:nvPr>
+            <p:ph type="body" idx="1"/>
+          </p:nvPr>
+        </p:nvSpPr>
+        <p:spPr/>
+        <p:txBody>
+          <a:bodyPr/>
+          <a:lstStyle/>
+          <a:p>
+            <a:r>
+              <a:rPr lang="en-US" dirty="0"/>
+              <a:t/>
+            </a:r>
+            <a:endParaRPr lang="en-US" dirty="0"/>
+          </a:p>
+        </p:txBody>
+      </p:sp>
+      <p:sp>
+        <p:nvSpPr>
+          <p:cNvPr id="4" name="Slide Number Placeholder 3"/>
+          <p:cNvSpPr>
+            <a:spLocks noGrp="1"/>
+          </p:cNvSpPr>
+          <p:nvPr>
+            <p:ph type="sldNum" sz="quarter" idx="10"/>
+          </p:nvPr>
+        </p:nvSpPr>
+        <p:spPr/>
+        <p:txBody>
+          <a:bodyPr/>
+          <a:lstStyle/>
+          <a:p>
+            <a:fld id="{F7021451-1387-4CA6-816F-3879F97B5CBC}" type="slidenum">
+              <a:rPr lang="en-US"/>
+              <a:t>18</a:t>
             </a:fld>
             <a:endParaRPr lang="en-US"/>
           </a:p>
@@ -2140,194 +2674,6 @@
         </p:nvSpPr>
         <p:spPr>
           <a:xfrm>
-            <a:off x="406301" y="1223963"/>
-            <a:ext cx="8498026" cy="274290"/>
-          </a:xfrm>
-          <a:prstGeom prst="rect">
-            <a:avLst/>
-          </a:prstGeom>
-          <a:noFill/>
-          <a:ln/>
-        </p:spPr>
-        <p:txBody>
-          <a:bodyPr wrap="square" lIns="0" tIns="0" rIns="0" bIns="0" rtlCol="0" anchor="t"/>
-          <a:lstStyle/>
-          <a:p>
-            <a:pPr algn="l" indent="0" marL="0">
-              <a:lnSpc>
-                <a:spcPts val="2160"/>
-              </a:lnSpc>
-              <a:spcBef>
-                <a:spcPts val="600"/>
-              </a:spcBef>
-              <a:spcAft>
-                <a:spcPts val="800"/>
-              </a:spcAft>
-              <a:buNone/>
-            </a:pPr>
-            <a:r>
-              <a:rPr lang="en-US" sz="1800" b="1" dirty="0">
-                <a:solidFill>
-                  <a:srgbClr val="FE4447"/>
-                </a:solidFill>
-                <a:latin typeface="Georgia" pitchFamily="34" charset="0"/>
-                <a:ea typeface="Georgia" pitchFamily="34" charset="-122"/>
-                <a:cs typeface="Georgia" pitchFamily="34" charset="-120"/>
-              </a:rPr>
-              <a:t>Learning objective</a:t>
-            </a:r>
-            <a:endParaRPr lang="en-US" sz="1800" dirty="0"/>
-          </a:p>
-        </p:txBody>
-      </p:sp>
-      <p:sp>
-        <p:nvSpPr>
-          <p:cNvPr id="6" name="Text 4"/>
-          <p:cNvSpPr/>
-          <p:nvPr/>
-        </p:nvSpPr>
-        <p:spPr>
-          <a:xfrm>
-            <a:off x="406301" y="1637854"/>
-            <a:ext cx="8498026" cy="639812"/>
-          </a:xfrm>
-          <a:prstGeom prst="rect">
-            <a:avLst/>
-          </a:prstGeom>
-          <a:noFill/>
-          <a:ln/>
-        </p:spPr>
-        <p:txBody>
-          <a:bodyPr wrap="square" lIns="0" tIns="0" rIns="0" bIns="0" rtlCol="0" anchor="t"/>
-          <a:lstStyle/>
-          <a:p>
-            <a:pPr algn="l" indent="0" marL="0">
-              <a:lnSpc>
-                <a:spcPts val="1680"/>
-              </a:lnSpc>
-              <a:spcBef>
-                <a:spcPts val="300"/>
-              </a:spcBef>
-              <a:spcAft>
-                <a:spcPts val="300"/>
-              </a:spcAft>
-              <a:buNone/>
-            </a:pPr>
-            <a:r>
-              <a:rPr lang="en-US" sz="1200" dirty="0">
-                <a:solidFill>
-                  <a:srgbClr val="1C2833"/>
-                </a:solidFill>
-                <a:latin typeface="Arial" pitchFamily="34" charset="0"/>
-                <a:ea typeface="Arial" pitchFamily="34" charset="-122"/>
-                <a:cs typeface="Arial" pitchFamily="34" charset="-120"/>
-              </a:rPr>
-              <a:t>By the end of this lesson, students can identify </a:t>
-            </a:r>
-            <a:pPr algn="l" indent="0" marL="0">
-              <a:lnSpc>
-                <a:spcPts val="1680"/>
-              </a:lnSpc>
-              <a:spcBef>
-                <a:spcPts val="300"/>
-              </a:spcBef>
-              <a:spcAft>
-                <a:spcPts val="300"/>
-              </a:spcAft>
-              <a:buNone/>
-            </a:pPr>
-            <a:r>
-              <a:rPr lang="en-US" sz="1200" i="1" dirty="0">
-                <a:solidFill>
-                  <a:srgbClr val="1C2833"/>
-                </a:solidFill>
-                <a:latin typeface="Arial" pitchFamily="34" charset="0"/>
-                <a:ea typeface="Arial" pitchFamily="34" charset="-122"/>
-                <a:cs typeface="Arial" pitchFamily="34" charset="-120"/>
-              </a:rPr>
-              <a:t>tulasī</a:t>
-            </a:r>
-            <a:pPr algn="l" indent="0" marL="0">
-              <a:lnSpc>
-                <a:spcPts val="1680"/>
-              </a:lnSpc>
-              <a:spcBef>
-                <a:spcPts val="300"/>
-              </a:spcBef>
-              <a:spcAft>
-                <a:spcPts val="300"/>
-              </a:spcAft>
-              <a:buNone/>
-            </a:pPr>
-            <a:r>
-              <a:rPr lang="en-US" sz="1200" dirty="0">
-                <a:solidFill>
-                  <a:srgbClr val="1C2833"/>
-                </a:solidFill>
-                <a:latin typeface="Arial" pitchFamily="34" charset="0"/>
-                <a:ea typeface="Arial" pitchFamily="34" charset="-122"/>
-                <a:cs typeface="Arial" pitchFamily="34" charset="-120"/>
-              </a:rPr>
-              <a:t> (</a:t>
-            </a:r>
-            <a:pPr algn="l" indent="0" marL="0">
-              <a:lnSpc>
-                <a:spcPts val="1680"/>
-              </a:lnSpc>
-              <a:spcBef>
-                <a:spcPts val="300"/>
-              </a:spcBef>
-              <a:spcAft>
-                <a:spcPts val="300"/>
-              </a:spcAft>
-              <a:buNone/>
-            </a:pPr>
-            <a:r>
-              <a:rPr lang="en-US" sz="1200" i="1" dirty="0">
-                <a:solidFill>
-                  <a:srgbClr val="1C2833"/>
-                </a:solidFill>
-                <a:latin typeface="Arial" pitchFamily="34" charset="0"/>
-                <a:ea typeface="Arial" pitchFamily="34" charset="-122"/>
-                <a:cs typeface="Arial" pitchFamily="34" charset="-120"/>
-              </a:rPr>
-              <a:t>Ocimum tenuiflorum</a:t>
-            </a:r>
-            <a:pPr algn="l" indent="0" marL="0">
-              <a:lnSpc>
-                <a:spcPts val="1680"/>
-              </a:lnSpc>
-              <a:spcBef>
-                <a:spcPts val="300"/>
-              </a:spcBef>
-              <a:spcAft>
-                <a:spcPts val="300"/>
-              </a:spcAft>
-              <a:buNone/>
-            </a:pPr>
-            <a:r>
-              <a:rPr lang="en-US" sz="1200" dirty="0">
-                <a:solidFill>
-                  <a:srgbClr val="1C2833"/>
-                </a:solidFill>
-                <a:latin typeface="Arial" pitchFamily="34" charset="0"/>
-                <a:ea typeface="Arial" pitchFamily="34" charset="-122"/>
-                <a:cs typeface="Arial" pitchFamily="34" charset="-120"/>
-              </a:rPr>
-              <a:t>) by leaf shape and crushed-leaf smell, name eugenol as its principal aromatic compound, and describe two traditional culinary or domestic uses without making therapeutic claims.</a:t>
-            </a:r>
-            <a:endParaRPr lang="en-US" sz="1200" dirty="0"/>
-          </a:p>
-        </p:txBody>
-      </p:sp>
-      <p:sp>
-        <p:nvSpPr>
-          <p:cNvPr id="7" name="Text 5"/>
-          <p:cNvSpPr/>
-          <p:nvPr/>
-        </p:nvSpPr>
-        <p:spPr>
-          <a:xfrm>
             <a:off x="406301" y="4434929"/>
             <a:ext cx="8498026" cy="213271"/>
           </a:xfrm>
@@ -2472,7 +2818,7 @@
                 <a:ea typeface="Georgia" pitchFamily="34" charset="-122"/>
                 <a:cs typeface="Georgia" pitchFamily="34" charset="-120"/>
               </a:rPr>
-              <a:t>Differentiation</a:t>
+              <a:t>Core (20 min) (cont.)</a:t>
             </a:r>
             <a:endParaRPr lang="en-US" sz="1800" dirty="0"/>
           </a:p>
@@ -2487,7 +2833,7 @@
         <p:spPr>
           <a:xfrm>
             <a:off x="634901" y="883593"/>
-            <a:ext cx="8102798" cy="731341"/>
+            <a:ext cx="8102798" cy="1104602"/>
           </a:xfrm>
           <a:prstGeom prst="rect">
             <a:avLst/>
@@ -2518,7 +2864,7 @@
                 <a:ea typeface="Arial" pitchFamily="34" charset="-122"/>
                 <a:cs typeface="Arial" pitchFamily="34" charset="-120"/>
               </a:rPr>
-              <a:t>One tier up:</a:t>
+              <a:t>What we won't claim.</a:t>
             </a:r>
             <a:pPr algn="l" indent="0" marL="0">
               <a:lnSpc>
@@ -2538,7 +2884,7 @@
                 <a:ea typeface="Arial" pitchFamily="34" charset="-122"/>
                 <a:cs typeface="Arial" pitchFamily="34" charset="-120"/>
               </a:rPr>
-              <a:t> Sweet basil (</a:t>
+              <a:t> Tulsi is sometimes marketed in capsules as an "adaptogen" — a label that means "helps your body handle stress." There is </a:t>
             </a:r>
             <a:pPr algn="l" indent="0" marL="0">
               <a:lnSpc>
@@ -2558,7 +2904,7 @@
                 <a:ea typeface="Arial" pitchFamily="34" charset="-122"/>
                 <a:cs typeface="Arial" pitchFamily="34" charset="-120"/>
               </a:rPr>
-              <a:t>Ocimum basilicum</a:t>
+              <a:t>some</a:t>
             </a:r>
             <a:pPr algn="l" indent="0" marL="0">
               <a:lnSpc>
@@ -2578,20 +2924,16 @@
                 <a:ea typeface="Arial" pitchFamily="34" charset="-122"/>
                 <a:cs typeface="Arial" pitchFamily="34" charset="-120"/>
               </a:rPr>
-              <a:t>) has the same genus as tulsi but different uses. What chemical does sweet basil contain that tulsi doesn't dominate in (Hint: linalool)? Why does Italian cuisine use sweet basil but not tulsi?</a:t>
-            </a:r>
-            <a:endParaRPr lang="en-US" sz="1200" dirty="0"/>
-          </a:p>
-          <a:p>
-            <a:pPr algn="l" marL="342900" indent="-342900">
+              <a:t> mechanistic evidence (anti-inflammatory effects from eugenol and other compounds), but clinical trial evidence is </a:t>
+            </a:r>
+            <a:pPr algn="l" indent="0" marL="0">
               <a:lnSpc>
                 <a:spcPts val="1620"/>
               </a:lnSpc>
               <a:spcAft>
                 <a:spcPts val="300"/>
               </a:spcAft>
-              <a:buSzPct val="100000"/>
-              <a:buChar char="•"/>
+              <a:buNone/>
             </a:pPr>
             <a:r>
               <a:rPr lang="en-US" sz="1200" b="1" dirty="0">
@@ -2602,7 +2944,7 @@
                 <a:ea typeface="Arial" pitchFamily="34" charset="-122"/>
                 <a:cs typeface="Arial" pitchFamily="34" charset="-120"/>
               </a:rPr>
-              <a:t>One tier down:</a:t>
+              <a:t>mixed</a:t>
             </a:r>
             <a:pPr algn="l" indent="0" marL="0">
               <a:lnSpc>
@@ -2622,7 +2964,7 @@
                 <a:ea typeface="Arial" pitchFamily="34" charset="-122"/>
                 <a:cs typeface="Arial" pitchFamily="34" charset="-120"/>
               </a:rPr>
-              <a:t> Just remember the leaf shape and the word "eugenol." Smell-recognition will come with repetition.</a:t>
+              <a:t>. Saying "tulsi reduces stress" as a blanket claim isn't honest; saying "people have used tulsi as a calming household scent for a long time and there is preliminary evidence of physiological effects" is more accurate.</a:t>
             </a:r>
             <a:endParaRPr lang="en-US" sz="1200" dirty="0"/>
           </a:p>
@@ -2780,7 +3122,7 @@
                 <a:ea typeface="Georgia" pitchFamily="34" charset="-122"/>
                 <a:cs typeface="Georgia" pitchFamily="34" charset="-120"/>
               </a:rPr>
-              <a:t>Teacher notes</a:t>
+              <a:t>Activity (15 min) — Smell-and-sketch</a:t>
             </a:r>
             <a:endParaRPr lang="en-US" sz="1800" dirty="0"/>
           </a:p>
@@ -2794,8 +3136,8 @@
         </p:nvSpPr>
         <p:spPr>
           <a:xfrm>
-            <a:off x="406301" y="870942"/>
-            <a:ext cx="8498026" cy="853083"/>
+            <a:off x="634901" y="883593"/>
+            <a:ext cx="8102798" cy="1218902"/>
           </a:xfrm>
           <a:prstGeom prst="rect">
             <a:avLst/>
@@ -2807,17 +3149,15 @@
           <a:bodyPr wrap="square" lIns="0" tIns="0" rIns="0" bIns="0" rtlCol="0" anchor="t"/>
           <a:lstStyle/>
           <a:p>
-            <a:pPr algn="l" indent="0" marL="0">
-              <a:lnSpc>
-                <a:spcPts val="1680"/>
-              </a:lnSpc>
-              <a:spcBef>
-                <a:spcPts val="300"/>
-              </a:spcBef>
-              <a:spcAft>
-                <a:spcPts val="300"/>
-              </a:spcAft>
-              <a:buNone/>
+            <a:pPr algn="l" marL="342900" indent="-342900">
+              <a:lnSpc>
+                <a:spcPts val="1620"/>
+              </a:lnSpc>
+              <a:spcAft>
+                <a:spcPts val="300"/>
+              </a:spcAft>
+              <a:buSzPct val="100000"/>
+              <a:buChar char="•"/>
             </a:pPr>
             <a:r>
               <a:rPr lang="en-US" sz="1200" dirty="0">
@@ -2828,7 +3168,119 @@
                 <a:ea typeface="Arial" pitchFamily="34" charset="-122"/>
                 <a:cs typeface="Arial" pitchFamily="34" charset="-120"/>
               </a:rPr>
-              <a:t>– If a student tells the class that tulsi is worshipped in their home, acknowledge respectfully: "Yes — many homes treat the tulsi plant as sacred. We're studying it here as a plant with specific chemistry; both framings can coexist." – The clove-tulsi connection is the most memorable hook. Lean into it. – Some students will react strongly to the smell of crushed tulsi (it can be quite sharp). Don't put it under their nose — let them choose their distance.</a:t>
+              <a:t>Each student gets a piece of paper and crayons.</a:t>
+            </a:r>
+            <a:endParaRPr lang="en-US" sz="1200" dirty="0"/>
+          </a:p>
+          <a:p>
+            <a:pPr algn="l" marL="342900" indent="-342900">
+              <a:lnSpc>
+                <a:spcPts val="1620"/>
+              </a:lnSpc>
+              <a:spcAft>
+                <a:spcPts val="300"/>
+              </a:spcAft>
+              <a:buSzPct val="100000"/>
+              <a:buChar char="•"/>
+            </a:pPr>
+            <a:r>
+              <a:rPr lang="en-US" sz="1200" dirty="0">
+                <a:solidFill>
+                  <a:srgbClr val="1C2833"/>
+                </a:solidFill>
+                <a:latin typeface="Arial" pitchFamily="34" charset="0"/>
+                <a:ea typeface="Arial" pitchFamily="34" charset="-122"/>
+                <a:cs typeface="Arial" pitchFamily="34" charset="-120"/>
+              </a:rPr>
+              <a:t>Draw the tulsi leaf — accurate to shape, edge, and size. Label: leaf shape (ovate), edge (serrate), family (Lamiaceae, square stem).</a:t>
+            </a:r>
+            <a:endParaRPr lang="en-US" sz="1200" dirty="0"/>
+          </a:p>
+          <a:p>
+            <a:pPr algn="l" marL="342900" indent="-342900">
+              <a:lnSpc>
+                <a:spcPts val="1620"/>
+              </a:lnSpc>
+              <a:spcAft>
+                <a:spcPts val="300"/>
+              </a:spcAft>
+              <a:buSzPct val="100000"/>
+              <a:buChar char="•"/>
+            </a:pPr>
+            <a:r>
+              <a:rPr lang="en-US" sz="1200" dirty="0">
+                <a:solidFill>
+                  <a:srgbClr val="1C2833"/>
+                </a:solidFill>
+                <a:latin typeface="Arial" pitchFamily="34" charset="0"/>
+                <a:ea typeface="Arial" pitchFamily="34" charset="-122"/>
+                <a:cs typeface="Arial" pitchFamily="34" charset="-120"/>
+              </a:rPr>
+              <a:t>Below the drawing, write one sentence: </a:t>
+            </a:r>
+            <a:pPr algn="l" indent="0" marL="0">
+              <a:lnSpc>
+                <a:spcPts val="1620"/>
+              </a:lnSpc>
+              <a:spcAft>
+                <a:spcPts val="300"/>
+              </a:spcAft>
+              <a:buNone/>
+            </a:pPr>
+            <a:r>
+              <a:rPr lang="en-US" sz="1200" i="1" dirty="0">
+                <a:solidFill>
+                  <a:srgbClr val="1C2833"/>
+                </a:solidFill>
+                <a:latin typeface="Arial" pitchFamily="34" charset="0"/>
+                <a:ea typeface="Arial" pitchFamily="34" charset="-122"/>
+                <a:cs typeface="Arial" pitchFamily="34" charset="-120"/>
+              </a:rPr>
+              <a:t>"What I smelled when I crushed the leaf was ____."</a:t>
+            </a:r>
+            <a:endParaRPr lang="en-US" sz="1200" dirty="0"/>
+          </a:p>
+          <a:p>
+            <a:pPr algn="l" marL="342900" indent="-342900">
+              <a:lnSpc>
+                <a:spcPts val="1620"/>
+              </a:lnSpc>
+              <a:spcAft>
+                <a:spcPts val="300"/>
+              </a:spcAft>
+              <a:buSzPct val="100000"/>
+              <a:buChar char="•"/>
+            </a:pPr>
+            <a:r>
+              <a:rPr lang="en-US" sz="1200" dirty="0">
+                <a:solidFill>
+                  <a:srgbClr val="1C2833"/>
+                </a:solidFill>
+                <a:latin typeface="Arial" pitchFamily="34" charset="0"/>
+                <a:ea typeface="Arial" pitchFamily="34" charset="-122"/>
+                <a:cs typeface="Arial" pitchFamily="34" charset="-120"/>
+              </a:rPr>
+              <a:t>Below that, the chemistry box: </a:t>
+            </a:r>
+            <a:pPr algn="l" indent="0" marL="0">
+              <a:lnSpc>
+                <a:spcPts val="1620"/>
+              </a:lnSpc>
+              <a:spcAft>
+                <a:spcPts val="300"/>
+              </a:spcAft>
+              <a:buNone/>
+            </a:pPr>
+            <a:r>
+              <a:rPr lang="en-US" sz="1200" b="1" dirty="0">
+                <a:solidFill>
+                  <a:srgbClr val="1C2833"/>
+                </a:solidFill>
+                <a:latin typeface="Arial" pitchFamily="34" charset="0"/>
+                <a:ea typeface="Arial" pitchFamily="34" charset="-122"/>
+                <a:cs typeface="Arial" pitchFamily="34" charset="-120"/>
+              </a:rPr>
+              <a:t>Active compound: eugenol.</a:t>
             </a:r>
             <a:endParaRPr lang="en-US" sz="1200" dirty="0"/>
           </a:p>
@@ -2986,7 +3438,7 @@
                 <a:ea typeface="Georgia" pitchFamily="34" charset="-122"/>
                 <a:cs typeface="Georgia" pitchFamily="34" charset="-120"/>
               </a:rPr>
-              <a:t>Citation(s) used in this lesson</a:t>
+              <a:t>Activity (15 min) — Smell-and-sketch (cont.)</a:t>
             </a:r>
             <a:endParaRPr lang="en-US" sz="1800" dirty="0"/>
           </a:p>
@@ -3034,7 +3486,7 @@
                 <a:ea typeface="Arial" pitchFamily="34" charset="-122"/>
                 <a:cs typeface="Arial" pitchFamily="34" charset="-120"/>
               </a:rPr>
-              <a:t>– General phytochemistry: eugenol as principal volatile in </a:t>
+              <a:t>Optional: pass around the sweet basil (or any other Lamiaceae) for comparison. </a:t>
             </a:r>
             <a:pPr algn="l" indent="0" marL="0">
               <a:lnSpc>
@@ -3057,15 +3509,2071 @@
                 <a:ea typeface="Arial" pitchFamily="34" charset="-122"/>
                 <a:cs typeface="Arial" pitchFamily="34" charset="-120"/>
               </a:rPr>
+              <a:t>"Different leaf? Different smell? They are the same plant family but different species."</a:t>
+            </a:r>
+            <a:endParaRPr lang="en-US" sz="1200" dirty="0"/>
+          </a:p>
+        </p:txBody>
+      </p:sp>
+      <p:sp>
+        <p:nvSpPr>
+          <p:cNvPr id="5" name="Text 3"/>
+          <p:cNvSpPr/>
+          <p:nvPr/>
+        </p:nvSpPr>
+        <p:spPr>
+          <a:xfrm>
+            <a:off x="406301" y="4434929"/>
+            <a:ext cx="8498026" cy="213271"/>
+          </a:xfrm>
+          <a:prstGeom prst="rect">
+            <a:avLst/>
+          </a:prstGeom>
+          <a:noFill/>
+          <a:ln/>
+        </p:spPr>
+        <p:txBody>
+          <a:bodyPr wrap="square" lIns="0" tIns="0" rIns="0" bIns="0" rtlCol="0" anchor="t"/>
+          <a:lstStyle/>
+          <a:p>
+            <a:pPr algn="l" indent="0" marL="0">
+              <a:lnSpc>
+                <a:spcPts val="1680"/>
+              </a:lnSpc>
+              <a:spcBef>
+                <a:spcPts val="300"/>
+              </a:spcBef>
+              <a:spcAft>
+                <a:spcPts val="300"/>
+              </a:spcAft>
+              <a:buNone/>
+            </a:pPr>
+            <a:r>
+              <a:rPr lang="en-US" sz="1200" dirty="0">
+                <a:solidFill>
+                  <a:srgbClr val="1C2833"/>
+                </a:solidFill>
+                <a:latin typeface="Arial" pitchFamily="34" charset="0"/>
+                <a:ea typeface="Arial" pitchFamily="34" charset="-122"/>
+                <a:cs typeface="Arial" pitchFamily="34" charset="-120"/>
+              </a:rPr>
+              <a:t>Middle ·  · IKS Curriculum</a:t>
+            </a:r>
+            <a:endParaRPr lang="en-US" sz="1200" dirty="0"/>
+          </a:p>
+        </p:txBody>
+      </p:sp>
+    </p:spTree>
+  </p:cSld>
+  <p:clrMapOvr>
+    <a:masterClrMapping/>
+  </p:clrMapOvr>
+</p:sld>
+</file>
+
+<file path=ppt/slides/slide13.xml><?xml version="1.0" encoding="utf-8"?>
+<p:sld xmlns:a="http://schemas.openxmlformats.org/drawingml/2006/main" xmlns:r="http://schemas.openxmlformats.org/officeDocument/2006/relationships" xmlns:p="http://schemas.openxmlformats.org/presentationml/2006/main">
+  <p:cSld name="Slide 13">
+    <p:bg>
+      <p:bgPr>
+        <a:solidFill>
+          <a:srgbClr val="FFFFFF"/>
+        </a:solidFill>
+      </p:bgPr>
+    </p:bg>
+    <p:spTree>
+      <p:nvGrpSpPr>
+        <p:cNvPr id="1" name=""/>
+        <p:cNvGrpSpPr/>
+        <p:nvPr/>
+      </p:nvGrpSpPr>
+      <p:grpSpPr>
+        <a:xfrm>
+          <a:off x="0" y="0"/>
+          <a:ext cx="0" cy="0"/>
+          <a:chOff x="0" y="0"/>
+          <a:chExt cx="0" cy="0"/>
+        </a:xfrm>
+      </p:grpSpPr>
+      <p:sp>
+        <p:nvSpPr>
+          <p:cNvPr id="2" name="Text 0"/>
+          <p:cNvSpPr/>
+          <p:nvPr/>
+        </p:nvSpPr>
+        <p:spPr>
+          <a:xfrm>
+            <a:off x="0" y="0"/>
+            <a:ext cx="9144000" cy="101501"/>
+          </a:xfrm>
+          <a:prstGeom prst="rect">
+            <a:avLst/>
+          </a:prstGeom>
+          <a:solidFill>
+            <a:srgbClr val="277884"/>
+          </a:solidFill>
+          <a:ln/>
+        </p:spPr>
+        <p:txBody>
+          <a:bodyPr wrap="square" rtlCol="0" anchor="ctr"/>
+          <a:lstStyle/>
+          <a:p>
+            <a:pPr indent="0" marL="0">
+              <a:buNone/>
+            </a:pPr>
+            <a:endParaRPr lang="en-US" dirty="0"/>
+          </a:p>
+        </p:txBody>
+      </p:sp>
+      <p:sp>
+        <p:nvSpPr>
+          <p:cNvPr id="3" name="Text 1"/>
+          <p:cNvSpPr/>
+          <p:nvPr/>
+        </p:nvSpPr>
+        <p:spPr>
+          <a:xfrm>
+            <a:off x="406301" y="457051"/>
+            <a:ext cx="8498026" cy="274290"/>
+          </a:xfrm>
+          <a:prstGeom prst="rect">
+            <a:avLst/>
+          </a:prstGeom>
+          <a:noFill/>
+          <a:ln/>
+        </p:spPr>
+        <p:txBody>
+          <a:bodyPr wrap="square" lIns="0" tIns="0" rIns="0" bIns="0" rtlCol="0" anchor="t"/>
+          <a:lstStyle/>
+          <a:p>
+            <a:pPr algn="l" indent="0" marL="0">
+              <a:lnSpc>
+                <a:spcPts val="2160"/>
+              </a:lnSpc>
+              <a:spcBef>
+                <a:spcPts val="600"/>
+              </a:spcBef>
+              <a:spcAft>
+                <a:spcPts val="800"/>
+              </a:spcAft>
+              <a:buNone/>
+            </a:pPr>
+            <a:r>
+              <a:rPr lang="en-US" sz="1800" b="1" dirty="0">
+                <a:solidFill>
+                  <a:srgbClr val="FE4447"/>
+                </a:solidFill>
+                <a:latin typeface="Georgia" pitchFamily="34" charset="0"/>
+                <a:ea typeface="Georgia" pitchFamily="34" charset="-122"/>
+                <a:cs typeface="Georgia" pitchFamily="34" charset="-120"/>
+              </a:rPr>
+              <a:t>Wrap-up (5 min)</a:t>
+            </a:r>
+            <a:endParaRPr lang="en-US" sz="1800" dirty="0"/>
+          </a:p>
+        </p:txBody>
+      </p:sp>
+      <p:sp>
+        <p:nvSpPr>
+          <p:cNvPr id="4" name="Text 2"/>
+          <p:cNvSpPr/>
+          <p:nvPr/>
+        </p:nvSpPr>
+        <p:spPr>
+          <a:xfrm>
+            <a:off x="634901" y="883593"/>
+            <a:ext cx="8102798" cy="769441"/>
+          </a:xfrm>
+          <a:prstGeom prst="rect">
+            <a:avLst/>
+          </a:prstGeom>
+          <a:noFill/>
+          <a:ln/>
+        </p:spPr>
+        <p:txBody>
+          <a:bodyPr wrap="square" lIns="0" tIns="0" rIns="0" bIns="0" rtlCol="0" anchor="t"/>
+          <a:lstStyle/>
+          <a:p>
+            <a:pPr algn="l" marL="342900" indent="-342900">
+              <a:lnSpc>
+                <a:spcPts val="1620"/>
+              </a:lnSpc>
+              <a:spcAft>
+                <a:spcPts val="300"/>
+              </a:spcAft>
+              <a:buSzPct val="100000"/>
+              <a:buChar char="•"/>
+            </a:pPr>
+            <a:r>
+              <a:rPr lang="en-US" sz="1200" dirty="0">
+                <a:solidFill>
+                  <a:srgbClr val="1C2833"/>
+                </a:solidFill>
+                <a:latin typeface="Arial" pitchFamily="34" charset="0"/>
+                <a:ea typeface="Arial" pitchFamily="34" charset="-122"/>
+                <a:cs typeface="Arial" pitchFamily="34" charset="-120"/>
+              </a:rPr>
+              <a:t>Exit ticket on a slip: </a:t>
+            </a:r>
+            <a:pPr algn="l" indent="0" marL="0">
+              <a:lnSpc>
+                <a:spcPts val="1620"/>
+              </a:lnSpc>
+              <a:spcAft>
+                <a:spcPts val="300"/>
+              </a:spcAft>
+              <a:buNone/>
+            </a:pPr>
+            <a:r>
+              <a:rPr lang="en-US" sz="1200" i="1" dirty="0">
+                <a:solidFill>
+                  <a:srgbClr val="1C2833"/>
+                </a:solidFill>
+                <a:latin typeface="Arial" pitchFamily="34" charset="0"/>
+                <a:ea typeface="Arial" pitchFamily="34" charset="-122"/>
+                <a:cs typeface="Arial" pitchFamily="34" charset="-120"/>
+              </a:rPr>
+              <a:t>"Write the Sanskrit name and the principal aromatic compound of today's herb."</a:t>
+            </a:r>
+            <a:endParaRPr lang="en-US" sz="1200" dirty="0"/>
+          </a:p>
+          <a:p>
+            <a:pPr algn="l" marL="342900" indent="-342900">
+              <a:lnSpc>
+                <a:spcPts val="1620"/>
+              </a:lnSpc>
+              <a:spcAft>
+                <a:spcPts val="300"/>
+              </a:spcAft>
+              <a:buSzPct val="100000"/>
+              <a:buChar char="•"/>
+            </a:pPr>
+            <a:r>
+              <a:rPr lang="en-US" sz="1200" dirty="0">
+                <a:solidFill>
+                  <a:srgbClr val="1C2833"/>
+                </a:solidFill>
+                <a:latin typeface="Arial" pitchFamily="34" charset="0"/>
+                <a:ea typeface="Arial" pitchFamily="34" charset="-122"/>
+                <a:cs typeface="Arial" pitchFamily="34" charset="-120"/>
+              </a:rPr>
+              <a:t>Restate the safety rule chorally.</a:t>
+            </a:r>
+            <a:endParaRPr lang="en-US" sz="1200" dirty="0"/>
+          </a:p>
+          <a:p>
+            <a:pPr algn="l" marL="342900" indent="-342900">
+              <a:lnSpc>
+                <a:spcPts val="1620"/>
+              </a:lnSpc>
+              <a:spcAft>
+                <a:spcPts val="300"/>
+              </a:spcAft>
+              <a:buSzPct val="100000"/>
+              <a:buChar char="•"/>
+            </a:pPr>
+            <a:r>
+              <a:rPr lang="en-US" sz="1200" dirty="0">
+                <a:solidFill>
+                  <a:srgbClr val="1C2833"/>
+                </a:solidFill>
+                <a:latin typeface="Arial" pitchFamily="34" charset="0"/>
+                <a:ea typeface="Arial" pitchFamily="34" charset="-122"/>
+                <a:cs typeface="Arial" pitchFamily="34" charset="-120"/>
+              </a:rPr>
+              <a:t>Preview Day 3: </a:t>
+            </a:r>
+            <a:pPr algn="l" indent="0" marL="0">
+              <a:lnSpc>
+                <a:spcPts val="1620"/>
+              </a:lnSpc>
+              <a:spcAft>
+                <a:spcPts val="300"/>
+              </a:spcAft>
+              <a:buNone/>
+            </a:pPr>
+            <a:r>
+              <a:rPr lang="en-US" sz="1200" i="1" dirty="0">
+                <a:solidFill>
+                  <a:srgbClr val="1C2833"/>
+                </a:solidFill>
+                <a:latin typeface="Arial" pitchFamily="34" charset="0"/>
+                <a:ea typeface="Arial" pitchFamily="34" charset="-122"/>
+                <a:cs typeface="Arial" pitchFamily="34" charset="-120"/>
+              </a:rPr>
+              <a:t>"Tomorrow we meet a much less friendly tasting herb — neem."</a:t>
+            </a:r>
+            <a:endParaRPr lang="en-US" sz="1200" dirty="0"/>
+          </a:p>
+        </p:txBody>
+      </p:sp>
+      <p:sp>
+        <p:nvSpPr>
+          <p:cNvPr id="5" name="Text 3"/>
+          <p:cNvSpPr/>
+          <p:nvPr/>
+        </p:nvSpPr>
+        <p:spPr>
+          <a:xfrm>
+            <a:off x="406301" y="4434929"/>
+            <a:ext cx="8498026" cy="213271"/>
+          </a:xfrm>
+          <a:prstGeom prst="rect">
+            <a:avLst/>
+          </a:prstGeom>
+          <a:noFill/>
+          <a:ln/>
+        </p:spPr>
+        <p:txBody>
+          <a:bodyPr wrap="square" lIns="0" tIns="0" rIns="0" bIns="0" rtlCol="0" anchor="t"/>
+          <a:lstStyle/>
+          <a:p>
+            <a:pPr algn="l" indent="0" marL="0">
+              <a:lnSpc>
+                <a:spcPts val="1680"/>
+              </a:lnSpc>
+              <a:spcBef>
+                <a:spcPts val="300"/>
+              </a:spcBef>
+              <a:spcAft>
+                <a:spcPts val="300"/>
+              </a:spcAft>
+              <a:buNone/>
+            </a:pPr>
+            <a:r>
+              <a:rPr lang="en-US" sz="1200" dirty="0">
+                <a:solidFill>
+                  <a:srgbClr val="1C2833"/>
+                </a:solidFill>
+                <a:latin typeface="Arial" pitchFamily="34" charset="0"/>
+                <a:ea typeface="Arial" pitchFamily="34" charset="-122"/>
+                <a:cs typeface="Arial" pitchFamily="34" charset="-120"/>
+              </a:rPr>
+              <a:t>Middle ·  · IKS Curriculum</a:t>
+            </a:r>
+            <a:endParaRPr lang="en-US" sz="1200" dirty="0"/>
+          </a:p>
+        </p:txBody>
+      </p:sp>
+    </p:spTree>
+  </p:cSld>
+  <p:clrMapOvr>
+    <a:masterClrMapping/>
+  </p:clrMapOvr>
+</p:sld>
+</file>
+
+<file path=ppt/slides/slide14.xml><?xml version="1.0" encoding="utf-8"?>
+<p:sld xmlns:a="http://schemas.openxmlformats.org/drawingml/2006/main" xmlns:r="http://schemas.openxmlformats.org/officeDocument/2006/relationships" xmlns:p="http://schemas.openxmlformats.org/presentationml/2006/main">
+  <p:cSld name="Slide 14">
+    <p:bg>
+      <p:bgPr>
+        <a:solidFill>
+          <a:srgbClr val="FFFFFF"/>
+        </a:solidFill>
+      </p:bgPr>
+    </p:bg>
+    <p:spTree>
+      <p:nvGrpSpPr>
+        <p:cNvPr id="1" name=""/>
+        <p:cNvGrpSpPr/>
+        <p:nvPr/>
+      </p:nvGrpSpPr>
+      <p:grpSpPr>
+        <a:xfrm>
+          <a:off x="0" y="0"/>
+          <a:ext cx="0" cy="0"/>
+          <a:chOff x="0" y="0"/>
+          <a:chExt cx="0" cy="0"/>
+        </a:xfrm>
+      </p:grpSpPr>
+      <p:sp>
+        <p:nvSpPr>
+          <p:cNvPr id="2" name="Text 0"/>
+          <p:cNvSpPr/>
+          <p:nvPr/>
+        </p:nvSpPr>
+        <p:spPr>
+          <a:xfrm>
+            <a:off x="0" y="0"/>
+            <a:ext cx="9144000" cy="101501"/>
+          </a:xfrm>
+          <a:prstGeom prst="rect">
+            <a:avLst/>
+          </a:prstGeom>
+          <a:solidFill>
+            <a:srgbClr val="277884"/>
+          </a:solidFill>
+          <a:ln/>
+        </p:spPr>
+        <p:txBody>
+          <a:bodyPr wrap="square" rtlCol="0" anchor="ctr"/>
+          <a:lstStyle/>
+          <a:p>
+            <a:pPr indent="0" marL="0">
+              <a:buNone/>
+            </a:pPr>
+            <a:endParaRPr lang="en-US" dirty="0"/>
+          </a:p>
+        </p:txBody>
+      </p:sp>
+      <p:sp>
+        <p:nvSpPr>
+          <p:cNvPr id="3" name="Text 1"/>
+          <p:cNvSpPr/>
+          <p:nvPr/>
+        </p:nvSpPr>
+        <p:spPr>
+          <a:xfrm>
+            <a:off x="406301" y="457051"/>
+            <a:ext cx="8498026" cy="274290"/>
+          </a:xfrm>
+          <a:prstGeom prst="rect">
+            <a:avLst/>
+          </a:prstGeom>
+          <a:noFill/>
+          <a:ln/>
+        </p:spPr>
+        <p:txBody>
+          <a:bodyPr wrap="square" lIns="0" tIns="0" rIns="0" bIns="0" rtlCol="0" anchor="t"/>
+          <a:lstStyle/>
+          <a:p>
+            <a:pPr algn="l" indent="0" marL="0">
+              <a:lnSpc>
+                <a:spcPts val="2160"/>
+              </a:lnSpc>
+              <a:spcBef>
+                <a:spcPts val="600"/>
+              </a:spcBef>
+              <a:spcAft>
+                <a:spcPts val="800"/>
+              </a:spcAft>
+              <a:buNone/>
+            </a:pPr>
+            <a:r>
+              <a:rPr lang="en-US" sz="1800" b="1" dirty="0">
+                <a:solidFill>
+                  <a:srgbClr val="FE4447"/>
+                </a:solidFill>
+                <a:latin typeface="Georgia" pitchFamily="34" charset="0"/>
+                <a:ea typeface="Georgia" pitchFamily="34" charset="-122"/>
+                <a:cs typeface="Georgia" pitchFamily="34" charset="-120"/>
+              </a:rPr>
+              <a:t>Student-facing content</a:t>
+            </a:r>
+            <a:endParaRPr lang="en-US" sz="1800" dirty="0"/>
+          </a:p>
+        </p:txBody>
+      </p:sp>
+      <p:sp>
+        <p:nvSpPr>
+          <p:cNvPr id="4" name="Text 2"/>
+          <p:cNvSpPr/>
+          <p:nvPr/>
+        </p:nvSpPr>
+        <p:spPr>
+          <a:xfrm>
+            <a:off x="406301" y="883593"/>
+            <a:ext cx="8331398" cy="3188494"/>
+          </a:xfrm>
+          <a:prstGeom prst="rect">
+            <a:avLst/>
+          </a:prstGeom>
+          <a:solidFill>
+            <a:srgbClr val="F4F8F9"/>
+          </a:solidFill>
+          <a:ln/>
+        </p:spPr>
+        <p:txBody>
+          <a:bodyPr wrap="square" rtlCol="0" anchor="ctr"/>
+          <a:lstStyle/>
+          <a:p>
+            <a:pPr indent="0" marL="0">
+              <a:buNone/>
+            </a:pPr>
+            <a:endParaRPr lang="en-US" dirty="0"/>
+          </a:p>
+        </p:txBody>
+      </p:sp>
+      <p:sp>
+        <p:nvSpPr>
+          <p:cNvPr id="5" name="Shape 3"/>
+          <p:cNvSpPr/>
+          <p:nvPr/>
+        </p:nvSpPr>
+        <p:spPr>
+          <a:xfrm>
+            <a:off x="434876" y="883593"/>
+            <a:ext cx="0" cy="3188494"/>
+          </a:xfrm>
+          <a:prstGeom prst="line">
+            <a:avLst/>
+          </a:prstGeom>
+          <a:noFill/>
+          <a:ln w="57150">
+            <a:solidFill>
+              <a:srgbClr val="FE4447"/>
+            </a:solidFill>
+            <a:prstDash val="solid"/>
+          </a:ln>
+        </p:spPr>
+      </p:sp>
+      <p:sp>
+        <p:nvSpPr>
+          <p:cNvPr id="6" name="Text 4"/>
+          <p:cNvSpPr/>
+          <p:nvPr/>
+        </p:nvSpPr>
+        <p:spPr>
+          <a:xfrm>
+            <a:off x="692051" y="1074093"/>
+            <a:ext cx="7973389" cy="230981"/>
+          </a:xfrm>
+          <a:prstGeom prst="rect">
+            <a:avLst/>
+          </a:prstGeom>
+          <a:noFill/>
+          <a:ln/>
+        </p:spPr>
+        <p:txBody>
+          <a:bodyPr wrap="square" lIns="0" tIns="0" rIns="0" bIns="0" rtlCol="0" anchor="t"/>
+          <a:lstStyle/>
+          <a:p>
+            <a:pPr algn="l" indent="0" marL="0">
+              <a:lnSpc>
+                <a:spcPts val="1820"/>
+              </a:lnSpc>
+              <a:spcBef>
+                <a:spcPts val="300"/>
+              </a:spcBef>
+              <a:spcAft>
+                <a:spcPts val="300"/>
+              </a:spcAft>
+              <a:buNone/>
+            </a:pPr>
+            <a:r>
+              <a:rPr lang="en-US" sz="1300" b="1" i="1" dirty="0">
+                <a:solidFill>
+                  <a:srgbClr val="1C2833"/>
+                </a:solidFill>
+                <a:latin typeface="Georgia" pitchFamily="34" charset="0"/>
+                <a:ea typeface="Georgia" pitchFamily="34" charset="-122"/>
+                <a:cs typeface="Georgia" pitchFamily="34" charset="-120"/>
+              </a:rPr>
+              <a:t>Tulasī</a:t>
+            </a:r>
+            <a:pPr algn="l" indent="0" marL="0">
+              <a:lnSpc>
+                <a:spcPts val="1820"/>
+              </a:lnSpc>
+              <a:spcBef>
+                <a:spcPts val="300"/>
+              </a:spcBef>
+              <a:spcAft>
+                <a:spcPts val="300"/>
+              </a:spcAft>
+              <a:buNone/>
+            </a:pPr>
+            <a:r>
+              <a:rPr lang="en-US" sz="1300" dirty="0">
+                <a:solidFill>
+                  <a:srgbClr val="1C2833"/>
+                </a:solidFill>
+                <a:latin typeface="Georgia" pitchFamily="34" charset="0"/>
+                <a:ea typeface="Georgia" pitchFamily="34" charset="-122"/>
+                <a:cs typeface="Georgia" pitchFamily="34" charset="-120"/>
+              </a:rPr>
+              <a:t> (</a:t>
+            </a:r>
+            <a:pPr algn="l" indent="0" marL="0">
+              <a:lnSpc>
+                <a:spcPts val="1820"/>
+              </a:lnSpc>
+              <a:spcBef>
+                <a:spcPts val="300"/>
+              </a:spcBef>
+              <a:spcAft>
+                <a:spcPts val="300"/>
+              </a:spcAft>
+              <a:buNone/>
+            </a:pPr>
+            <a:r>
+              <a:rPr lang="en-US" sz="1300" i="1" dirty="0">
+                <a:solidFill>
+                  <a:srgbClr val="1C2833"/>
+                </a:solidFill>
+                <a:latin typeface="Georgia" pitchFamily="34" charset="0"/>
+                <a:ea typeface="Georgia" pitchFamily="34" charset="-122"/>
+                <a:cs typeface="Georgia" pitchFamily="34" charset="-120"/>
+              </a:rPr>
               <a:t>Ocimum tenuiflorum</a:t>
             </a:r>
             <a:pPr algn="l" indent="0" marL="0">
               <a:lnSpc>
+                <a:spcPts val="1820"/>
+              </a:lnSpc>
+              <a:spcBef>
+                <a:spcPts val="300"/>
+              </a:spcBef>
+              <a:spcAft>
+                <a:spcPts val="300"/>
+              </a:spcAft>
+              <a:buNone/>
+            </a:pPr>
+            <a:r>
+              <a:rPr lang="en-US" sz="1300" dirty="0">
+                <a:solidFill>
+                  <a:srgbClr val="1C2833"/>
+                </a:solidFill>
+                <a:latin typeface="Georgia" pitchFamily="34" charset="0"/>
+                <a:ea typeface="Georgia" pitchFamily="34" charset="-122"/>
+                <a:cs typeface="Georgia" pitchFamily="34" charset="-120"/>
+              </a:rPr>
+              <a:t>) — known in English as holy basil, in Hindi as tulsi.</a:t>
+            </a:r>
+            <a:endParaRPr lang="en-US" sz="1300" dirty="0"/>
+          </a:p>
+        </p:txBody>
+      </p:sp>
+      <p:sp>
+        <p:nvSpPr>
+          <p:cNvPr id="7" name="Text 5"/>
+          <p:cNvSpPr/>
+          <p:nvPr/>
+        </p:nvSpPr>
+        <p:spPr>
+          <a:xfrm>
+            <a:off x="692051" y="1343174"/>
+            <a:ext cx="7973389" cy="230981"/>
+          </a:xfrm>
+          <a:prstGeom prst="rect">
+            <a:avLst/>
+          </a:prstGeom>
+          <a:noFill/>
+          <a:ln/>
+        </p:spPr>
+        <p:txBody>
+          <a:bodyPr wrap="square" lIns="0" tIns="0" rIns="0" bIns="0" rtlCol="0" anchor="t"/>
+          <a:lstStyle/>
+          <a:p>
+            <a:pPr algn="l" indent="0" marL="0">
+              <a:lnSpc>
+                <a:spcPts val="1820"/>
+              </a:lnSpc>
+              <a:spcBef>
+                <a:spcPts val="300"/>
+              </a:spcBef>
+              <a:spcAft>
+                <a:spcPts val="300"/>
+              </a:spcAft>
+              <a:buNone/>
+            </a:pPr>
+            <a:r>
+              <a:rPr lang="en-US" sz="1300" b="1" i="1" dirty="0">
+                <a:solidFill>
+                  <a:srgbClr val="1C2833"/>
+                </a:solidFill>
+                <a:latin typeface="Georgia" pitchFamily="34" charset="0"/>
+                <a:ea typeface="Georgia" pitchFamily="34" charset="-122"/>
+                <a:cs typeface="Georgia" pitchFamily="34" charset="-120"/>
+              </a:rPr>
+              <a:t>How to identify it:</a:t>
+            </a:r>
+            <a:endParaRPr lang="en-US" sz="1300" dirty="0"/>
+          </a:p>
+        </p:txBody>
+      </p:sp>
+      <p:sp>
+        <p:nvSpPr>
+          <p:cNvPr id="8" name="Text 6"/>
+          <p:cNvSpPr/>
+          <p:nvPr/>
+        </p:nvSpPr>
+        <p:spPr>
+          <a:xfrm>
+            <a:off x="692051" y="1612255"/>
+            <a:ext cx="7973389" cy="230981"/>
+          </a:xfrm>
+          <a:prstGeom prst="rect">
+            <a:avLst/>
+          </a:prstGeom>
+          <a:noFill/>
+          <a:ln/>
+        </p:spPr>
+        <p:txBody>
+          <a:bodyPr wrap="square" lIns="0" tIns="0" rIns="0" bIns="0" rtlCol="0" anchor="t"/>
+          <a:lstStyle/>
+          <a:p>
+            <a:pPr algn="l" indent="0" marL="0">
+              <a:lnSpc>
+                <a:spcPts val="1820"/>
+              </a:lnSpc>
+              <a:spcBef>
+                <a:spcPts val="300"/>
+              </a:spcBef>
+              <a:spcAft>
+                <a:spcPts val="300"/>
+              </a:spcAft>
+              <a:buNone/>
+            </a:pPr>
+            <a:r>
+              <a:rPr lang="en-US" sz="1300" i="1" dirty="0">
+                <a:solidFill>
+                  <a:srgbClr val="1C2833"/>
+                </a:solidFill>
+                <a:latin typeface="Georgia" pitchFamily="34" charset="0"/>
+                <a:ea typeface="Georgia" pitchFamily="34" charset="-122"/>
+                <a:cs typeface="Georgia" pitchFamily="34" charset="-120"/>
+              </a:rPr>
+              <a:t>Ovate (oval-pointed) leaf, about 2–5 cm long, with small jagged edges.</a:t>
+            </a:r>
+            <a:endParaRPr lang="en-US" sz="1300" dirty="0"/>
+          </a:p>
+        </p:txBody>
+      </p:sp>
+      <p:sp>
+        <p:nvSpPr>
+          <p:cNvPr id="9" name="Text 7"/>
+          <p:cNvSpPr/>
+          <p:nvPr/>
+        </p:nvSpPr>
+        <p:spPr>
+          <a:xfrm>
+            <a:off x="692051" y="1881336"/>
+            <a:ext cx="7973389" cy="230981"/>
+          </a:xfrm>
+          <a:prstGeom prst="rect">
+            <a:avLst/>
+          </a:prstGeom>
+          <a:noFill/>
+          <a:ln/>
+        </p:spPr>
+        <p:txBody>
+          <a:bodyPr wrap="square" lIns="0" tIns="0" rIns="0" bIns="0" rtlCol="0" anchor="t"/>
+          <a:lstStyle/>
+          <a:p>
+            <a:pPr algn="l" indent="0" marL="0">
+              <a:lnSpc>
+                <a:spcPts val="1820"/>
+              </a:lnSpc>
+              <a:spcBef>
+                <a:spcPts val="300"/>
+              </a:spcBef>
+              <a:spcAft>
+                <a:spcPts val="300"/>
+              </a:spcAft>
+              <a:buNone/>
+            </a:pPr>
+            <a:r>
+              <a:rPr lang="en-US" sz="1300" i="1" dirty="0">
+                <a:solidFill>
+                  <a:srgbClr val="1C2833"/>
+                </a:solidFill>
+                <a:latin typeface="Georgia" pitchFamily="34" charset="0"/>
+                <a:ea typeface="Georgia" pitchFamily="34" charset="-122"/>
+                <a:cs typeface="Georgia" pitchFamily="34" charset="-120"/>
+              </a:rPr>
+              <a:t>Square stem (a feature of the Lamiaceae family).</a:t>
+            </a:r>
+            <a:endParaRPr lang="en-US" sz="1300" dirty="0"/>
+          </a:p>
+        </p:txBody>
+      </p:sp>
+      <p:sp>
+        <p:nvSpPr>
+          <p:cNvPr id="10" name="Text 8"/>
+          <p:cNvSpPr/>
+          <p:nvPr/>
+        </p:nvSpPr>
+        <p:spPr>
+          <a:xfrm>
+            <a:off x="692051" y="2150418"/>
+            <a:ext cx="7973389" cy="230981"/>
+          </a:xfrm>
+          <a:prstGeom prst="rect">
+            <a:avLst/>
+          </a:prstGeom>
+          <a:noFill/>
+          <a:ln/>
+        </p:spPr>
+        <p:txBody>
+          <a:bodyPr wrap="square" lIns="0" tIns="0" rIns="0" bIns="0" rtlCol="0" anchor="t"/>
+          <a:lstStyle/>
+          <a:p>
+            <a:pPr algn="l" indent="0" marL="0">
+              <a:lnSpc>
+                <a:spcPts val="1820"/>
+              </a:lnSpc>
+              <a:spcBef>
+                <a:spcPts val="300"/>
+              </a:spcBef>
+              <a:spcAft>
+                <a:spcPts val="300"/>
+              </a:spcAft>
+              <a:buNone/>
+            </a:pPr>
+            <a:r>
+              <a:rPr lang="en-US" sz="1300" i="1" dirty="0">
+                <a:solidFill>
+                  <a:srgbClr val="1C2833"/>
+                </a:solidFill>
+                <a:latin typeface="Georgia" pitchFamily="34" charset="0"/>
+                <a:ea typeface="Georgia" pitchFamily="34" charset="-122"/>
+                <a:cs typeface="Georgia" pitchFamily="34" charset="-120"/>
+              </a:rPr>
+              <a:t>Strong, sharp, clove-like smell when you rub a leaf between your fingers.</a:t>
+            </a:r>
+            <a:endParaRPr lang="en-US" sz="1300" dirty="0"/>
+          </a:p>
+        </p:txBody>
+      </p:sp>
+      <p:sp>
+        <p:nvSpPr>
+          <p:cNvPr id="11" name="Text 9"/>
+          <p:cNvSpPr/>
+          <p:nvPr/>
+        </p:nvSpPr>
+        <p:spPr>
+          <a:xfrm>
+            <a:off x="692051" y="2419499"/>
+            <a:ext cx="7973389" cy="461963"/>
+          </a:xfrm>
+          <a:prstGeom prst="rect">
+            <a:avLst/>
+          </a:prstGeom>
+          <a:noFill/>
+          <a:ln/>
+        </p:spPr>
+        <p:txBody>
+          <a:bodyPr wrap="square" lIns="0" tIns="0" rIns="0" bIns="0" rtlCol="0" anchor="t"/>
+          <a:lstStyle/>
+          <a:p>
+            <a:pPr algn="l" indent="0" marL="0">
+              <a:lnSpc>
+                <a:spcPts val="1820"/>
+              </a:lnSpc>
+              <a:spcBef>
+                <a:spcPts val="300"/>
+              </a:spcBef>
+              <a:spcAft>
+                <a:spcPts val="300"/>
+              </a:spcAft>
+              <a:buNone/>
+            </a:pPr>
+            <a:r>
+              <a:rPr lang="en-US" sz="1300" b="1" i="1" dirty="0">
+                <a:solidFill>
+                  <a:srgbClr val="1C2833"/>
+                </a:solidFill>
+                <a:latin typeface="Georgia" pitchFamily="34" charset="0"/>
+                <a:ea typeface="Georgia" pitchFamily="34" charset="-122"/>
+                <a:cs typeface="Georgia" pitchFamily="34" charset="-120"/>
+              </a:rPr>
+              <a:t>What's inside:</a:t>
+            </a:r>
+            <a:pPr algn="l" indent="0" marL="0">
+              <a:lnSpc>
+                <a:spcPts val="1820"/>
+              </a:lnSpc>
+              <a:spcBef>
+                <a:spcPts val="300"/>
+              </a:spcBef>
+              <a:spcAft>
+                <a:spcPts val="300"/>
+              </a:spcAft>
+              <a:buNone/>
+            </a:pPr>
+            <a:r>
+              <a:rPr lang="en-US" sz="1300" dirty="0">
+                <a:solidFill>
+                  <a:srgbClr val="1C2833"/>
+                </a:solidFill>
+                <a:latin typeface="Georgia" pitchFamily="34" charset="0"/>
+                <a:ea typeface="Georgia" pitchFamily="34" charset="-122"/>
+                <a:cs typeface="Georgia" pitchFamily="34" charset="-120"/>
+              </a:rPr>
+              <a:t> The main aromatic compound is </a:t>
+            </a:r>
+            <a:pPr algn="l" indent="0" marL="0">
+              <a:lnSpc>
+                <a:spcPts val="1820"/>
+              </a:lnSpc>
+              <a:spcBef>
+                <a:spcPts val="300"/>
+              </a:spcBef>
+              <a:spcAft>
+                <a:spcPts val="300"/>
+              </a:spcAft>
+              <a:buNone/>
+            </a:pPr>
+            <a:r>
+              <a:rPr lang="en-US" sz="1300" b="1" i="1" dirty="0">
+                <a:solidFill>
+                  <a:srgbClr val="1C2833"/>
+                </a:solidFill>
+                <a:latin typeface="Georgia" pitchFamily="34" charset="0"/>
+                <a:ea typeface="Georgia" pitchFamily="34" charset="-122"/>
+                <a:cs typeface="Georgia" pitchFamily="34" charset="-120"/>
+              </a:rPr>
+              <a:t>eugenol</a:t>
+            </a:r>
+            <a:pPr algn="l" indent="0" marL="0">
+              <a:lnSpc>
+                <a:spcPts val="1820"/>
+              </a:lnSpc>
+              <a:spcBef>
+                <a:spcPts val="300"/>
+              </a:spcBef>
+              <a:spcAft>
+                <a:spcPts val="300"/>
+              </a:spcAft>
+              <a:buNone/>
+            </a:pPr>
+            <a:r>
+              <a:rPr lang="en-US" sz="1300" dirty="0">
+                <a:solidFill>
+                  <a:srgbClr val="1C2833"/>
+                </a:solidFill>
+                <a:latin typeface="Georgia" pitchFamily="34" charset="0"/>
+                <a:ea typeface="Georgia" pitchFamily="34" charset="-122"/>
+                <a:cs typeface="Georgia" pitchFamily="34" charset="-120"/>
+              </a:rPr>
+              <a:t> — also the principal aromatic in actual clove. The plant produces it as a chemical defence.</a:t>
+            </a:r>
+            <a:endParaRPr lang="en-US" sz="1300" dirty="0"/>
+          </a:p>
+        </p:txBody>
+      </p:sp>
+      <p:sp>
+        <p:nvSpPr>
+          <p:cNvPr id="12" name="Text 10"/>
+          <p:cNvSpPr/>
+          <p:nvPr/>
+        </p:nvSpPr>
+        <p:spPr>
+          <a:xfrm>
+            <a:off x="692051" y="2919561"/>
+            <a:ext cx="7973389" cy="461963"/>
+          </a:xfrm>
+          <a:prstGeom prst="rect">
+            <a:avLst/>
+          </a:prstGeom>
+          <a:noFill/>
+          <a:ln/>
+        </p:spPr>
+        <p:txBody>
+          <a:bodyPr wrap="square" lIns="0" tIns="0" rIns="0" bIns="0" rtlCol="0" anchor="t"/>
+          <a:lstStyle/>
+          <a:p>
+            <a:pPr algn="l" indent="0" marL="0">
+              <a:lnSpc>
+                <a:spcPts val="1820"/>
+              </a:lnSpc>
+              <a:spcBef>
+                <a:spcPts val="300"/>
+              </a:spcBef>
+              <a:spcAft>
+                <a:spcPts val="300"/>
+              </a:spcAft>
+              <a:buNone/>
+            </a:pPr>
+            <a:r>
+              <a:rPr lang="en-US" sz="1300" b="1" i="1" dirty="0">
+                <a:solidFill>
+                  <a:srgbClr val="1C2833"/>
+                </a:solidFill>
+                <a:latin typeface="Georgia" pitchFamily="34" charset="0"/>
+                <a:ea typeface="Georgia" pitchFamily="34" charset="-122"/>
+                <a:cs typeface="Georgia" pitchFamily="34" charset="-120"/>
+              </a:rPr>
+              <a:t>Traditional uses:</a:t>
+            </a:r>
+            <a:pPr algn="l" indent="0" marL="0">
+              <a:lnSpc>
+                <a:spcPts val="1820"/>
+              </a:lnSpc>
+              <a:spcBef>
+                <a:spcPts val="300"/>
+              </a:spcBef>
+              <a:spcAft>
+                <a:spcPts val="300"/>
+              </a:spcAft>
+              <a:buNone/>
+            </a:pPr>
+            <a:r>
+              <a:rPr lang="en-US" sz="1300" dirty="0">
+                <a:solidFill>
+                  <a:srgbClr val="1C2833"/>
+                </a:solidFill>
+                <a:latin typeface="Georgia" pitchFamily="34" charset="0"/>
+                <a:ea typeface="Georgia" pitchFamily="34" charset="-122"/>
+                <a:cs typeface="Georgia" pitchFamily="34" charset="-120"/>
+              </a:rPr>
+              <a:t> Kitchen herb (tulsi tea, chutney), household plant, ingredient in some Ayurvedic cold-and-cough preparations.</a:t>
+            </a:r>
+            <a:endParaRPr lang="en-US" sz="1300" dirty="0"/>
+          </a:p>
+        </p:txBody>
+      </p:sp>
+      <p:sp>
+        <p:nvSpPr>
+          <p:cNvPr id="13" name="Text 11"/>
+          <p:cNvSpPr/>
+          <p:nvPr/>
+        </p:nvSpPr>
+        <p:spPr>
+          <a:xfrm>
+            <a:off x="692051" y="3419624"/>
+            <a:ext cx="7973389" cy="461963"/>
+          </a:xfrm>
+          <a:prstGeom prst="rect">
+            <a:avLst/>
+          </a:prstGeom>
+          <a:noFill/>
+          <a:ln/>
+        </p:spPr>
+        <p:txBody>
+          <a:bodyPr wrap="square" lIns="0" tIns="0" rIns="0" bIns="0" rtlCol="0" anchor="t"/>
+          <a:lstStyle/>
+          <a:p>
+            <a:pPr algn="l" indent="0" marL="0">
+              <a:lnSpc>
+                <a:spcPts val="1820"/>
+              </a:lnSpc>
+              <a:spcBef>
+                <a:spcPts val="300"/>
+              </a:spcBef>
+              <a:spcAft>
+                <a:spcPts val="300"/>
+              </a:spcAft>
+              <a:buNone/>
+            </a:pPr>
+            <a:r>
+              <a:rPr lang="en-US" sz="1300" b="1" i="1" dirty="0">
+                <a:solidFill>
+                  <a:srgbClr val="1C2833"/>
+                </a:solidFill>
+                <a:latin typeface="Georgia" pitchFamily="34" charset="0"/>
+                <a:ea typeface="Georgia" pitchFamily="34" charset="-122"/>
+                <a:cs typeface="Georgia" pitchFamily="34" charset="-120"/>
+              </a:rPr>
+              <a:t>What we don't say:</a:t>
+            </a:r>
+            <a:pPr algn="l" indent="0" marL="0">
+              <a:lnSpc>
+                <a:spcPts val="1820"/>
+              </a:lnSpc>
+              <a:spcBef>
+                <a:spcPts val="300"/>
+              </a:spcBef>
+              <a:spcAft>
+                <a:spcPts val="300"/>
+              </a:spcAft>
+              <a:buNone/>
+            </a:pPr>
+            <a:r>
+              <a:rPr lang="en-US" sz="1300" dirty="0">
+                <a:solidFill>
+                  <a:srgbClr val="1C2833"/>
+                </a:solidFill>
+                <a:latin typeface="Georgia" pitchFamily="34" charset="0"/>
+                <a:ea typeface="Georgia" pitchFamily="34" charset="-122"/>
+                <a:cs typeface="Georgia" pitchFamily="34" charset="-120"/>
+              </a:rPr>
+              <a:t> "Tulsi cures X." Folk use and preliminary evidence are not the same as clinical proof.</a:t>
+            </a:r>
+            <a:endParaRPr lang="en-US" sz="1300" dirty="0"/>
+          </a:p>
+        </p:txBody>
+      </p:sp>
+      <p:sp>
+        <p:nvSpPr>
+          <p:cNvPr id="14" name="Text 12"/>
+          <p:cNvSpPr/>
+          <p:nvPr/>
+        </p:nvSpPr>
+        <p:spPr>
+          <a:xfrm>
+            <a:off x="406301" y="4434929"/>
+            <a:ext cx="8498026" cy="213271"/>
+          </a:xfrm>
+          <a:prstGeom prst="rect">
+            <a:avLst/>
+          </a:prstGeom>
+          <a:noFill/>
+          <a:ln/>
+        </p:spPr>
+        <p:txBody>
+          <a:bodyPr wrap="square" lIns="0" tIns="0" rIns="0" bIns="0" rtlCol="0" anchor="t"/>
+          <a:lstStyle/>
+          <a:p>
+            <a:pPr algn="l" indent="0" marL="0">
+              <a:lnSpc>
                 <a:spcPts val="1680"/>
               </a:lnSpc>
               <a:spcBef>
                 <a:spcPts val="300"/>
               </a:spcBef>
+              <a:spcAft>
+                <a:spcPts val="300"/>
+              </a:spcAft>
+              <a:buNone/>
+            </a:pPr>
+            <a:r>
+              <a:rPr lang="en-US" sz="1200" dirty="0">
+                <a:solidFill>
+                  <a:srgbClr val="1C2833"/>
+                </a:solidFill>
+                <a:latin typeface="Arial" pitchFamily="34" charset="0"/>
+                <a:ea typeface="Arial" pitchFamily="34" charset="-122"/>
+                <a:cs typeface="Arial" pitchFamily="34" charset="-120"/>
+              </a:rPr>
+              <a:t>Middle ·  · IKS Curriculum</a:t>
+            </a:r>
+            <a:endParaRPr lang="en-US" sz="1200" dirty="0"/>
+          </a:p>
+        </p:txBody>
+      </p:sp>
+    </p:spTree>
+  </p:cSld>
+  <p:clrMapOvr>
+    <a:masterClrMapping/>
+  </p:clrMapOvr>
+</p:sld>
+</file>
+
+<file path=ppt/slides/slide15.xml><?xml version="1.0" encoding="utf-8"?>
+<p:sld xmlns:a="http://schemas.openxmlformats.org/drawingml/2006/main" xmlns:r="http://schemas.openxmlformats.org/officeDocument/2006/relationships" xmlns:p="http://schemas.openxmlformats.org/presentationml/2006/main">
+  <p:cSld name="Slide 15">
+    <p:bg>
+      <p:bgPr>
+        <a:solidFill>
+          <a:srgbClr val="FFFFFF"/>
+        </a:solidFill>
+      </p:bgPr>
+    </p:bg>
+    <p:spTree>
+      <p:nvGrpSpPr>
+        <p:cNvPr id="1" name=""/>
+        <p:cNvGrpSpPr/>
+        <p:nvPr/>
+      </p:nvGrpSpPr>
+      <p:grpSpPr>
+        <a:xfrm>
+          <a:off x="0" y="0"/>
+          <a:ext cx="0" cy="0"/>
+          <a:chOff x="0" y="0"/>
+          <a:chExt cx="0" cy="0"/>
+        </a:xfrm>
+      </p:grpSpPr>
+      <p:sp>
+        <p:nvSpPr>
+          <p:cNvPr id="2" name="Text 0"/>
+          <p:cNvSpPr/>
+          <p:nvPr/>
+        </p:nvSpPr>
+        <p:spPr>
+          <a:xfrm>
+            <a:off x="0" y="0"/>
+            <a:ext cx="9144000" cy="101501"/>
+          </a:xfrm>
+          <a:prstGeom prst="rect">
+            <a:avLst/>
+          </a:prstGeom>
+          <a:solidFill>
+            <a:srgbClr val="277884"/>
+          </a:solidFill>
+          <a:ln/>
+        </p:spPr>
+        <p:txBody>
+          <a:bodyPr wrap="square" rtlCol="0" anchor="ctr"/>
+          <a:lstStyle/>
+          <a:p>
+            <a:pPr indent="0" marL="0">
+              <a:buNone/>
+            </a:pPr>
+            <a:endParaRPr lang="en-US" dirty="0"/>
+          </a:p>
+        </p:txBody>
+      </p:sp>
+      <p:sp>
+        <p:nvSpPr>
+          <p:cNvPr id="3" name="Text 1"/>
+          <p:cNvSpPr/>
+          <p:nvPr/>
+        </p:nvSpPr>
+        <p:spPr>
+          <a:xfrm>
+            <a:off x="406301" y="457051"/>
+            <a:ext cx="8498026" cy="274290"/>
+          </a:xfrm>
+          <a:prstGeom prst="rect">
+            <a:avLst/>
+          </a:prstGeom>
+          <a:noFill/>
+          <a:ln/>
+        </p:spPr>
+        <p:txBody>
+          <a:bodyPr wrap="square" lIns="0" tIns="0" rIns="0" bIns="0" rtlCol="0" anchor="t"/>
+          <a:lstStyle/>
+          <a:p>
+            <a:pPr algn="l" indent="0" marL="0">
+              <a:lnSpc>
+                <a:spcPts val="2160"/>
+              </a:lnSpc>
+              <a:spcBef>
+                <a:spcPts val="600"/>
+              </a:spcBef>
+              <a:spcAft>
+                <a:spcPts val="800"/>
+              </a:spcAft>
+              <a:buNone/>
+            </a:pPr>
+            <a:r>
+              <a:rPr lang="en-US" sz="1800" b="1" dirty="0">
+                <a:solidFill>
+                  <a:srgbClr val="FE4447"/>
+                </a:solidFill>
+                <a:latin typeface="Georgia" pitchFamily="34" charset="0"/>
+                <a:ea typeface="Georgia" pitchFamily="34" charset="-122"/>
+                <a:cs typeface="Georgia" pitchFamily="34" charset="-120"/>
+              </a:rPr>
+              <a:t>Homework</a:t>
+            </a:r>
+            <a:endParaRPr lang="en-US" sz="1800" dirty="0"/>
+          </a:p>
+        </p:txBody>
+      </p:sp>
+      <p:sp>
+        <p:nvSpPr>
+          <p:cNvPr id="4" name="Text 2"/>
+          <p:cNvSpPr/>
+          <p:nvPr/>
+        </p:nvSpPr>
+        <p:spPr>
+          <a:xfrm>
+            <a:off x="634901" y="883593"/>
+            <a:ext cx="8102798" cy="487561"/>
+          </a:xfrm>
+          <a:prstGeom prst="rect">
+            <a:avLst/>
+          </a:prstGeom>
+          <a:noFill/>
+          <a:ln/>
+        </p:spPr>
+        <p:txBody>
+          <a:bodyPr wrap="square" lIns="0" tIns="0" rIns="0" bIns="0" rtlCol="0" anchor="t"/>
+          <a:lstStyle/>
+          <a:p>
+            <a:pPr algn="l" marL="342900" indent="-342900">
+              <a:lnSpc>
+                <a:spcPts val="1620"/>
+              </a:lnSpc>
+              <a:spcAft>
+                <a:spcPts val="300"/>
+              </a:spcAft>
+              <a:buSzPct val="100000"/>
+              <a:buChar char="•"/>
+            </a:pPr>
+            <a:r>
+              <a:rPr lang="en-US" sz="1200" dirty="0">
+                <a:solidFill>
+                  <a:srgbClr val="1C2833"/>
+                </a:solidFill>
+                <a:latin typeface="Arial" pitchFamily="34" charset="0"/>
+                <a:ea typeface="Arial" pitchFamily="34" charset="-122"/>
+                <a:cs typeface="Arial" pitchFamily="34" charset="-120"/>
+              </a:rPr>
+              <a:t>Find a tulsi plant — your own pot, a neighbour's, a temple's, a school garden. Sketch its leaf in your workbook from life (not from a picture). Write one identifying feature you observed in person.</a:t>
+            </a:r>
+            <a:endParaRPr lang="en-US" sz="1200" dirty="0"/>
+          </a:p>
+        </p:txBody>
+      </p:sp>
+      <p:sp>
+        <p:nvSpPr>
+          <p:cNvPr id="5" name="Text 3"/>
+          <p:cNvSpPr/>
+          <p:nvPr/>
+        </p:nvSpPr>
+        <p:spPr>
+          <a:xfrm>
+            <a:off x="406301" y="4434929"/>
+            <a:ext cx="8498026" cy="213271"/>
+          </a:xfrm>
+          <a:prstGeom prst="rect">
+            <a:avLst/>
+          </a:prstGeom>
+          <a:noFill/>
+          <a:ln/>
+        </p:spPr>
+        <p:txBody>
+          <a:bodyPr wrap="square" lIns="0" tIns="0" rIns="0" bIns="0" rtlCol="0" anchor="t"/>
+          <a:lstStyle/>
+          <a:p>
+            <a:pPr algn="l" indent="0" marL="0">
+              <a:lnSpc>
+                <a:spcPts val="1680"/>
+              </a:lnSpc>
+              <a:spcBef>
+                <a:spcPts val="300"/>
+              </a:spcBef>
+              <a:spcAft>
+                <a:spcPts val="300"/>
+              </a:spcAft>
+              <a:buNone/>
+            </a:pPr>
+            <a:r>
+              <a:rPr lang="en-US" sz="1200" dirty="0">
+                <a:solidFill>
+                  <a:srgbClr val="1C2833"/>
+                </a:solidFill>
+                <a:latin typeface="Arial" pitchFamily="34" charset="0"/>
+                <a:ea typeface="Arial" pitchFamily="34" charset="-122"/>
+                <a:cs typeface="Arial" pitchFamily="34" charset="-120"/>
+              </a:rPr>
+              <a:t>Middle ·  · IKS Curriculum</a:t>
+            </a:r>
+            <a:endParaRPr lang="en-US" sz="1200" dirty="0"/>
+          </a:p>
+        </p:txBody>
+      </p:sp>
+    </p:spTree>
+  </p:cSld>
+  <p:clrMapOvr>
+    <a:masterClrMapping/>
+  </p:clrMapOvr>
+</p:sld>
+</file>
+
+<file path=ppt/slides/slide16.xml><?xml version="1.0" encoding="utf-8"?>
+<p:sld xmlns:a="http://schemas.openxmlformats.org/drawingml/2006/main" xmlns:r="http://schemas.openxmlformats.org/officeDocument/2006/relationships" xmlns:p="http://schemas.openxmlformats.org/presentationml/2006/main">
+  <p:cSld name="Slide 16">
+    <p:bg>
+      <p:bgPr>
+        <a:solidFill>
+          <a:srgbClr val="FFFFFF"/>
+        </a:solidFill>
+      </p:bgPr>
+    </p:bg>
+    <p:spTree>
+      <p:nvGrpSpPr>
+        <p:cNvPr id="1" name=""/>
+        <p:cNvGrpSpPr/>
+        <p:nvPr/>
+      </p:nvGrpSpPr>
+      <p:grpSpPr>
+        <a:xfrm>
+          <a:off x="0" y="0"/>
+          <a:ext cx="0" cy="0"/>
+          <a:chOff x="0" y="0"/>
+          <a:chExt cx="0" cy="0"/>
+        </a:xfrm>
+      </p:grpSpPr>
+      <p:sp>
+        <p:nvSpPr>
+          <p:cNvPr id="2" name="Text 0"/>
+          <p:cNvSpPr/>
+          <p:nvPr/>
+        </p:nvSpPr>
+        <p:spPr>
+          <a:xfrm>
+            <a:off x="0" y="0"/>
+            <a:ext cx="9144000" cy="101501"/>
+          </a:xfrm>
+          <a:prstGeom prst="rect">
+            <a:avLst/>
+          </a:prstGeom>
+          <a:solidFill>
+            <a:srgbClr val="277884"/>
+          </a:solidFill>
+          <a:ln/>
+        </p:spPr>
+        <p:txBody>
+          <a:bodyPr wrap="square" rtlCol="0" anchor="ctr"/>
+          <a:lstStyle/>
+          <a:p>
+            <a:pPr indent="0" marL="0">
+              <a:buNone/>
+            </a:pPr>
+            <a:endParaRPr lang="en-US" dirty="0"/>
+          </a:p>
+        </p:txBody>
+      </p:sp>
+      <p:sp>
+        <p:nvSpPr>
+          <p:cNvPr id="3" name="Text 1"/>
+          <p:cNvSpPr/>
+          <p:nvPr/>
+        </p:nvSpPr>
+        <p:spPr>
+          <a:xfrm>
+            <a:off x="406301" y="457051"/>
+            <a:ext cx="8498026" cy="274290"/>
+          </a:xfrm>
+          <a:prstGeom prst="rect">
+            <a:avLst/>
+          </a:prstGeom>
+          <a:noFill/>
+          <a:ln/>
+        </p:spPr>
+        <p:txBody>
+          <a:bodyPr wrap="square" lIns="0" tIns="0" rIns="0" bIns="0" rtlCol="0" anchor="t"/>
+          <a:lstStyle/>
+          <a:p>
+            <a:pPr algn="l" indent="0" marL="0">
+              <a:lnSpc>
+                <a:spcPts val="2160"/>
+              </a:lnSpc>
+              <a:spcBef>
+                <a:spcPts val="600"/>
+              </a:spcBef>
+              <a:spcAft>
+                <a:spcPts val="800"/>
+              </a:spcAft>
+              <a:buNone/>
+            </a:pPr>
+            <a:r>
+              <a:rPr lang="en-US" sz="1800" b="1" dirty="0">
+                <a:solidFill>
+                  <a:srgbClr val="FE4447"/>
+                </a:solidFill>
+                <a:latin typeface="Georgia" pitchFamily="34" charset="0"/>
+                <a:ea typeface="Georgia" pitchFamily="34" charset="-122"/>
+                <a:cs typeface="Georgia" pitchFamily="34" charset="-120"/>
+              </a:rPr>
+              <a:t>Differentiation</a:t>
+            </a:r>
+            <a:endParaRPr lang="en-US" sz="1800" dirty="0"/>
+          </a:p>
+        </p:txBody>
+      </p:sp>
+      <p:sp>
+        <p:nvSpPr>
+          <p:cNvPr id="4" name="Text 2"/>
+          <p:cNvSpPr/>
+          <p:nvPr/>
+        </p:nvSpPr>
+        <p:spPr>
+          <a:xfrm>
+            <a:off x="634901" y="883593"/>
+            <a:ext cx="8102798" cy="731341"/>
+          </a:xfrm>
+          <a:prstGeom prst="rect">
+            <a:avLst/>
+          </a:prstGeom>
+          <a:noFill/>
+          <a:ln/>
+        </p:spPr>
+        <p:txBody>
+          <a:bodyPr wrap="square" lIns="0" tIns="0" rIns="0" bIns="0" rtlCol="0" anchor="t"/>
+          <a:lstStyle/>
+          <a:p>
+            <a:pPr algn="l" marL="342900" indent="-342900">
+              <a:lnSpc>
+                <a:spcPts val="1620"/>
+              </a:lnSpc>
+              <a:spcAft>
+                <a:spcPts val="300"/>
+              </a:spcAft>
+              <a:buSzPct val="100000"/>
+              <a:buChar char="•"/>
+            </a:pPr>
+            <a:r>
+              <a:rPr lang="en-US" sz="1200" b="1" dirty="0">
+                <a:solidFill>
+                  <a:srgbClr val="1C2833"/>
+                </a:solidFill>
+                <a:latin typeface="Arial" pitchFamily="34" charset="0"/>
+                <a:ea typeface="Arial" pitchFamily="34" charset="-122"/>
+                <a:cs typeface="Arial" pitchFamily="34" charset="-120"/>
+              </a:rPr>
+              <a:t>One tier up:</a:t>
+            </a:r>
+            <a:pPr algn="l" indent="0" marL="0">
+              <a:lnSpc>
+                <a:spcPts val="1620"/>
+              </a:lnSpc>
+              <a:spcAft>
+                <a:spcPts val="300"/>
+              </a:spcAft>
+              <a:buNone/>
+            </a:pPr>
+            <a:r>
+              <a:rPr lang="en-US" sz="1200" dirty="0">
+                <a:solidFill>
+                  <a:srgbClr val="1C2833"/>
+                </a:solidFill>
+                <a:latin typeface="Arial" pitchFamily="34" charset="0"/>
+                <a:ea typeface="Arial" pitchFamily="34" charset="-122"/>
+                <a:cs typeface="Arial" pitchFamily="34" charset="-120"/>
+              </a:rPr>
+              <a:t> Sweet basil (</a:t>
+            </a:r>
+            <a:pPr algn="l" indent="0" marL="0">
+              <a:lnSpc>
+                <a:spcPts val="1620"/>
+              </a:lnSpc>
+              <a:spcAft>
+                <a:spcPts val="300"/>
+              </a:spcAft>
+              <a:buNone/>
+            </a:pPr>
+            <a:r>
+              <a:rPr lang="en-US" sz="1200" i="1" dirty="0">
+                <a:solidFill>
+                  <a:srgbClr val="1C2833"/>
+                </a:solidFill>
+                <a:latin typeface="Arial" pitchFamily="34" charset="0"/>
+                <a:ea typeface="Arial" pitchFamily="34" charset="-122"/>
+                <a:cs typeface="Arial" pitchFamily="34" charset="-120"/>
+              </a:rPr>
+              <a:t>Ocimum basilicum</a:t>
+            </a:r>
+            <a:pPr algn="l" indent="0" marL="0">
+              <a:lnSpc>
+                <a:spcPts val="1620"/>
+              </a:lnSpc>
+              <a:spcAft>
+                <a:spcPts val="300"/>
+              </a:spcAft>
+              <a:buNone/>
+            </a:pPr>
+            <a:r>
+              <a:rPr lang="en-US" sz="1200" dirty="0">
+                <a:solidFill>
+                  <a:srgbClr val="1C2833"/>
+                </a:solidFill>
+                <a:latin typeface="Arial" pitchFamily="34" charset="0"/>
+                <a:ea typeface="Arial" pitchFamily="34" charset="-122"/>
+                <a:cs typeface="Arial" pitchFamily="34" charset="-120"/>
+              </a:rPr>
+              <a:t>) has the same genus as tulsi but different uses. What chemical does sweet basil contain that tulsi doesn't dominate in (Hint: linalool)? Why does Italian cuisine use sweet basil but not tulsi?</a:t>
+            </a:r>
+            <a:endParaRPr lang="en-US" sz="1200" dirty="0"/>
+          </a:p>
+          <a:p>
+            <a:pPr algn="l" marL="342900" indent="-342900">
+              <a:lnSpc>
+                <a:spcPts val="1620"/>
+              </a:lnSpc>
+              <a:spcAft>
+                <a:spcPts val="300"/>
+              </a:spcAft>
+              <a:buSzPct val="100000"/>
+              <a:buChar char="•"/>
+            </a:pPr>
+            <a:r>
+              <a:rPr lang="en-US" sz="1200" b="1" dirty="0">
+                <a:solidFill>
+                  <a:srgbClr val="1C2833"/>
+                </a:solidFill>
+                <a:latin typeface="Arial" pitchFamily="34" charset="0"/>
+                <a:ea typeface="Arial" pitchFamily="34" charset="-122"/>
+                <a:cs typeface="Arial" pitchFamily="34" charset="-120"/>
+              </a:rPr>
+              <a:t>One tier down:</a:t>
+            </a:r>
+            <a:pPr algn="l" indent="0" marL="0">
+              <a:lnSpc>
+                <a:spcPts val="1620"/>
+              </a:lnSpc>
+              <a:spcAft>
+                <a:spcPts val="300"/>
+              </a:spcAft>
+              <a:buNone/>
+            </a:pPr>
+            <a:r>
+              <a:rPr lang="en-US" sz="1200" dirty="0">
+                <a:solidFill>
+                  <a:srgbClr val="1C2833"/>
+                </a:solidFill>
+                <a:latin typeface="Arial" pitchFamily="34" charset="0"/>
+                <a:ea typeface="Arial" pitchFamily="34" charset="-122"/>
+                <a:cs typeface="Arial" pitchFamily="34" charset="-120"/>
+              </a:rPr>
+              <a:t> Just remember the leaf shape and the word "eugenol." Smell-recognition will come with repetition.</a:t>
+            </a:r>
+            <a:endParaRPr lang="en-US" sz="1200" dirty="0"/>
+          </a:p>
+        </p:txBody>
+      </p:sp>
+      <p:sp>
+        <p:nvSpPr>
+          <p:cNvPr id="5" name="Text 3"/>
+          <p:cNvSpPr/>
+          <p:nvPr/>
+        </p:nvSpPr>
+        <p:spPr>
+          <a:xfrm>
+            <a:off x="406301" y="4434929"/>
+            <a:ext cx="8498026" cy="213271"/>
+          </a:xfrm>
+          <a:prstGeom prst="rect">
+            <a:avLst/>
+          </a:prstGeom>
+          <a:noFill/>
+          <a:ln/>
+        </p:spPr>
+        <p:txBody>
+          <a:bodyPr wrap="square" lIns="0" tIns="0" rIns="0" bIns="0" rtlCol="0" anchor="t"/>
+          <a:lstStyle/>
+          <a:p>
+            <a:pPr algn="l" indent="0" marL="0">
+              <a:lnSpc>
+                <a:spcPts val="1680"/>
+              </a:lnSpc>
+              <a:spcBef>
+                <a:spcPts val="300"/>
+              </a:spcBef>
+              <a:spcAft>
+                <a:spcPts val="300"/>
+              </a:spcAft>
+              <a:buNone/>
+            </a:pPr>
+            <a:r>
+              <a:rPr lang="en-US" sz="1200" dirty="0">
+                <a:solidFill>
+                  <a:srgbClr val="1C2833"/>
+                </a:solidFill>
+                <a:latin typeface="Arial" pitchFamily="34" charset="0"/>
+                <a:ea typeface="Arial" pitchFamily="34" charset="-122"/>
+                <a:cs typeface="Arial" pitchFamily="34" charset="-120"/>
+              </a:rPr>
+              <a:t>Middle ·  · IKS Curriculum</a:t>
+            </a:r>
+            <a:endParaRPr lang="en-US" sz="1200" dirty="0"/>
+          </a:p>
+        </p:txBody>
+      </p:sp>
+    </p:spTree>
+  </p:cSld>
+  <p:clrMapOvr>
+    <a:masterClrMapping/>
+  </p:clrMapOvr>
+</p:sld>
+</file>
+
+<file path=ppt/slides/slide17.xml><?xml version="1.0" encoding="utf-8"?>
+<p:sld xmlns:a="http://schemas.openxmlformats.org/drawingml/2006/main" xmlns:r="http://schemas.openxmlformats.org/officeDocument/2006/relationships" xmlns:p="http://schemas.openxmlformats.org/presentationml/2006/main">
+  <p:cSld name="Slide 17">
+    <p:bg>
+      <p:bgPr>
+        <a:solidFill>
+          <a:srgbClr val="FFFFFF"/>
+        </a:solidFill>
+      </p:bgPr>
+    </p:bg>
+    <p:spTree>
+      <p:nvGrpSpPr>
+        <p:cNvPr id="1" name=""/>
+        <p:cNvGrpSpPr/>
+        <p:nvPr/>
+      </p:nvGrpSpPr>
+      <p:grpSpPr>
+        <a:xfrm>
+          <a:off x="0" y="0"/>
+          <a:ext cx="0" cy="0"/>
+          <a:chOff x="0" y="0"/>
+          <a:chExt cx="0" cy="0"/>
+        </a:xfrm>
+      </p:grpSpPr>
+      <p:sp>
+        <p:nvSpPr>
+          <p:cNvPr id="2" name="Text 0"/>
+          <p:cNvSpPr/>
+          <p:nvPr/>
+        </p:nvSpPr>
+        <p:spPr>
+          <a:xfrm>
+            <a:off x="0" y="0"/>
+            <a:ext cx="9144000" cy="101501"/>
+          </a:xfrm>
+          <a:prstGeom prst="rect">
+            <a:avLst/>
+          </a:prstGeom>
+          <a:solidFill>
+            <a:srgbClr val="277884"/>
+          </a:solidFill>
+          <a:ln/>
+        </p:spPr>
+        <p:txBody>
+          <a:bodyPr wrap="square" rtlCol="0" anchor="ctr"/>
+          <a:lstStyle/>
+          <a:p>
+            <a:pPr indent="0" marL="0">
+              <a:buNone/>
+            </a:pPr>
+            <a:endParaRPr lang="en-US" dirty="0"/>
+          </a:p>
+        </p:txBody>
+      </p:sp>
+      <p:sp>
+        <p:nvSpPr>
+          <p:cNvPr id="3" name="Text 1"/>
+          <p:cNvSpPr/>
+          <p:nvPr/>
+        </p:nvSpPr>
+        <p:spPr>
+          <a:xfrm>
+            <a:off x="406301" y="457051"/>
+            <a:ext cx="8498026" cy="274290"/>
+          </a:xfrm>
+          <a:prstGeom prst="rect">
+            <a:avLst/>
+          </a:prstGeom>
+          <a:noFill/>
+          <a:ln/>
+        </p:spPr>
+        <p:txBody>
+          <a:bodyPr wrap="square" lIns="0" tIns="0" rIns="0" bIns="0" rtlCol="0" anchor="t"/>
+          <a:lstStyle/>
+          <a:p>
+            <a:pPr algn="l" indent="0" marL="0">
+              <a:lnSpc>
+                <a:spcPts val="2160"/>
+              </a:lnSpc>
+              <a:spcBef>
+                <a:spcPts val="600"/>
+              </a:spcBef>
+              <a:spcAft>
+                <a:spcPts val="800"/>
+              </a:spcAft>
+              <a:buNone/>
+            </a:pPr>
+            <a:r>
+              <a:rPr lang="en-US" sz="1800" b="1" dirty="0">
+                <a:solidFill>
+                  <a:srgbClr val="FE4447"/>
+                </a:solidFill>
+                <a:latin typeface="Georgia" pitchFamily="34" charset="0"/>
+                <a:ea typeface="Georgia" pitchFamily="34" charset="-122"/>
+                <a:cs typeface="Georgia" pitchFamily="34" charset="-120"/>
+              </a:rPr>
+              <a:t>Teacher notes</a:t>
+            </a:r>
+            <a:endParaRPr lang="en-US" sz="1800" dirty="0"/>
+          </a:p>
+        </p:txBody>
+      </p:sp>
+      <p:sp>
+        <p:nvSpPr>
+          <p:cNvPr id="4" name="Text 2"/>
+          <p:cNvSpPr/>
+          <p:nvPr/>
+        </p:nvSpPr>
+        <p:spPr>
+          <a:xfrm>
+            <a:off x="634901" y="883593"/>
+            <a:ext cx="8102798" cy="1180802"/>
+          </a:xfrm>
+          <a:prstGeom prst="rect">
+            <a:avLst/>
+          </a:prstGeom>
+          <a:noFill/>
+          <a:ln/>
+        </p:spPr>
+        <p:txBody>
+          <a:bodyPr wrap="square" lIns="0" tIns="0" rIns="0" bIns="0" rtlCol="0" anchor="t"/>
+          <a:lstStyle/>
+          <a:p>
+            <a:pPr algn="l" marL="342900" indent="-342900">
+              <a:lnSpc>
+                <a:spcPts val="1620"/>
+              </a:lnSpc>
+              <a:spcAft>
+                <a:spcPts val="300"/>
+              </a:spcAft>
+              <a:buSzPct val="100000"/>
+              <a:buChar char="•"/>
+            </a:pPr>
+            <a:r>
+              <a:rPr lang="en-US" sz="1200" dirty="0">
+                <a:solidFill>
+                  <a:srgbClr val="1C2833"/>
+                </a:solidFill>
+                <a:latin typeface="Arial" pitchFamily="34" charset="0"/>
+                <a:ea typeface="Arial" pitchFamily="34" charset="-122"/>
+                <a:cs typeface="Arial" pitchFamily="34" charset="-120"/>
+              </a:rPr>
+              <a:t>If a student tells the class that tulsi is worshipped in their home, acknowledge respectfully: "Yes — many homes treat the tulsi plant as sacred. We're studying it here as a plant with specific chemistry; both framings can coexist."</a:t>
+            </a:r>
+            <a:endParaRPr lang="en-US" sz="1200" dirty="0"/>
+          </a:p>
+          <a:p>
+            <a:pPr algn="l" marL="342900" indent="-342900">
+              <a:lnSpc>
+                <a:spcPts val="1620"/>
+              </a:lnSpc>
+              <a:spcAft>
+                <a:spcPts val="300"/>
+              </a:spcAft>
+              <a:buSzPct val="100000"/>
+              <a:buChar char="•"/>
+            </a:pPr>
+            <a:r>
+              <a:rPr lang="en-US" sz="1200" dirty="0">
+                <a:solidFill>
+                  <a:srgbClr val="1C2833"/>
+                </a:solidFill>
+                <a:latin typeface="Arial" pitchFamily="34" charset="0"/>
+                <a:ea typeface="Arial" pitchFamily="34" charset="-122"/>
+                <a:cs typeface="Arial" pitchFamily="34" charset="-120"/>
+              </a:rPr>
+              <a:t>The clove-tulsi connection is the most memorable hook. Lean into it.</a:t>
+            </a:r>
+            <a:endParaRPr lang="en-US" sz="1200" dirty="0"/>
+          </a:p>
+          <a:p>
+            <a:pPr algn="l" marL="342900" indent="-342900">
+              <a:lnSpc>
+                <a:spcPts val="1620"/>
+              </a:lnSpc>
+              <a:spcAft>
+                <a:spcPts val="300"/>
+              </a:spcAft>
+              <a:buSzPct val="100000"/>
+              <a:buChar char="•"/>
+            </a:pPr>
+            <a:r>
+              <a:rPr lang="en-US" sz="1200" dirty="0">
+                <a:solidFill>
+                  <a:srgbClr val="1C2833"/>
+                </a:solidFill>
+                <a:latin typeface="Arial" pitchFamily="34" charset="0"/>
+                <a:ea typeface="Arial" pitchFamily="34" charset="-122"/>
+                <a:cs typeface="Arial" pitchFamily="34" charset="-120"/>
+              </a:rPr>
+              <a:t>Some students will react strongly to the smell of crushed tulsi (it can be quite sharp). Don't put it under their nose — let them choose their distance.</a:t>
+            </a:r>
+            <a:endParaRPr lang="en-US" sz="1200" dirty="0"/>
+          </a:p>
+        </p:txBody>
+      </p:sp>
+      <p:sp>
+        <p:nvSpPr>
+          <p:cNvPr id="5" name="Text 3"/>
+          <p:cNvSpPr/>
+          <p:nvPr/>
+        </p:nvSpPr>
+        <p:spPr>
+          <a:xfrm>
+            <a:off x="406301" y="4434929"/>
+            <a:ext cx="8498026" cy="213271"/>
+          </a:xfrm>
+          <a:prstGeom prst="rect">
+            <a:avLst/>
+          </a:prstGeom>
+          <a:noFill/>
+          <a:ln/>
+        </p:spPr>
+        <p:txBody>
+          <a:bodyPr wrap="square" lIns="0" tIns="0" rIns="0" bIns="0" rtlCol="0" anchor="t"/>
+          <a:lstStyle/>
+          <a:p>
+            <a:pPr algn="l" indent="0" marL="0">
+              <a:lnSpc>
+                <a:spcPts val="1680"/>
+              </a:lnSpc>
+              <a:spcBef>
+                <a:spcPts val="300"/>
+              </a:spcBef>
+              <a:spcAft>
+                <a:spcPts val="300"/>
+              </a:spcAft>
+              <a:buNone/>
+            </a:pPr>
+            <a:r>
+              <a:rPr lang="en-US" sz="1200" dirty="0">
+                <a:solidFill>
+                  <a:srgbClr val="1C2833"/>
+                </a:solidFill>
+                <a:latin typeface="Arial" pitchFamily="34" charset="0"/>
+                <a:ea typeface="Arial" pitchFamily="34" charset="-122"/>
+                <a:cs typeface="Arial" pitchFamily="34" charset="-120"/>
+              </a:rPr>
+              <a:t>Middle ·  · IKS Curriculum</a:t>
+            </a:r>
+            <a:endParaRPr lang="en-US" sz="1200" dirty="0"/>
+          </a:p>
+        </p:txBody>
+      </p:sp>
+    </p:spTree>
+  </p:cSld>
+  <p:clrMapOvr>
+    <a:masterClrMapping/>
+  </p:clrMapOvr>
+</p:sld>
+</file>
+
+<file path=ppt/slides/slide18.xml><?xml version="1.0" encoding="utf-8"?>
+<p:sld xmlns:a="http://schemas.openxmlformats.org/drawingml/2006/main" xmlns:r="http://schemas.openxmlformats.org/officeDocument/2006/relationships" xmlns:p="http://schemas.openxmlformats.org/presentationml/2006/main">
+  <p:cSld name="Slide 18">
+    <p:bg>
+      <p:bgPr>
+        <a:solidFill>
+          <a:srgbClr val="FFFFFF"/>
+        </a:solidFill>
+      </p:bgPr>
+    </p:bg>
+    <p:spTree>
+      <p:nvGrpSpPr>
+        <p:cNvPr id="1" name=""/>
+        <p:cNvGrpSpPr/>
+        <p:nvPr/>
+      </p:nvGrpSpPr>
+      <p:grpSpPr>
+        <a:xfrm>
+          <a:off x="0" y="0"/>
+          <a:ext cx="0" cy="0"/>
+          <a:chOff x="0" y="0"/>
+          <a:chExt cx="0" cy="0"/>
+        </a:xfrm>
+      </p:grpSpPr>
+      <p:sp>
+        <p:nvSpPr>
+          <p:cNvPr id="2" name="Text 0"/>
+          <p:cNvSpPr/>
+          <p:nvPr/>
+        </p:nvSpPr>
+        <p:spPr>
+          <a:xfrm>
+            <a:off x="0" y="0"/>
+            <a:ext cx="9144000" cy="101501"/>
+          </a:xfrm>
+          <a:prstGeom prst="rect">
+            <a:avLst/>
+          </a:prstGeom>
+          <a:solidFill>
+            <a:srgbClr val="277884"/>
+          </a:solidFill>
+          <a:ln/>
+        </p:spPr>
+        <p:txBody>
+          <a:bodyPr wrap="square" rtlCol="0" anchor="ctr"/>
+          <a:lstStyle/>
+          <a:p>
+            <a:pPr indent="0" marL="0">
+              <a:buNone/>
+            </a:pPr>
+            <a:endParaRPr lang="en-US" dirty="0"/>
+          </a:p>
+        </p:txBody>
+      </p:sp>
+      <p:sp>
+        <p:nvSpPr>
+          <p:cNvPr id="3" name="Text 1"/>
+          <p:cNvSpPr/>
+          <p:nvPr/>
+        </p:nvSpPr>
+        <p:spPr>
+          <a:xfrm>
+            <a:off x="406301" y="457051"/>
+            <a:ext cx="8498026" cy="274290"/>
+          </a:xfrm>
+          <a:prstGeom prst="rect">
+            <a:avLst/>
+          </a:prstGeom>
+          <a:noFill/>
+          <a:ln/>
+        </p:spPr>
+        <p:txBody>
+          <a:bodyPr wrap="square" lIns="0" tIns="0" rIns="0" bIns="0" rtlCol="0" anchor="t"/>
+          <a:lstStyle/>
+          <a:p>
+            <a:pPr algn="l" indent="0" marL="0">
+              <a:lnSpc>
+                <a:spcPts val="2160"/>
+              </a:lnSpc>
+              <a:spcBef>
+                <a:spcPts val="600"/>
+              </a:spcBef>
+              <a:spcAft>
+                <a:spcPts val="800"/>
+              </a:spcAft>
+              <a:buNone/>
+            </a:pPr>
+            <a:r>
+              <a:rPr lang="en-US" sz="1800" b="1" dirty="0">
+                <a:solidFill>
+                  <a:srgbClr val="FE4447"/>
+                </a:solidFill>
+                <a:latin typeface="Georgia" pitchFamily="34" charset="0"/>
+                <a:ea typeface="Georgia" pitchFamily="34" charset="-122"/>
+                <a:cs typeface="Georgia" pitchFamily="34" charset="-120"/>
+              </a:rPr>
+              <a:t>Citation(s) used in this lesson</a:t>
+            </a:r>
+            <a:endParaRPr lang="en-US" sz="1800" dirty="0"/>
+          </a:p>
+        </p:txBody>
+      </p:sp>
+      <p:sp>
+        <p:nvSpPr>
+          <p:cNvPr id="4" name="Text 2"/>
+          <p:cNvSpPr/>
+          <p:nvPr/>
+        </p:nvSpPr>
+        <p:spPr>
+          <a:xfrm>
+            <a:off x="634901" y="883593"/>
+            <a:ext cx="8102798" cy="487561"/>
+          </a:xfrm>
+          <a:prstGeom prst="rect">
+            <a:avLst/>
+          </a:prstGeom>
+          <a:noFill/>
+          <a:ln/>
+        </p:spPr>
+        <p:txBody>
+          <a:bodyPr wrap="square" lIns="0" tIns="0" rIns="0" bIns="0" rtlCol="0" anchor="t"/>
+          <a:lstStyle/>
+          <a:p>
+            <a:pPr algn="l" marL="342900" indent="-342900">
+              <a:lnSpc>
+                <a:spcPts val="1620"/>
+              </a:lnSpc>
+              <a:spcAft>
+                <a:spcPts val="300"/>
+              </a:spcAft>
+              <a:buSzPct val="100000"/>
+              <a:buChar char="•"/>
+            </a:pPr>
+            <a:r>
+              <a:rPr lang="en-US" sz="1200" dirty="0">
+                <a:solidFill>
+                  <a:srgbClr val="1C2833"/>
+                </a:solidFill>
+                <a:latin typeface="Arial" pitchFamily="34" charset="0"/>
+                <a:ea typeface="Arial" pitchFamily="34" charset="-122"/>
+                <a:cs typeface="Arial" pitchFamily="34" charset="-120"/>
+              </a:rPr>
+              <a:t>General phytochemistry: eugenol as principal volatile in </a:t>
+            </a:r>
+            <a:pPr algn="l" indent="0" marL="0">
+              <a:lnSpc>
+                <a:spcPts val="1620"/>
+              </a:lnSpc>
+              <a:spcAft>
+                <a:spcPts val="300"/>
+              </a:spcAft>
+              <a:buNone/>
+            </a:pPr>
+            <a:r>
+              <a:rPr lang="en-US" sz="1200" i="1" dirty="0">
+                <a:solidFill>
+                  <a:srgbClr val="1C2833"/>
+                </a:solidFill>
+                <a:latin typeface="Arial" pitchFamily="34" charset="0"/>
+                <a:ea typeface="Arial" pitchFamily="34" charset="-122"/>
+                <a:cs typeface="Arial" pitchFamily="34" charset="-120"/>
+              </a:rPr>
+              <a:t>Ocimum tenuiflorum</a:t>
+            </a:r>
+            <a:pPr algn="l" indent="0" marL="0">
+              <a:lnSpc>
+                <a:spcPts val="1620"/>
+              </a:lnSpc>
               <a:spcAft>
                 <a:spcPts val="300"/>
               </a:spcAft>
@@ -3238,7 +5746,7 @@
                 <a:ea typeface="Georgia" pitchFamily="34" charset="-122"/>
                 <a:cs typeface="Georgia" pitchFamily="34" charset="-120"/>
               </a:rPr>
-              <a:t>Materials</a:t>
+              <a:t>Learning objective</a:t>
             </a:r>
             <a:endParaRPr lang="en-US" sz="1800" dirty="0"/>
           </a:p>
@@ -3286,7 +5794,7 @@
                 <a:ea typeface="Arial" pitchFamily="34" charset="-122"/>
                 <a:cs typeface="Arial" pitchFamily="34" charset="-120"/>
               </a:rPr>
-              <a:t>– A live tulsi plant in a pot (ideal); a fresh sprig if a plant isn't available – A second Lamiaceae plant for comparison if you can — sweet basil (</a:t>
+              <a:t>By the end of this lesson, students can identify </a:t>
             </a:r>
             <a:pPr algn="l" indent="0" marL="0">
               <a:lnSpc>
@@ -3309,7 +5817,7 @@
                 <a:ea typeface="Arial" pitchFamily="34" charset="-122"/>
                 <a:cs typeface="Arial" pitchFamily="34" charset="-120"/>
               </a:rPr>
-              <a:t>Ocimum basilicum</a:t>
+              <a:t>tulasī</a:t>
             </a:r>
             <a:pPr algn="l" indent="0" marL="0">
               <a:lnSpc>
@@ -3332,7 +5840,53 @@
                 <a:ea typeface="Arial" pitchFamily="34" charset="-122"/>
                 <a:cs typeface="Arial" pitchFamily="34" charset="-120"/>
               </a:rPr>
-              <a:t>) is the easy comparison – A clove (the spice — also rich in eugenol) for the smell-bridge – Whiteboard – Student notebooks</a:t>
+              <a:t> (</a:t>
+            </a:r>
+            <a:pPr algn="l" indent="0" marL="0">
+              <a:lnSpc>
+                <a:spcPts val="1680"/>
+              </a:lnSpc>
+              <a:spcBef>
+                <a:spcPts val="300"/>
+              </a:spcBef>
+              <a:spcAft>
+                <a:spcPts val="300"/>
+              </a:spcAft>
+              <a:buNone/>
+            </a:pPr>
+            <a:r>
+              <a:rPr lang="en-US" sz="1200" i="1" dirty="0">
+                <a:solidFill>
+                  <a:srgbClr val="1C2833"/>
+                </a:solidFill>
+                <a:latin typeface="Arial" pitchFamily="34" charset="0"/>
+                <a:ea typeface="Arial" pitchFamily="34" charset="-122"/>
+                <a:cs typeface="Arial" pitchFamily="34" charset="-120"/>
+              </a:rPr>
+              <a:t>Ocimum tenuiflorum</a:t>
+            </a:r>
+            <a:pPr algn="l" indent="0" marL="0">
+              <a:lnSpc>
+                <a:spcPts val="1680"/>
+              </a:lnSpc>
+              <a:spcBef>
+                <a:spcPts val="300"/>
+              </a:spcBef>
+              <a:spcAft>
+                <a:spcPts val="300"/>
+              </a:spcAft>
+              <a:buNone/>
+            </a:pPr>
+            <a:r>
+              <a:rPr lang="en-US" sz="1200" dirty="0">
+                <a:solidFill>
+                  <a:srgbClr val="1C2833"/>
+                </a:solidFill>
+                <a:latin typeface="Arial" pitchFamily="34" charset="0"/>
+                <a:ea typeface="Arial" pitchFamily="34" charset="-122"/>
+                <a:cs typeface="Arial" pitchFamily="34" charset="-120"/>
+              </a:rPr>
+              <a:t>) by leaf shape and crushed-leaf smell, name eugenol as its principal aromatic compound, and describe two traditional culinary or domestic uses without making therapeutic claims.</a:t>
             </a:r>
             <a:endParaRPr lang="en-US" sz="1200" dirty="0"/>
           </a:p>
@@ -3490,7 +6044,7 @@
                 <a:ea typeface="Georgia" pitchFamily="34" charset="-122"/>
                 <a:cs typeface="Georgia" pitchFamily="34" charset="-120"/>
               </a:rPr>
-              <a:t>Vocabulary introduced today</a:t>
+              <a:t>Materials</a:t>
             </a:r>
             <a:endParaRPr lang="en-US" sz="1800" dirty="0"/>
           </a:p>
@@ -3505,7 +6059,7 @@
         <p:spPr>
           <a:xfrm>
             <a:off x="634901" y="883593"/>
-            <a:ext cx="8102798" cy="731341"/>
+            <a:ext cx="8102798" cy="1257002"/>
           </a:xfrm>
           <a:prstGeom prst="rect">
             <a:avLst/>
@@ -3528,26 +6082,6 @@
               <a:buChar char="•"/>
             </a:pPr>
             <a:r>
-              <a:rPr lang="en-US" sz="1200" i="1" dirty="0">
-                <a:solidFill>
-                  <a:srgbClr val="1C2833"/>
-                </a:solidFill>
-                <a:latin typeface="Arial" pitchFamily="34" charset="0"/>
-                <a:ea typeface="Arial" pitchFamily="34" charset="-122"/>
-                <a:cs typeface="Arial" pitchFamily="34" charset="-120"/>
-              </a:rPr>
-              <a:t>tulasī</a:t>
-            </a:r>
-            <a:pPr algn="l" indent="0" marL="0">
-              <a:lnSpc>
-                <a:spcPts val="1620"/>
-              </a:lnSpc>
-              <a:spcAft>
-                <a:spcPts val="300"/>
-              </a:spcAft>
-              <a:buNone/>
-            </a:pPr>
-            <a:r>
               <a:rPr lang="en-US" sz="1200" dirty="0">
                 <a:solidFill>
                   <a:srgbClr val="1C2833"/>
@@ -3556,47 +6090,7 @@
                 <a:ea typeface="Arial" pitchFamily="34" charset="-122"/>
                 <a:cs typeface="Arial" pitchFamily="34" charset="-120"/>
               </a:rPr>
-              <a:t> (IAST: tulasī; lit. "the incomparable one") — </a:t>
-            </a:r>
-            <a:pPr algn="l" indent="0" marL="0">
-              <a:lnSpc>
-                <a:spcPts val="1620"/>
-              </a:lnSpc>
-              <a:spcAft>
-                <a:spcPts val="300"/>
-              </a:spcAft>
-              <a:buNone/>
-            </a:pPr>
-            <a:r>
-              <a:rPr lang="en-US" sz="1200" i="1" dirty="0">
-                <a:solidFill>
-                  <a:srgbClr val="1C2833"/>
-                </a:solidFill>
-                <a:latin typeface="Arial" pitchFamily="34" charset="0"/>
-                <a:ea typeface="Arial" pitchFamily="34" charset="-122"/>
-                <a:cs typeface="Arial" pitchFamily="34" charset="-120"/>
-              </a:rPr>
-              <a:t>Ocimum tenuiflorum</a:t>
-            </a:r>
-            <a:pPr algn="l" indent="0" marL="0">
-              <a:lnSpc>
-                <a:spcPts val="1620"/>
-              </a:lnSpc>
-              <a:spcAft>
-                <a:spcPts val="300"/>
-              </a:spcAft>
-              <a:buNone/>
-            </a:pPr>
-            <a:r>
-              <a:rPr lang="en-US" sz="1200" dirty="0">
-                <a:solidFill>
-                  <a:srgbClr val="1C2833"/>
-                </a:solidFill>
-                <a:latin typeface="Arial" pitchFamily="34" charset="0"/>
-                <a:ea typeface="Arial" pitchFamily="34" charset="-122"/>
-                <a:cs typeface="Arial" pitchFamily="34" charset="-120"/>
-              </a:rPr>
-              <a:t>, the herb commonly called holy basil.</a:t>
+              <a:t>A live tulsi plant in a pot (ideal); a fresh sprig if a plant isn't available</a:t>
             </a:r>
             <a:endParaRPr lang="en-US" sz="1200" dirty="0"/>
           </a:p>
@@ -3612,6 +6106,26 @@
               <a:buChar char="•"/>
             </a:pPr>
             <a:r>
+              <a:rPr lang="en-US" sz="1200" dirty="0">
+                <a:solidFill>
+                  <a:srgbClr val="1C2833"/>
+                </a:solidFill>
+                <a:latin typeface="Arial" pitchFamily="34" charset="0"/>
+                <a:ea typeface="Arial" pitchFamily="34" charset="-122"/>
+                <a:cs typeface="Arial" pitchFamily="34" charset="-120"/>
+              </a:rPr>
+              <a:t>A second Lamiaceae plant for comparison if you can — sweet basil (</a:t>
+            </a:r>
+            <a:pPr algn="l" indent="0" marL="0">
+              <a:lnSpc>
+                <a:spcPts val="1620"/>
+              </a:lnSpc>
+              <a:spcAft>
+                <a:spcPts val="300"/>
+              </a:spcAft>
+              <a:buNone/>
+            </a:pPr>
+            <a:r>
               <a:rPr lang="en-US" sz="1200" i="1" dirty="0">
                 <a:solidFill>
                   <a:srgbClr val="1C2833"/>
@@ -3620,7 +6134,7 @@
                 <a:ea typeface="Arial" pitchFamily="34" charset="-122"/>
                 <a:cs typeface="Arial" pitchFamily="34" charset="-120"/>
               </a:rPr>
-              <a:t>eugenol</a:t>
+              <a:t>Ocimum basilicum</a:t>
             </a:r>
             <a:pPr algn="l" indent="0" marL="0">
               <a:lnSpc>
@@ -3640,36 +6154,44 @@
                 <a:ea typeface="Arial" pitchFamily="34" charset="-122"/>
                 <a:cs typeface="Arial" pitchFamily="34" charset="-120"/>
               </a:rPr>
-              <a:t> — a phenolic aromatic compound. The strong, slightly clove-like smell of tulsi is largely from eugenol. Also the main aromatic in actual clove (</a:t>
-            </a:r>
-            <a:pPr algn="l" indent="0" marL="0">
+              <a:t>) is the easy comparison</a:t>
+            </a:r>
+            <a:endParaRPr lang="en-US" sz="1200" dirty="0"/>
+          </a:p>
+          <a:p>
+            <a:pPr algn="l" marL="342900" indent="-342900">
               <a:lnSpc>
                 <a:spcPts val="1620"/>
               </a:lnSpc>
               <a:spcAft>
                 <a:spcPts val="300"/>
               </a:spcAft>
-              <a:buNone/>
-            </a:pPr>
-            <a:r>
-              <a:rPr lang="en-US" sz="1200" i="1" dirty="0">
-                <a:solidFill>
-                  <a:srgbClr val="1C2833"/>
-                </a:solidFill>
-                <a:latin typeface="Arial" pitchFamily="34" charset="0"/>
-                <a:ea typeface="Arial" pitchFamily="34" charset="-122"/>
-                <a:cs typeface="Arial" pitchFamily="34" charset="-120"/>
-              </a:rPr>
-              <a:t>Syzygium aromaticum</a:t>
-            </a:r>
-            <a:pPr algn="l" indent="0" marL="0">
+              <a:buSzPct val="100000"/>
+              <a:buChar char="•"/>
+            </a:pPr>
+            <a:r>
+              <a:rPr lang="en-US" sz="1200" dirty="0">
+                <a:solidFill>
+                  <a:srgbClr val="1C2833"/>
+                </a:solidFill>
+                <a:latin typeface="Arial" pitchFamily="34" charset="0"/>
+                <a:ea typeface="Arial" pitchFamily="34" charset="-122"/>
+                <a:cs typeface="Arial" pitchFamily="34" charset="-120"/>
+              </a:rPr>
+              <a:t>A clove (the spice — also rich in eugenol) for the smell-bridge</a:t>
+            </a:r>
+            <a:endParaRPr lang="en-US" sz="1200" dirty="0"/>
+          </a:p>
+          <a:p>
+            <a:pPr algn="l" marL="342900" indent="-342900">
               <a:lnSpc>
                 <a:spcPts val="1620"/>
               </a:lnSpc>
               <a:spcAft>
                 <a:spcPts val="300"/>
               </a:spcAft>
-              <a:buNone/>
+              <a:buSzPct val="100000"/>
+              <a:buChar char="•"/>
             </a:pPr>
             <a:r>
               <a:rPr lang="en-US" sz="1200" dirty="0">
@@ -3680,7 +6202,31 @@
                 <a:ea typeface="Arial" pitchFamily="34" charset="-122"/>
                 <a:cs typeface="Arial" pitchFamily="34" charset="-120"/>
               </a:rPr>
-              <a:t>).</a:t>
+              <a:t>Whiteboard</a:t>
+            </a:r>
+            <a:endParaRPr lang="en-US" sz="1200" dirty="0"/>
+          </a:p>
+          <a:p>
+            <a:pPr algn="l" marL="342900" indent="-342900">
+              <a:lnSpc>
+                <a:spcPts val="1620"/>
+              </a:lnSpc>
+              <a:spcAft>
+                <a:spcPts val="300"/>
+              </a:spcAft>
+              <a:buSzPct val="100000"/>
+              <a:buChar char="•"/>
+            </a:pPr>
+            <a:r>
+              <a:rPr lang="en-US" sz="1200" dirty="0">
+                <a:solidFill>
+                  <a:srgbClr val="1C2833"/>
+                </a:solidFill>
+                <a:latin typeface="Arial" pitchFamily="34" charset="0"/>
+                <a:ea typeface="Arial" pitchFamily="34" charset="-122"/>
+                <a:cs typeface="Arial" pitchFamily="34" charset="-120"/>
+              </a:rPr>
+              <a:t>Student notebooks</a:t>
             </a:r>
             <a:endParaRPr lang="en-US" sz="1200" dirty="0"/>
           </a:p>
@@ -3838,7 +6384,7 @@
                 <a:ea typeface="Georgia" pitchFamily="34" charset="-122"/>
                 <a:cs typeface="Georgia" pitchFamily="34" charset="-120"/>
               </a:rPr>
-              <a:t>Lesson flow</a:t>
+              <a:t>Vocabulary introduced today</a:t>
             </a:r>
             <a:endParaRPr lang="en-US" sz="1800" dirty="0"/>
           </a:p>
@@ -3847,6 +6393,196 @@
       <p:sp>
         <p:nvSpPr>
           <p:cNvPr id="4" name="Text 2"/>
+          <p:cNvSpPr/>
+          <p:nvPr/>
+        </p:nvSpPr>
+        <p:spPr>
+          <a:xfrm>
+            <a:off x="634901" y="883593"/>
+            <a:ext cx="8102798" cy="731341"/>
+          </a:xfrm>
+          <a:prstGeom prst="rect">
+            <a:avLst/>
+          </a:prstGeom>
+          <a:noFill/>
+          <a:ln/>
+        </p:spPr>
+        <p:txBody>
+          <a:bodyPr wrap="square" lIns="0" tIns="0" rIns="0" bIns="0" rtlCol="0" anchor="t"/>
+          <a:lstStyle/>
+          <a:p>
+            <a:pPr algn="l" marL="342900" indent="-342900">
+              <a:lnSpc>
+                <a:spcPts val="1620"/>
+              </a:lnSpc>
+              <a:spcAft>
+                <a:spcPts val="300"/>
+              </a:spcAft>
+              <a:buSzPct val="100000"/>
+              <a:buChar char="•"/>
+            </a:pPr>
+            <a:r>
+              <a:rPr lang="en-US" sz="1200" i="1" dirty="0">
+                <a:solidFill>
+                  <a:srgbClr val="1C2833"/>
+                </a:solidFill>
+                <a:latin typeface="Arial" pitchFamily="34" charset="0"/>
+                <a:ea typeface="Arial" pitchFamily="34" charset="-122"/>
+                <a:cs typeface="Arial" pitchFamily="34" charset="-120"/>
+              </a:rPr>
+              <a:t>tulasī</a:t>
+            </a:r>
+            <a:pPr algn="l" indent="0" marL="0">
+              <a:lnSpc>
+                <a:spcPts val="1620"/>
+              </a:lnSpc>
+              <a:spcAft>
+                <a:spcPts val="300"/>
+              </a:spcAft>
+              <a:buNone/>
+            </a:pPr>
+            <a:r>
+              <a:rPr lang="en-US" sz="1200" dirty="0">
+                <a:solidFill>
+                  <a:srgbClr val="1C2833"/>
+                </a:solidFill>
+                <a:latin typeface="Arial" pitchFamily="34" charset="0"/>
+                <a:ea typeface="Arial" pitchFamily="34" charset="-122"/>
+                <a:cs typeface="Arial" pitchFamily="34" charset="-120"/>
+              </a:rPr>
+              <a:t> (IAST: tulasī; lit. "the incomparable one") — </a:t>
+            </a:r>
+            <a:pPr algn="l" indent="0" marL="0">
+              <a:lnSpc>
+                <a:spcPts val="1620"/>
+              </a:lnSpc>
+              <a:spcAft>
+                <a:spcPts val="300"/>
+              </a:spcAft>
+              <a:buNone/>
+            </a:pPr>
+            <a:r>
+              <a:rPr lang="en-US" sz="1200" i="1" dirty="0">
+                <a:solidFill>
+                  <a:srgbClr val="1C2833"/>
+                </a:solidFill>
+                <a:latin typeface="Arial" pitchFamily="34" charset="0"/>
+                <a:ea typeface="Arial" pitchFamily="34" charset="-122"/>
+                <a:cs typeface="Arial" pitchFamily="34" charset="-120"/>
+              </a:rPr>
+              <a:t>Ocimum tenuiflorum</a:t>
+            </a:r>
+            <a:pPr algn="l" indent="0" marL="0">
+              <a:lnSpc>
+                <a:spcPts val="1620"/>
+              </a:lnSpc>
+              <a:spcAft>
+                <a:spcPts val="300"/>
+              </a:spcAft>
+              <a:buNone/>
+            </a:pPr>
+            <a:r>
+              <a:rPr lang="en-US" sz="1200" dirty="0">
+                <a:solidFill>
+                  <a:srgbClr val="1C2833"/>
+                </a:solidFill>
+                <a:latin typeface="Arial" pitchFamily="34" charset="0"/>
+                <a:ea typeface="Arial" pitchFamily="34" charset="-122"/>
+                <a:cs typeface="Arial" pitchFamily="34" charset="-120"/>
+              </a:rPr>
+              <a:t>, the herb commonly called holy basil.</a:t>
+            </a:r>
+            <a:endParaRPr lang="en-US" sz="1200" dirty="0"/>
+          </a:p>
+          <a:p>
+            <a:pPr algn="l" marL="342900" indent="-342900">
+              <a:lnSpc>
+                <a:spcPts val="1620"/>
+              </a:lnSpc>
+              <a:spcAft>
+                <a:spcPts val="300"/>
+              </a:spcAft>
+              <a:buSzPct val="100000"/>
+              <a:buChar char="•"/>
+            </a:pPr>
+            <a:r>
+              <a:rPr lang="en-US" sz="1200" i="1" dirty="0">
+                <a:solidFill>
+                  <a:srgbClr val="1C2833"/>
+                </a:solidFill>
+                <a:latin typeface="Arial" pitchFamily="34" charset="0"/>
+                <a:ea typeface="Arial" pitchFamily="34" charset="-122"/>
+                <a:cs typeface="Arial" pitchFamily="34" charset="-120"/>
+              </a:rPr>
+              <a:t>eugenol</a:t>
+            </a:r>
+            <a:pPr algn="l" indent="0" marL="0">
+              <a:lnSpc>
+                <a:spcPts val="1620"/>
+              </a:lnSpc>
+              <a:spcAft>
+                <a:spcPts val="300"/>
+              </a:spcAft>
+              <a:buNone/>
+            </a:pPr>
+            <a:r>
+              <a:rPr lang="en-US" sz="1200" dirty="0">
+                <a:solidFill>
+                  <a:srgbClr val="1C2833"/>
+                </a:solidFill>
+                <a:latin typeface="Arial" pitchFamily="34" charset="0"/>
+                <a:ea typeface="Arial" pitchFamily="34" charset="-122"/>
+                <a:cs typeface="Arial" pitchFamily="34" charset="-120"/>
+              </a:rPr>
+              <a:t> — a phenolic aromatic compound. The strong, slightly clove-like smell of tulsi is largely from eugenol. Also the main aromatic in actual clove (</a:t>
+            </a:r>
+            <a:pPr algn="l" indent="0" marL="0">
+              <a:lnSpc>
+                <a:spcPts val="1620"/>
+              </a:lnSpc>
+              <a:spcAft>
+                <a:spcPts val="300"/>
+              </a:spcAft>
+              <a:buNone/>
+            </a:pPr>
+            <a:r>
+              <a:rPr lang="en-US" sz="1200" i="1" dirty="0">
+                <a:solidFill>
+                  <a:srgbClr val="1C2833"/>
+                </a:solidFill>
+                <a:latin typeface="Arial" pitchFamily="34" charset="0"/>
+                <a:ea typeface="Arial" pitchFamily="34" charset="-122"/>
+                <a:cs typeface="Arial" pitchFamily="34" charset="-120"/>
+              </a:rPr>
+              <a:t>Syzygium aromaticum</a:t>
+            </a:r>
+            <a:pPr algn="l" indent="0" marL="0">
+              <a:lnSpc>
+                <a:spcPts val="1620"/>
+              </a:lnSpc>
+              <a:spcAft>
+                <a:spcPts val="300"/>
+              </a:spcAft>
+              <a:buNone/>
+            </a:pPr>
+            <a:r>
+              <a:rPr lang="en-US" sz="1200" dirty="0">
+                <a:solidFill>
+                  <a:srgbClr val="1C2833"/>
+                </a:solidFill>
+                <a:latin typeface="Arial" pitchFamily="34" charset="0"/>
+                <a:ea typeface="Arial" pitchFamily="34" charset="-122"/>
+                <a:cs typeface="Arial" pitchFamily="34" charset="-120"/>
+              </a:rPr>
+              <a:t>).</a:t>
+            </a:r>
+            <a:endParaRPr lang="en-US" sz="1200" dirty="0"/>
+          </a:p>
+        </p:txBody>
+      </p:sp>
+      <p:sp>
+        <p:nvSpPr>
+          <p:cNvPr id="5" name="Text 3"/>
           <p:cNvSpPr/>
           <p:nvPr/>
         </p:nvSpPr>
@@ -3996,7 +6732,7 @@
                 <a:ea typeface="Georgia" pitchFamily="34" charset="-122"/>
                 <a:cs typeface="Georgia" pitchFamily="34" charset="-120"/>
               </a:rPr>
-              <a:t>Warm-up (5 min)</a:t>
+              <a:t>Lesson flow</a:t>
             </a:r>
             <a:endParaRPr lang="en-US" sz="1800" dirty="0"/>
           </a:p>
@@ -4005,219 +6741,6 @@
       <p:sp>
         <p:nvSpPr>
           <p:cNvPr id="4" name="Text 2"/>
-          <p:cNvSpPr/>
-          <p:nvPr/>
-        </p:nvSpPr>
-        <p:spPr>
-          <a:xfrm>
-            <a:off x="406301" y="870942"/>
-            <a:ext cx="8498026" cy="213271"/>
-          </a:xfrm>
-          <a:prstGeom prst="rect">
-            <a:avLst/>
-          </a:prstGeom>
-          <a:noFill/>
-          <a:ln/>
-        </p:spPr>
-        <p:txBody>
-          <a:bodyPr wrap="square" lIns="0" tIns="0" rIns="0" bIns="0" rtlCol="0" anchor="t"/>
-          <a:lstStyle/>
-          <a:p>
-            <a:pPr algn="l" indent="0" marL="0">
-              <a:lnSpc>
-                <a:spcPts val="1680"/>
-              </a:lnSpc>
-              <a:spcBef>
-                <a:spcPts val="300"/>
-              </a:spcBef>
-              <a:spcAft>
-                <a:spcPts val="300"/>
-              </a:spcAft>
-              <a:buNone/>
-            </a:pPr>
-            <a:r>
-              <a:rPr lang="en-US" sz="1200" dirty="0">
-                <a:solidFill>
-                  <a:srgbClr val="1C2833"/>
-                </a:solidFill>
-                <a:latin typeface="Arial" pitchFamily="34" charset="0"/>
-                <a:ea typeface="Arial" pitchFamily="34" charset="-122"/>
-                <a:cs typeface="Arial" pitchFamily="34" charset="-120"/>
-              </a:rPr>
-              <a:t>Pass the tulsi plant slowly along one row. Each student takes a single leaf between their fingers, rubs it gently, and sniffs.</a:t>
-            </a:r>
-            <a:endParaRPr lang="en-US" sz="1200" dirty="0"/>
-          </a:p>
-        </p:txBody>
-      </p:sp>
-      <p:sp>
-        <p:nvSpPr>
-          <p:cNvPr id="5" name="Text 3"/>
-          <p:cNvSpPr/>
-          <p:nvPr/>
-        </p:nvSpPr>
-        <p:spPr>
-          <a:xfrm>
-            <a:off x="406301" y="1160413"/>
-            <a:ext cx="8498026" cy="426541"/>
-          </a:xfrm>
-          <a:prstGeom prst="rect">
-            <a:avLst/>
-          </a:prstGeom>
-          <a:noFill/>
-          <a:ln/>
-        </p:spPr>
-        <p:txBody>
-          <a:bodyPr wrap="square" lIns="0" tIns="0" rIns="0" bIns="0" rtlCol="0" anchor="t"/>
-          <a:lstStyle/>
-          <a:p>
-            <a:pPr algn="l" indent="0" marL="0">
-              <a:lnSpc>
-                <a:spcPts val="1680"/>
-              </a:lnSpc>
-              <a:spcBef>
-                <a:spcPts val="300"/>
-              </a:spcBef>
-              <a:spcAft>
-                <a:spcPts val="300"/>
-              </a:spcAft>
-              <a:buNone/>
-            </a:pPr>
-            <a:r>
-              <a:rPr lang="en-US" sz="1200" i="1" dirty="0">
-                <a:solidFill>
-                  <a:srgbClr val="1C2833"/>
-                </a:solidFill>
-                <a:latin typeface="Arial" pitchFamily="34" charset="0"/>
-                <a:ea typeface="Arial" pitchFamily="34" charset="-122"/>
-                <a:cs typeface="Arial" pitchFamily="34" charset="-120"/>
-              </a:rPr>
-              <a:t>"What does it smell like? Three words."</a:t>
-            </a:r>
-            <a:pPr algn="l" indent="0" marL="0">
-              <a:lnSpc>
-                <a:spcPts val="1680"/>
-              </a:lnSpc>
-              <a:spcBef>
-                <a:spcPts val="300"/>
-              </a:spcBef>
-              <a:spcAft>
-                <a:spcPts val="300"/>
-              </a:spcAft>
-              <a:buNone/>
-            </a:pPr>
-            <a:r>
-              <a:rPr lang="en-US" sz="1200" dirty="0">
-                <a:solidFill>
-                  <a:srgbClr val="1C2833"/>
-                </a:solidFill>
-                <a:latin typeface="Arial" pitchFamily="34" charset="0"/>
-                <a:ea typeface="Arial" pitchFamily="34" charset="-122"/>
-                <a:cs typeface="Arial" pitchFamily="34" charset="-120"/>
-              </a:rPr>
-              <a:t> Take 5–6 responses. Likely answers: "sharp," "minty," "spicy," "clove-y," "medicine-ish."</a:t>
-            </a:r>
-            <a:endParaRPr lang="en-US" sz="1200" dirty="0"/>
-          </a:p>
-        </p:txBody>
-      </p:sp>
-      <p:sp>
-        <p:nvSpPr>
-          <p:cNvPr id="6" name="Text 4"/>
-          <p:cNvSpPr/>
-          <p:nvPr/>
-        </p:nvSpPr>
-        <p:spPr>
-          <a:xfrm>
-            <a:off x="406301" y="1663154"/>
-            <a:ext cx="8498026" cy="213271"/>
-          </a:xfrm>
-          <a:prstGeom prst="rect">
-            <a:avLst/>
-          </a:prstGeom>
-          <a:noFill/>
-          <a:ln/>
-        </p:spPr>
-        <p:txBody>
-          <a:bodyPr wrap="square" lIns="0" tIns="0" rIns="0" bIns="0" rtlCol="0" anchor="t"/>
-          <a:lstStyle/>
-          <a:p>
-            <a:pPr algn="l" indent="0" marL="0">
-              <a:lnSpc>
-                <a:spcPts val="1680"/>
-              </a:lnSpc>
-              <a:spcBef>
-                <a:spcPts val="300"/>
-              </a:spcBef>
-              <a:spcAft>
-                <a:spcPts val="300"/>
-              </a:spcAft>
-              <a:buNone/>
-            </a:pPr>
-            <a:r>
-              <a:rPr lang="en-US" sz="1200" dirty="0">
-                <a:solidFill>
-                  <a:srgbClr val="1C2833"/>
-                </a:solidFill>
-                <a:latin typeface="Arial" pitchFamily="34" charset="0"/>
-                <a:ea typeface="Arial" pitchFamily="34" charset="-122"/>
-                <a:cs typeface="Arial" pitchFamily="34" charset="-120"/>
-              </a:rPr>
-              <a:t>Now pass the clove. </a:t>
-            </a:r>
-            <a:pPr algn="l" indent="0" marL="0">
-              <a:lnSpc>
-                <a:spcPts val="1680"/>
-              </a:lnSpc>
-              <a:spcBef>
-                <a:spcPts val="300"/>
-              </a:spcBef>
-              <a:spcAft>
-                <a:spcPts val="300"/>
-              </a:spcAft>
-              <a:buNone/>
-            </a:pPr>
-            <a:r>
-              <a:rPr lang="en-US" sz="1200" i="1" dirty="0">
-                <a:solidFill>
-                  <a:srgbClr val="1C2833"/>
-                </a:solidFill>
-                <a:latin typeface="Arial" pitchFamily="34" charset="0"/>
-                <a:ea typeface="Arial" pitchFamily="34" charset="-122"/>
-                <a:cs typeface="Arial" pitchFamily="34" charset="-120"/>
-              </a:rPr>
-              <a:t>"Familiar?"</a:t>
-            </a:r>
-            <a:pPr algn="l" indent="0" marL="0">
-              <a:lnSpc>
-                <a:spcPts val="1680"/>
-              </a:lnSpc>
-              <a:spcBef>
-                <a:spcPts val="300"/>
-              </a:spcBef>
-              <a:spcAft>
-                <a:spcPts val="300"/>
-              </a:spcAft>
-              <a:buNone/>
-            </a:pPr>
-            <a:r>
-              <a:rPr lang="en-US" sz="1200" dirty="0">
-                <a:solidFill>
-                  <a:srgbClr val="1C2833"/>
-                </a:solidFill>
-                <a:latin typeface="Arial" pitchFamily="34" charset="0"/>
-                <a:ea typeface="Arial" pitchFamily="34" charset="-122"/>
-                <a:cs typeface="Arial" pitchFamily="34" charset="-120"/>
-              </a:rPr>
-              <a:t> The connection is the molecule. Don't tell them yet — let them notice.</a:t>
-            </a:r>
-            <a:endParaRPr lang="en-US" sz="1200" dirty="0"/>
-          </a:p>
-        </p:txBody>
-      </p:sp>
-      <p:sp>
-        <p:nvSpPr>
-          <p:cNvPr id="7" name="Text 5"/>
           <p:cNvSpPr/>
           <p:nvPr/>
         </p:nvSpPr>
@@ -4367,7 +6890,7 @@
                 <a:ea typeface="Georgia" pitchFamily="34" charset="-122"/>
                 <a:cs typeface="Georgia" pitchFamily="34" charset="-120"/>
               </a:rPr>
-              <a:t>Activity (15 min) — Smell-and-sketch</a:t>
+              <a:t>Warm-up (5 min)</a:t>
             </a:r>
             <a:endParaRPr lang="en-US" sz="1800" dirty="0"/>
           </a:p>
@@ -4382,7 +6905,7 @@
         <p:spPr>
           <a:xfrm>
             <a:off x="406301" y="870942"/>
-            <a:ext cx="8498026" cy="639812"/>
+            <a:ext cx="8498026" cy="213271"/>
           </a:xfrm>
           <a:prstGeom prst="rect">
             <a:avLst/>
@@ -4415,76 +6938,7 @@
                 <a:ea typeface="Arial" pitchFamily="34" charset="-122"/>
                 <a:cs typeface="Arial" pitchFamily="34" charset="-120"/>
               </a:rPr>
-              <a:t>– Each student gets a piece of paper and crayons. – Draw the tulsi leaf — accurate to shape, edge, and size. Label: leaf shape (ovate), edge (serrate), family (Lamiaceae, square stem). – Below the drawing, write one sentence: </a:t>
-            </a:r>
-            <a:pPr algn="l" indent="0" marL="0">
-              <a:lnSpc>
-                <a:spcPts val="1680"/>
-              </a:lnSpc>
-              <a:spcBef>
-                <a:spcPts val="300"/>
-              </a:spcBef>
-              <a:spcAft>
-                <a:spcPts val="300"/>
-              </a:spcAft>
-              <a:buNone/>
-            </a:pPr>
-            <a:r>
-              <a:rPr lang="en-US" sz="1200" i="1" dirty="0">
-                <a:solidFill>
-                  <a:srgbClr val="1C2833"/>
-                </a:solidFill>
-                <a:latin typeface="Arial" pitchFamily="34" charset="0"/>
-                <a:ea typeface="Arial" pitchFamily="34" charset="-122"/>
-                <a:cs typeface="Arial" pitchFamily="34" charset="-120"/>
-              </a:rPr>
-              <a:t>"What I smelled when I crushed the leaf was ____."</a:t>
-            </a:r>
-            <a:pPr algn="l" indent="0" marL="0">
-              <a:lnSpc>
-                <a:spcPts val="1680"/>
-              </a:lnSpc>
-              <a:spcBef>
-                <a:spcPts val="300"/>
-              </a:spcBef>
-              <a:spcAft>
-                <a:spcPts val="300"/>
-              </a:spcAft>
-              <a:buNone/>
-            </a:pPr>
-            <a:r>
-              <a:rPr lang="en-US" sz="1200" dirty="0">
-                <a:solidFill>
-                  <a:srgbClr val="1C2833"/>
-                </a:solidFill>
-                <a:latin typeface="Arial" pitchFamily="34" charset="0"/>
-                <a:ea typeface="Arial" pitchFamily="34" charset="-122"/>
-                <a:cs typeface="Arial" pitchFamily="34" charset="-120"/>
-              </a:rPr>
-              <a:t> – Below that, the chemistry box: </a:t>
-            </a:r>
-            <a:pPr algn="l" indent="0" marL="0">
-              <a:lnSpc>
-                <a:spcPts val="1680"/>
-              </a:lnSpc>
-              <a:spcBef>
-                <a:spcPts val="300"/>
-              </a:spcBef>
-              <a:spcAft>
-                <a:spcPts val="300"/>
-              </a:spcAft>
-              <a:buNone/>
-            </a:pPr>
-            <a:r>
-              <a:rPr lang="en-US" sz="1200" b="1" dirty="0">
-                <a:solidFill>
-                  <a:srgbClr val="1C2833"/>
-                </a:solidFill>
-                <a:latin typeface="Arial" pitchFamily="34" charset="0"/>
-                <a:ea typeface="Arial" pitchFamily="34" charset="-122"/>
-                <a:cs typeface="Arial" pitchFamily="34" charset="-120"/>
-              </a:rPr>
-              <a:t>Active compound: eugenol.</a:t>
+              <a:t>Pass the tulsi plant slowly along one row. Each student takes a single leaf between their fingers, rubs it gently, and sniffs.</a:t>
             </a:r>
             <a:endParaRPr lang="en-US" sz="1200" dirty="0"/>
           </a:p>
@@ -4498,7 +6952,7 @@
         </p:nvSpPr>
         <p:spPr>
           <a:xfrm>
-            <a:off x="406301" y="1586954"/>
+            <a:off x="406301" y="1160413"/>
             <a:ext cx="8498026" cy="426541"/>
           </a:xfrm>
           <a:prstGeom prst="rect">
@@ -4524,6 +6978,29 @@
               <a:buNone/>
             </a:pPr>
             <a:r>
+              <a:rPr lang="en-US" sz="1200" i="1" dirty="0">
+                <a:solidFill>
+                  <a:srgbClr val="1C2833"/>
+                </a:solidFill>
+                <a:latin typeface="Arial" pitchFamily="34" charset="0"/>
+                <a:ea typeface="Arial" pitchFamily="34" charset="-122"/>
+                <a:cs typeface="Arial" pitchFamily="34" charset="-120"/>
+              </a:rPr>
+              <a:t>"What does it smell like? Three words."</a:t>
+            </a:r>
+            <a:pPr algn="l" indent="0" marL="0">
+              <a:lnSpc>
+                <a:spcPts val="1680"/>
+              </a:lnSpc>
+              <a:spcBef>
+                <a:spcPts val="300"/>
+              </a:spcBef>
+              <a:spcAft>
+                <a:spcPts val="300"/>
+              </a:spcAft>
+              <a:buNone/>
+            </a:pPr>
+            <a:r>
               <a:rPr lang="en-US" sz="1200" dirty="0">
                 <a:solidFill>
                   <a:srgbClr val="1C2833"/>
@@ -4532,8 +7009,33 @@
                 <a:ea typeface="Arial" pitchFamily="34" charset="-122"/>
                 <a:cs typeface="Arial" pitchFamily="34" charset="-120"/>
               </a:rPr>
-              <a:t>Optional: pass around the sweet basil (or any other Lamiaceae) for comparison. </a:t>
-            </a:r>
+              <a:t> Take 5–6 responses. Likely answers: "sharp," "minty," "spicy," "clove-y," "medicine-ish."</a:t>
+            </a:r>
+            <a:endParaRPr lang="en-US" sz="1200" dirty="0"/>
+          </a:p>
+        </p:txBody>
+      </p:sp>
+      <p:sp>
+        <p:nvSpPr>
+          <p:cNvPr id="6" name="Text 4"/>
+          <p:cNvSpPr/>
+          <p:nvPr/>
+        </p:nvSpPr>
+        <p:spPr>
+          <a:xfrm>
+            <a:off x="406301" y="1663154"/>
+            <a:ext cx="8498026" cy="213271"/>
+          </a:xfrm>
+          <a:prstGeom prst="rect">
+            <a:avLst/>
+          </a:prstGeom>
+          <a:noFill/>
+          <a:ln/>
+        </p:spPr>
+        <p:txBody>
+          <a:bodyPr wrap="square" lIns="0" tIns="0" rIns="0" bIns="0" rtlCol="0" anchor="t"/>
+          <a:lstStyle/>
+          <a:p>
             <a:pPr algn="l" indent="0" marL="0">
               <a:lnSpc>
                 <a:spcPts val="1680"/>
@@ -4547,6 +7049,29 @@
               <a:buNone/>
             </a:pPr>
             <a:r>
+              <a:rPr lang="en-US" sz="1200" dirty="0">
+                <a:solidFill>
+                  <a:srgbClr val="1C2833"/>
+                </a:solidFill>
+                <a:latin typeface="Arial" pitchFamily="34" charset="0"/>
+                <a:ea typeface="Arial" pitchFamily="34" charset="-122"/>
+                <a:cs typeface="Arial" pitchFamily="34" charset="-120"/>
+              </a:rPr>
+              <a:t>Now pass the clove. </a:t>
+            </a:r>
+            <a:pPr algn="l" indent="0" marL="0">
+              <a:lnSpc>
+                <a:spcPts val="1680"/>
+              </a:lnSpc>
+              <a:spcBef>
+                <a:spcPts val="300"/>
+              </a:spcBef>
+              <a:spcAft>
+                <a:spcPts val="300"/>
+              </a:spcAft>
+              <a:buNone/>
+            </a:pPr>
+            <a:r>
               <a:rPr lang="en-US" sz="1200" i="1" dirty="0">
                 <a:solidFill>
                   <a:srgbClr val="1C2833"/>
@@ -4555,7 +7080,30 @@
                 <a:ea typeface="Arial" pitchFamily="34" charset="-122"/>
                 <a:cs typeface="Arial" pitchFamily="34" charset="-120"/>
               </a:rPr>
-              <a:t>"Different leaf? Different smell? They are the same plant family but different species."</a:t>
+              <a:t>"Familiar?"</a:t>
+            </a:r>
+            <a:pPr algn="l" indent="0" marL="0">
+              <a:lnSpc>
+                <a:spcPts val="1680"/>
+              </a:lnSpc>
+              <a:spcBef>
+                <a:spcPts val="300"/>
+              </a:spcBef>
+              <a:spcAft>
+                <a:spcPts val="300"/>
+              </a:spcAft>
+              <a:buNone/>
+            </a:pPr>
+            <a:r>
+              <a:rPr lang="en-US" sz="1200" dirty="0">
+                <a:solidFill>
+                  <a:srgbClr val="1C2833"/>
+                </a:solidFill>
+                <a:latin typeface="Arial" pitchFamily="34" charset="0"/>
+                <a:ea typeface="Arial" pitchFamily="34" charset="-122"/>
+                <a:cs typeface="Arial" pitchFamily="34" charset="-120"/>
+              </a:rPr>
+              <a:t> The connection is the molecule. Don't tell them yet — let them notice.</a:t>
             </a:r>
             <a:endParaRPr lang="en-US" sz="1200" dirty="0"/>
           </a:p>
@@ -4563,7 +7111,7 @@
       </p:sp>
       <p:sp>
         <p:nvSpPr>
-          <p:cNvPr id="6" name="Text 4"/>
+          <p:cNvPr id="7" name="Text 5"/>
           <p:cNvSpPr/>
           <p:nvPr/>
         </p:nvSpPr>
@@ -4713,7 +7261,7 @@
                 <a:ea typeface="Georgia" pitchFamily="34" charset="-122"/>
                 <a:cs typeface="Georgia" pitchFamily="34" charset="-120"/>
               </a:rPr>
-              <a:t>Wrap-up (5 min)</a:t>
+              <a:t>Core (20 min)</a:t>
             </a:r>
             <a:endParaRPr lang="en-US" sz="1800" dirty="0"/>
           </a:p>
@@ -4727,8 +7275,8 @@
         </p:nvSpPr>
         <p:spPr>
           <a:xfrm>
-            <a:off x="406301" y="870942"/>
-            <a:ext cx="8498026" cy="426541"/>
+            <a:off x="634901" y="883593"/>
+            <a:ext cx="8102798" cy="281880"/>
           </a:xfrm>
           <a:prstGeom prst="rect">
             <a:avLst/>
@@ -4740,13 +7288,31 @@
           <a:bodyPr wrap="square" lIns="0" tIns="0" rIns="0" bIns="0" rtlCol="0" anchor="t"/>
           <a:lstStyle/>
           <a:p>
-            <a:pPr algn="l" indent="0" marL="0">
-              <a:lnSpc>
-                <a:spcPts val="1680"/>
-              </a:lnSpc>
-              <a:spcBef>
-                <a:spcPts val="300"/>
-              </a:spcBef>
+            <a:pPr algn="l" marL="342900" indent="-342900">
+              <a:lnSpc>
+                <a:spcPts val="1620"/>
+              </a:lnSpc>
+              <a:spcAft>
+                <a:spcPts val="300"/>
+              </a:spcAft>
+              <a:buSzPct val="100000"/>
+              <a:buChar char="•"/>
+            </a:pPr>
+            <a:r>
+              <a:rPr lang="en-US" sz="1200" b="1" dirty="0">
+                <a:solidFill>
+                  <a:srgbClr val="1C2833"/>
+                </a:solidFill>
+                <a:latin typeface="Arial" pitchFamily="34" charset="0"/>
+                <a:ea typeface="Arial" pitchFamily="34" charset="-122"/>
+                <a:cs typeface="Arial" pitchFamily="34" charset="-120"/>
+              </a:rPr>
+              <a:t>Identify it.</a:t>
+            </a:r>
+            <a:pPr algn="l" indent="0" marL="0">
+              <a:lnSpc>
+                <a:spcPts val="1620"/>
+              </a:lnSpc>
               <a:spcAft>
                 <a:spcPts val="300"/>
               </a:spcAft>
@@ -4761,15 +7327,290 @@
                 <a:ea typeface="Arial" pitchFamily="34" charset="-122"/>
                 <a:cs typeface="Arial" pitchFamily="34" charset="-120"/>
               </a:rPr>
-              <a:t>– Exit ticket on a slip: </a:t>
-            </a:r>
-            <a:pPr algn="l" indent="0" marL="0">
-              <a:lnSpc>
-                <a:spcPts val="1680"/>
-              </a:lnSpc>
-              <a:spcBef>
-                <a:spcPts val="300"/>
-              </a:spcBef>
+              <a:t> Tulsi has:</a:t>
+            </a:r>
+            <a:endParaRPr lang="en-US" sz="1200" dirty="0"/>
+          </a:p>
+        </p:txBody>
+      </p:sp>
+      <p:sp>
+        <p:nvSpPr>
+          <p:cNvPr id="5" name="Text 3"/>
+          <p:cNvSpPr/>
+          <p:nvPr/>
+        </p:nvSpPr>
+        <p:spPr>
+          <a:xfrm>
+            <a:off x="634901" y="1266974"/>
+            <a:ext cx="8102798" cy="1424583"/>
+          </a:xfrm>
+          <a:prstGeom prst="rect">
+            <a:avLst/>
+          </a:prstGeom>
+          <a:noFill/>
+          <a:ln/>
+        </p:spPr>
+        <p:txBody>
+          <a:bodyPr wrap="square" lIns="0" tIns="0" rIns="0" bIns="0" rtlCol="0" anchor="t"/>
+          <a:lstStyle/>
+          <a:p>
+            <a:pPr algn="l" marL="342900" indent="-342900">
+              <a:lnSpc>
+                <a:spcPts val="1620"/>
+              </a:lnSpc>
+              <a:spcAft>
+                <a:spcPts val="300"/>
+              </a:spcAft>
+              <a:buSzPct val="100000"/>
+              <a:buChar char="•"/>
+            </a:pPr>
+            <a:r>
+              <a:rPr lang="en-US" sz="1200" b="1" dirty="0">
+                <a:solidFill>
+                  <a:srgbClr val="1C2833"/>
+                </a:solidFill>
+                <a:latin typeface="Arial" pitchFamily="34" charset="0"/>
+                <a:ea typeface="Arial" pitchFamily="34" charset="-122"/>
+                <a:cs typeface="Arial" pitchFamily="34" charset="-120"/>
+              </a:rPr>
+              <a:t>Leaf shape:</a:t>
+            </a:r>
+            <a:pPr algn="l" indent="0" marL="0">
+              <a:lnSpc>
+                <a:spcPts val="1620"/>
+              </a:lnSpc>
+              <a:spcAft>
+                <a:spcPts val="300"/>
+              </a:spcAft>
+              <a:buNone/>
+            </a:pPr>
+            <a:r>
+              <a:rPr lang="en-US" sz="1200" dirty="0">
+                <a:solidFill>
+                  <a:srgbClr val="1C2833"/>
+                </a:solidFill>
+                <a:latin typeface="Arial" pitchFamily="34" charset="0"/>
+                <a:ea typeface="Arial" pitchFamily="34" charset="-122"/>
+                <a:cs typeface="Arial" pitchFamily="34" charset="-120"/>
+              </a:rPr>
+              <a:t> ovate (oval-pointed), about 2–5 cm long, with </a:t>
+            </a:r>
+            <a:pPr algn="l" indent="0" marL="0">
+              <a:lnSpc>
+                <a:spcPts val="1620"/>
+              </a:lnSpc>
+              <a:spcAft>
+                <a:spcPts val="300"/>
+              </a:spcAft>
+              <a:buNone/>
+            </a:pPr>
+            <a:r>
+              <a:rPr lang="en-US" sz="1200" b="1" dirty="0">
+                <a:solidFill>
+                  <a:srgbClr val="1C2833"/>
+                </a:solidFill>
+                <a:latin typeface="Arial" pitchFamily="34" charset="0"/>
+                <a:ea typeface="Arial" pitchFamily="34" charset="-122"/>
+                <a:cs typeface="Arial" pitchFamily="34" charset="-120"/>
+              </a:rPr>
+              <a:t>toothed margins</a:t>
+            </a:r>
+            <a:pPr algn="l" indent="0" marL="0">
+              <a:lnSpc>
+                <a:spcPts val="1620"/>
+              </a:lnSpc>
+              <a:spcAft>
+                <a:spcPts val="300"/>
+              </a:spcAft>
+              <a:buNone/>
+            </a:pPr>
+            <a:r>
+              <a:rPr lang="en-US" sz="1200" dirty="0">
+                <a:solidFill>
+                  <a:srgbClr val="1C2833"/>
+                </a:solidFill>
+                <a:latin typeface="Arial" pitchFamily="34" charset="0"/>
+                <a:ea typeface="Arial" pitchFamily="34" charset="-122"/>
+                <a:cs typeface="Arial" pitchFamily="34" charset="-120"/>
+              </a:rPr>
+              <a:t> (small jagged edges, called "serrate" in botany).</a:t>
+            </a:r>
+            <a:endParaRPr lang="en-US" sz="1200" dirty="0"/>
+          </a:p>
+          <a:p>
+            <a:pPr algn="l" marL="342900" indent="-342900">
+              <a:lnSpc>
+                <a:spcPts val="1620"/>
+              </a:lnSpc>
+              <a:spcAft>
+                <a:spcPts val="300"/>
+              </a:spcAft>
+              <a:buSzPct val="100000"/>
+              <a:buChar char="•"/>
+            </a:pPr>
+            <a:r>
+              <a:rPr lang="en-US" sz="1200" b="1" dirty="0">
+                <a:solidFill>
+                  <a:srgbClr val="1C2833"/>
+                </a:solidFill>
+                <a:latin typeface="Arial" pitchFamily="34" charset="0"/>
+                <a:ea typeface="Arial" pitchFamily="34" charset="-122"/>
+                <a:cs typeface="Arial" pitchFamily="34" charset="-120"/>
+              </a:rPr>
+              <a:t>Stem:</a:t>
+            </a:r>
+            <a:pPr algn="l" indent="0" marL="0">
+              <a:lnSpc>
+                <a:spcPts val="1620"/>
+              </a:lnSpc>
+              <a:spcAft>
+                <a:spcPts val="300"/>
+              </a:spcAft>
+              <a:buNone/>
+            </a:pPr>
+            <a:r>
+              <a:rPr lang="en-US" sz="1200" dirty="0">
+                <a:solidFill>
+                  <a:srgbClr val="1C2833"/>
+                </a:solidFill>
+                <a:latin typeface="Arial" pitchFamily="34" charset="0"/>
+                <a:ea typeface="Arial" pitchFamily="34" charset="-122"/>
+                <a:cs typeface="Arial" pitchFamily="34" charset="-120"/>
+              </a:rPr>
+              <a:t> square in cross-section — characteristic of the </a:t>
+            </a:r>
+            <a:pPr algn="l" indent="0" marL="0">
+              <a:lnSpc>
+                <a:spcPts val="1620"/>
+              </a:lnSpc>
+              <a:spcAft>
+                <a:spcPts val="300"/>
+              </a:spcAft>
+              <a:buNone/>
+            </a:pPr>
+            <a:r>
+              <a:rPr lang="en-US" sz="1200" b="1" dirty="0">
+                <a:solidFill>
+                  <a:srgbClr val="1C2833"/>
+                </a:solidFill>
+                <a:latin typeface="Arial" pitchFamily="34" charset="0"/>
+                <a:ea typeface="Arial" pitchFamily="34" charset="-122"/>
+                <a:cs typeface="Arial" pitchFamily="34" charset="-120"/>
+              </a:rPr>
+              <a:t>Lamiaceae</a:t>
+            </a:r>
+            <a:pPr algn="l" indent="0" marL="0">
+              <a:lnSpc>
+                <a:spcPts val="1620"/>
+              </a:lnSpc>
+              <a:spcAft>
+                <a:spcPts val="300"/>
+              </a:spcAft>
+              <a:buNone/>
+            </a:pPr>
+            <a:r>
+              <a:rPr lang="en-US" sz="1200" dirty="0">
+                <a:solidFill>
+                  <a:srgbClr val="1C2833"/>
+                </a:solidFill>
+                <a:latin typeface="Arial" pitchFamily="34" charset="0"/>
+                <a:ea typeface="Arial" pitchFamily="34" charset="-122"/>
+                <a:cs typeface="Arial" pitchFamily="34" charset="-120"/>
+              </a:rPr>
+              <a:t> family (mint family). All six plants in this family share this. Press a stem between thumb and forefinger and feel the corners.</a:t>
+            </a:r>
+            <a:endParaRPr lang="en-US" sz="1200" dirty="0"/>
+          </a:p>
+          <a:p>
+            <a:pPr algn="l" marL="342900" indent="-342900">
+              <a:lnSpc>
+                <a:spcPts val="1620"/>
+              </a:lnSpc>
+              <a:spcAft>
+                <a:spcPts val="300"/>
+              </a:spcAft>
+              <a:buSzPct val="100000"/>
+              <a:buChar char="•"/>
+            </a:pPr>
+            <a:r>
+              <a:rPr lang="en-US" sz="1200" b="1" dirty="0">
+                <a:solidFill>
+                  <a:srgbClr val="1C2833"/>
+                </a:solidFill>
+                <a:latin typeface="Arial" pitchFamily="34" charset="0"/>
+                <a:ea typeface="Arial" pitchFamily="34" charset="-122"/>
+                <a:cs typeface="Arial" pitchFamily="34" charset="-120"/>
+              </a:rPr>
+              <a:t>Smell when crushed:</a:t>
+            </a:r>
+            <a:pPr algn="l" indent="0" marL="0">
+              <a:lnSpc>
+                <a:spcPts val="1620"/>
+              </a:lnSpc>
+              <a:spcAft>
+                <a:spcPts val="300"/>
+              </a:spcAft>
+              <a:buNone/>
+            </a:pPr>
+            <a:r>
+              <a:rPr lang="en-US" sz="1200" dirty="0">
+                <a:solidFill>
+                  <a:srgbClr val="1C2833"/>
+                </a:solidFill>
+                <a:latin typeface="Arial" pitchFamily="34" charset="0"/>
+                <a:ea typeface="Arial" pitchFamily="34" charset="-122"/>
+                <a:cs typeface="Arial" pitchFamily="34" charset="-120"/>
+              </a:rPr>
+              <a:t> the sharp, clove-like aroma.</a:t>
+            </a:r>
+            <a:endParaRPr lang="en-US" sz="1200" dirty="0"/>
+          </a:p>
+          <a:p>
+            <a:pPr algn="l" marL="342900" indent="-342900">
+              <a:lnSpc>
+                <a:spcPts val="1620"/>
+              </a:lnSpc>
+              <a:spcAft>
+                <a:spcPts val="300"/>
+              </a:spcAft>
+              <a:buSzPct val="100000"/>
+              <a:buChar char="•"/>
+            </a:pPr>
+            <a:r>
+              <a:rPr lang="en-US" sz="1200" b="1" dirty="0">
+                <a:solidFill>
+                  <a:srgbClr val="1C2833"/>
+                </a:solidFill>
+                <a:latin typeface="Arial" pitchFamily="34" charset="0"/>
+                <a:ea typeface="Arial" pitchFamily="34" charset="-122"/>
+                <a:cs typeface="Arial" pitchFamily="34" charset="-120"/>
+              </a:rPr>
+              <a:t>Common varieties in India:</a:t>
+            </a:r>
+            <a:pPr algn="l" indent="0" marL="0">
+              <a:lnSpc>
+                <a:spcPts val="1620"/>
+              </a:lnSpc>
+              <a:spcAft>
+                <a:spcPts val="300"/>
+              </a:spcAft>
+              <a:buNone/>
+            </a:pPr>
+            <a:r>
+              <a:rPr lang="en-US" sz="1200" dirty="0">
+                <a:solidFill>
+                  <a:srgbClr val="1C2833"/>
+                </a:solidFill>
+                <a:latin typeface="Arial" pitchFamily="34" charset="0"/>
+                <a:ea typeface="Arial" pitchFamily="34" charset="-122"/>
+                <a:cs typeface="Arial" pitchFamily="34" charset="-120"/>
+              </a:rPr>
+              <a:t> </a:t>
+            </a:r>
+            <a:pPr algn="l" indent="0" marL="0">
+              <a:lnSpc>
+                <a:spcPts val="1620"/>
+              </a:lnSpc>
               <a:spcAft>
                 <a:spcPts val="300"/>
               </a:spcAft>
@@ -4784,15 +7625,12 @@
                 <a:ea typeface="Arial" pitchFamily="34" charset="-122"/>
                 <a:cs typeface="Arial" pitchFamily="34" charset="-120"/>
               </a:rPr>
-              <a:t>"Write the Sanskrit name and the principal aromatic compound of today's herb."</a:t>
-            </a:r>
-            <a:pPr algn="l" indent="0" marL="0">
-              <a:lnSpc>
-                <a:spcPts val="1680"/>
-              </a:lnSpc>
-              <a:spcBef>
-                <a:spcPts val="300"/>
-              </a:spcBef>
+              <a:t>Rāma tulasī</a:t>
+            </a:r>
+            <a:pPr algn="l" indent="0" marL="0">
+              <a:lnSpc>
+                <a:spcPts val="1620"/>
+              </a:lnSpc>
               <a:spcAft>
                 <a:spcPts val="300"/>
               </a:spcAft>
@@ -4807,15 +7645,12 @@
                 <a:ea typeface="Arial" pitchFamily="34" charset="-122"/>
                 <a:cs typeface="Arial" pitchFamily="34" charset="-120"/>
               </a:rPr>
-              <a:t> – Restate the safety rule chorally. – Preview Day 3: </a:t>
-            </a:r>
-            <a:pPr algn="l" indent="0" marL="0">
-              <a:lnSpc>
-                <a:spcPts val="1680"/>
-              </a:lnSpc>
-              <a:spcBef>
-                <a:spcPts val="300"/>
-              </a:spcBef>
+              <a:t> (green), </a:t>
+            </a:r>
+            <a:pPr algn="l" indent="0" marL="0">
+              <a:lnSpc>
+                <a:spcPts val="1620"/>
+              </a:lnSpc>
               <a:spcAft>
                 <a:spcPts val="300"/>
               </a:spcAft>
@@ -4830,7 +7665,27 @@
                 <a:ea typeface="Arial" pitchFamily="34" charset="-122"/>
                 <a:cs typeface="Arial" pitchFamily="34" charset="-120"/>
               </a:rPr>
-              <a:t>"Tomorrow we meet a much less friendly tasting herb — neem."</a:t>
+              <a:t>Kṛṣṇa tulasī</a:t>
+            </a:r>
+            <a:pPr algn="l" indent="0" marL="0">
+              <a:lnSpc>
+                <a:spcPts val="1620"/>
+              </a:lnSpc>
+              <a:spcAft>
+                <a:spcPts val="300"/>
+              </a:spcAft>
+              <a:buNone/>
+            </a:pPr>
+            <a:r>
+              <a:rPr lang="en-US" sz="1200" dirty="0">
+                <a:solidFill>
+                  <a:srgbClr val="1C2833"/>
+                </a:solidFill>
+                <a:latin typeface="Arial" pitchFamily="34" charset="0"/>
+                <a:ea typeface="Arial" pitchFamily="34" charset="-122"/>
+                <a:cs typeface="Arial" pitchFamily="34" charset="-120"/>
+              </a:rPr>
+              <a:t> (purple-leaved). Same species, different cultivars.</a:t>
             </a:r>
             <a:endParaRPr lang="en-US" sz="1200" dirty="0"/>
           </a:p>
@@ -4838,7 +7693,7 @@
       </p:sp>
       <p:sp>
         <p:nvSpPr>
-          <p:cNvPr id="5" name="Text 3"/>
+          <p:cNvPr id="6" name="Text 4"/>
           <p:cNvSpPr/>
           <p:nvPr/>
         </p:nvSpPr>
@@ -4988,7 +7843,7 @@
                 <a:ea typeface="Georgia" pitchFamily="34" charset="-122"/>
                 <a:cs typeface="Georgia" pitchFamily="34" charset="-120"/>
               </a:rPr>
-              <a:t>Student-facing content</a:t>
+              <a:t>Core (20 min) (cont.)</a:t>
             </a:r>
             <a:endParaRPr lang="en-US" sz="1800" dirty="0"/>
           </a:p>
@@ -5002,61 +7857,114 @@
         </p:nvSpPr>
         <p:spPr>
           <a:xfrm>
-            <a:off x="406301" y="883593"/>
-            <a:ext cx="8331398" cy="2843213"/>
-          </a:xfrm>
-          <a:prstGeom prst="rect">
-            <a:avLst/>
-          </a:prstGeom>
-          <a:solidFill>
-            <a:srgbClr val="F4F8F9"/>
-          </a:solidFill>
+            <a:off x="634901" y="883593"/>
+            <a:ext cx="8102798" cy="487561"/>
+          </a:xfrm>
+          <a:prstGeom prst="rect">
+            <a:avLst/>
+          </a:prstGeom>
+          <a:noFill/>
           <a:ln/>
         </p:spPr>
         <p:txBody>
-          <a:bodyPr wrap="square" rtlCol="0" anchor="ctr"/>
-          <a:lstStyle/>
-          <a:p>
-            <a:pPr indent="0" marL="0">
-              <a:buNone/>
-            </a:pPr>
-            <a:endParaRPr lang="en-US" dirty="0"/>
-          </a:p>
-        </p:txBody>
-      </p:sp>
-      <p:sp>
-        <p:nvSpPr>
-          <p:cNvPr id="5" name="Shape 3"/>
+          <a:bodyPr wrap="square" lIns="0" tIns="0" rIns="0" bIns="0" rtlCol="0" anchor="t"/>
+          <a:lstStyle/>
+          <a:p>
+            <a:pPr algn="l" marL="342900" indent="-342900">
+              <a:lnSpc>
+                <a:spcPts val="1620"/>
+              </a:lnSpc>
+              <a:spcAft>
+                <a:spcPts val="300"/>
+              </a:spcAft>
+              <a:buSzPct val="100000"/>
+              <a:buChar char="•"/>
+            </a:pPr>
+            <a:r>
+              <a:rPr lang="en-US" sz="1200" b="1" dirty="0">
+                <a:solidFill>
+                  <a:srgbClr val="1C2833"/>
+                </a:solidFill>
+                <a:latin typeface="Arial" pitchFamily="34" charset="0"/>
+                <a:ea typeface="Arial" pitchFamily="34" charset="-122"/>
+                <a:cs typeface="Arial" pitchFamily="34" charset="-120"/>
+              </a:rPr>
+              <a:t>What's inside.</a:t>
+            </a:r>
+            <a:pPr algn="l" indent="0" marL="0">
+              <a:lnSpc>
+                <a:spcPts val="1620"/>
+              </a:lnSpc>
+              <a:spcAft>
+                <a:spcPts val="300"/>
+              </a:spcAft>
+              <a:buNone/>
+            </a:pPr>
+            <a:r>
+              <a:rPr lang="en-US" sz="1200" dirty="0">
+                <a:solidFill>
+                  <a:srgbClr val="1C2833"/>
+                </a:solidFill>
+                <a:latin typeface="Arial" pitchFamily="34" charset="0"/>
+                <a:ea typeface="Arial" pitchFamily="34" charset="-122"/>
+                <a:cs typeface="Arial" pitchFamily="34" charset="-120"/>
+              </a:rPr>
+              <a:t> Modern phytochemistry has identified the main aromatic in tulsi as </a:t>
+            </a:r>
+            <a:pPr algn="l" indent="0" marL="0">
+              <a:lnSpc>
+                <a:spcPts val="1620"/>
+              </a:lnSpc>
+              <a:spcAft>
+                <a:spcPts val="300"/>
+              </a:spcAft>
+              <a:buNone/>
+            </a:pPr>
+            <a:r>
+              <a:rPr lang="en-US" sz="1200" b="1" dirty="0">
+                <a:solidFill>
+                  <a:srgbClr val="1C2833"/>
+                </a:solidFill>
+                <a:latin typeface="Arial" pitchFamily="34" charset="0"/>
+                <a:ea typeface="Arial" pitchFamily="34" charset="-122"/>
+                <a:cs typeface="Arial" pitchFamily="34" charset="-120"/>
+              </a:rPr>
+              <a:t>eugenol</a:t>
+            </a:r>
+            <a:pPr algn="l" indent="0" marL="0">
+              <a:lnSpc>
+                <a:spcPts val="1620"/>
+              </a:lnSpc>
+              <a:spcAft>
+                <a:spcPts val="300"/>
+              </a:spcAft>
+              <a:buNone/>
+            </a:pPr>
+            <a:r>
+              <a:rPr lang="en-US" sz="1200" dirty="0">
+                <a:solidFill>
+                  <a:srgbClr val="1C2833"/>
+                </a:solidFill>
+                <a:latin typeface="Arial" pitchFamily="34" charset="0"/>
+                <a:ea typeface="Arial" pitchFamily="34" charset="-122"/>
+                <a:cs typeface="Arial" pitchFamily="34" charset="-120"/>
+              </a:rPr>
+              <a:t> — a phenolic compound (C₁₀H₁₂O₂). The same compound dominates clove (the spice). That's why the two smell related.</a:t>
+            </a:r>
+            <a:endParaRPr lang="en-US" sz="1200" dirty="0"/>
+          </a:p>
+        </p:txBody>
+      </p:sp>
+      <p:sp>
+        <p:nvSpPr>
+          <p:cNvPr id="5" name="Text 3"/>
           <p:cNvSpPr/>
           <p:nvPr/>
         </p:nvSpPr>
         <p:spPr>
           <a:xfrm>
-            <a:off x="434876" y="883593"/>
-            <a:ext cx="0" cy="2843213"/>
-          </a:xfrm>
-          <a:prstGeom prst="line">
-            <a:avLst/>
-          </a:prstGeom>
-          <a:noFill/>
-          <a:ln w="57150">
-            <a:solidFill>
-              <a:srgbClr val="FE4447"/>
-            </a:solidFill>
-            <a:prstDash val="solid"/>
-          </a:ln>
-        </p:spPr>
-      </p:sp>
-      <p:sp>
-        <p:nvSpPr>
-          <p:cNvPr id="6" name="Text 4"/>
-          <p:cNvSpPr/>
-          <p:nvPr/>
-        </p:nvSpPr>
-        <p:spPr>
-          <a:xfrm>
-            <a:off x="692051" y="1074093"/>
-            <a:ext cx="7973389" cy="230981"/>
+            <a:off x="406301" y="1460004"/>
+            <a:ext cx="8498026" cy="639812"/>
           </a:xfrm>
           <a:prstGeom prst="rect">
             <a:avLst/>
@@ -5070,7 +7978,7 @@
           <a:p>
             <a:pPr algn="l" indent="0" marL="0">
               <a:lnSpc>
-                <a:spcPts val="1820"/>
+                <a:spcPts val="1680"/>
               </a:lnSpc>
               <a:spcBef>
                 <a:spcPts val="300"/>
@@ -5081,422 +7989,23 @@
               <a:buNone/>
             </a:pPr>
             <a:r>
-              <a:rPr lang="en-US" sz="1300" b="1" i="1" dirty="0">
-                <a:solidFill>
-                  <a:srgbClr val="1C2833"/>
-                </a:solidFill>
-                <a:latin typeface="Georgia" pitchFamily="34" charset="0"/>
-                <a:ea typeface="Georgia" pitchFamily="34" charset="-122"/>
-                <a:cs typeface="Georgia" pitchFamily="34" charset="-120"/>
-              </a:rPr>
-              <a:t>Tulasī</a:t>
-            </a:r>
-            <a:pPr algn="l" indent="0" marL="0">
-              <a:lnSpc>
-                <a:spcPts val="1820"/>
-              </a:lnSpc>
-              <a:spcBef>
-                <a:spcPts val="300"/>
-              </a:spcBef>
-              <a:spcAft>
-                <a:spcPts val="300"/>
-              </a:spcAft>
-              <a:buNone/>
-            </a:pPr>
-            <a:r>
-              <a:rPr lang="en-US" sz="1300" dirty="0">
-                <a:solidFill>
-                  <a:srgbClr val="1C2833"/>
-                </a:solidFill>
-                <a:latin typeface="Georgia" pitchFamily="34" charset="0"/>
-                <a:ea typeface="Georgia" pitchFamily="34" charset="-122"/>
-                <a:cs typeface="Georgia" pitchFamily="34" charset="-120"/>
-              </a:rPr>
-              <a:t> (</a:t>
-            </a:r>
-            <a:pPr algn="l" indent="0" marL="0">
-              <a:lnSpc>
-                <a:spcPts val="1820"/>
-              </a:lnSpc>
-              <a:spcBef>
-                <a:spcPts val="300"/>
-              </a:spcBef>
-              <a:spcAft>
-                <a:spcPts val="300"/>
-              </a:spcAft>
-              <a:buNone/>
-            </a:pPr>
-            <a:r>
-              <a:rPr lang="en-US" sz="1300" i="1" dirty="0">
-                <a:solidFill>
-                  <a:srgbClr val="1C2833"/>
-                </a:solidFill>
-                <a:latin typeface="Georgia" pitchFamily="34" charset="0"/>
-                <a:ea typeface="Georgia" pitchFamily="34" charset="-122"/>
-                <a:cs typeface="Georgia" pitchFamily="34" charset="-120"/>
-              </a:rPr>
-              <a:t>Ocimum tenuiflorum</a:t>
-            </a:r>
-            <a:pPr algn="l" indent="0" marL="0">
-              <a:lnSpc>
-                <a:spcPts val="1820"/>
-              </a:lnSpc>
-              <a:spcBef>
-                <a:spcPts val="300"/>
-              </a:spcBef>
-              <a:spcAft>
-                <a:spcPts val="300"/>
-              </a:spcAft>
-              <a:buNone/>
-            </a:pPr>
-            <a:r>
-              <a:rPr lang="en-US" sz="1300" dirty="0">
-                <a:solidFill>
-                  <a:srgbClr val="1C2833"/>
-                </a:solidFill>
-                <a:latin typeface="Georgia" pitchFamily="34" charset="0"/>
-                <a:ea typeface="Georgia" pitchFamily="34" charset="-122"/>
-                <a:cs typeface="Georgia" pitchFamily="34" charset="-120"/>
-              </a:rPr>
-              <a:t>) — known in English as holy basil, in Hindi as tulsi.</a:t>
-            </a:r>
-            <a:endParaRPr lang="en-US" sz="1300" dirty="0"/>
-          </a:p>
-        </p:txBody>
-      </p:sp>
-      <p:sp>
-        <p:nvSpPr>
-          <p:cNvPr id="7" name="Text 5"/>
-          <p:cNvSpPr/>
-          <p:nvPr/>
-        </p:nvSpPr>
-        <p:spPr>
-          <a:xfrm>
-            <a:off x="692051" y="1343174"/>
-            <a:ext cx="7973389" cy="692944"/>
-          </a:xfrm>
-          <a:prstGeom prst="rect">
-            <a:avLst/>
-          </a:prstGeom>
-          <a:noFill/>
-          <a:ln/>
-        </p:spPr>
-        <p:txBody>
-          <a:bodyPr wrap="square" lIns="0" tIns="0" rIns="0" bIns="0" rtlCol="0" anchor="t"/>
-          <a:lstStyle/>
-          <a:p>
-            <a:pPr algn="l" indent="0" marL="0">
-              <a:lnSpc>
-                <a:spcPts val="1820"/>
-              </a:lnSpc>
-              <a:spcBef>
-                <a:spcPts val="300"/>
-              </a:spcBef>
-              <a:spcAft>
-                <a:spcPts val="300"/>
-              </a:spcAft>
-              <a:buNone/>
-            </a:pPr>
-            <a:r>
-              <a:rPr lang="en-US" sz="1300" b="1" i="1" dirty="0">
-                <a:solidFill>
-                  <a:srgbClr val="1C2833"/>
-                </a:solidFill>
-                <a:latin typeface="Georgia" pitchFamily="34" charset="0"/>
-                <a:ea typeface="Georgia" pitchFamily="34" charset="-122"/>
-                <a:cs typeface="Georgia" pitchFamily="34" charset="-120"/>
-              </a:rPr>
-              <a:t>How to identify it:</a:t>
-            </a:r>
-            <a:pPr algn="l" indent="0" marL="0">
-              <a:lnSpc>
-                <a:spcPts val="1820"/>
-              </a:lnSpc>
-              <a:spcBef>
-                <a:spcPts val="300"/>
-              </a:spcBef>
-              <a:spcAft>
-                <a:spcPts val="300"/>
-              </a:spcAft>
-              <a:buNone/>
-            </a:pPr>
-            <a:r>
-              <a:rPr lang="en-US" sz="1300" dirty="0">
-                <a:solidFill>
-                  <a:srgbClr val="1C2833"/>
-                </a:solidFill>
-                <a:latin typeface="Georgia" pitchFamily="34" charset="0"/>
-                <a:ea typeface="Georgia" pitchFamily="34" charset="-122"/>
-                <a:cs typeface="Georgia" pitchFamily="34" charset="-120"/>
-              </a:rPr>
-              <a:t> - Ovate (oval-pointed) leaf, about 2–5 cm long, with small jagged edges. - Square stem (a feature of the Lamiaceae family). - Strong, sharp, clove-like smell when you rub a leaf between your fingers.</a:t>
-            </a:r>
-            <a:endParaRPr lang="en-US" sz="1300" dirty="0"/>
-          </a:p>
-        </p:txBody>
-      </p:sp>
-      <p:sp>
-        <p:nvSpPr>
-          <p:cNvPr id="8" name="Text 6"/>
-          <p:cNvSpPr/>
-          <p:nvPr/>
-        </p:nvSpPr>
-        <p:spPr>
-          <a:xfrm>
-            <a:off x="692051" y="2074218"/>
-            <a:ext cx="7973389" cy="461963"/>
-          </a:xfrm>
-          <a:prstGeom prst="rect">
-            <a:avLst/>
-          </a:prstGeom>
-          <a:noFill/>
-          <a:ln/>
-        </p:spPr>
-        <p:txBody>
-          <a:bodyPr wrap="square" lIns="0" tIns="0" rIns="0" bIns="0" rtlCol="0" anchor="t"/>
-          <a:lstStyle/>
-          <a:p>
-            <a:pPr algn="l" indent="0" marL="0">
-              <a:lnSpc>
-                <a:spcPts val="1820"/>
-              </a:lnSpc>
-              <a:spcBef>
-                <a:spcPts val="300"/>
-              </a:spcBef>
-              <a:spcAft>
-                <a:spcPts val="300"/>
-              </a:spcAft>
-              <a:buNone/>
-            </a:pPr>
-            <a:r>
-              <a:rPr lang="en-US" sz="1300" b="1" i="1" dirty="0">
-                <a:solidFill>
-                  <a:srgbClr val="1C2833"/>
-                </a:solidFill>
-                <a:latin typeface="Georgia" pitchFamily="34" charset="0"/>
-                <a:ea typeface="Georgia" pitchFamily="34" charset="-122"/>
-                <a:cs typeface="Georgia" pitchFamily="34" charset="-120"/>
-              </a:rPr>
-              <a:t>What's inside:</a:t>
-            </a:r>
-            <a:pPr algn="l" indent="0" marL="0">
-              <a:lnSpc>
-                <a:spcPts val="1820"/>
-              </a:lnSpc>
-              <a:spcBef>
-                <a:spcPts val="300"/>
-              </a:spcBef>
-              <a:spcAft>
-                <a:spcPts val="300"/>
-              </a:spcAft>
-              <a:buNone/>
-            </a:pPr>
-            <a:r>
-              <a:rPr lang="en-US" sz="1300" dirty="0">
-                <a:solidFill>
-                  <a:srgbClr val="1C2833"/>
-                </a:solidFill>
-                <a:latin typeface="Georgia" pitchFamily="34" charset="0"/>
-                <a:ea typeface="Georgia" pitchFamily="34" charset="-122"/>
-                <a:cs typeface="Georgia" pitchFamily="34" charset="-120"/>
-              </a:rPr>
-              <a:t> The main aromatic compound is </a:t>
-            </a:r>
-            <a:pPr algn="l" indent="0" marL="0">
-              <a:lnSpc>
-                <a:spcPts val="1820"/>
-              </a:lnSpc>
-              <a:spcBef>
-                <a:spcPts val="300"/>
-              </a:spcBef>
-              <a:spcAft>
-                <a:spcPts val="300"/>
-              </a:spcAft>
-              <a:buNone/>
-            </a:pPr>
-            <a:r>
-              <a:rPr lang="en-US" sz="1300" b="1" i="1" dirty="0">
-                <a:solidFill>
-                  <a:srgbClr val="1C2833"/>
-                </a:solidFill>
-                <a:latin typeface="Georgia" pitchFamily="34" charset="0"/>
-                <a:ea typeface="Georgia" pitchFamily="34" charset="-122"/>
-                <a:cs typeface="Georgia" pitchFamily="34" charset="-120"/>
-              </a:rPr>
-              <a:t>eugenol</a:t>
-            </a:r>
-            <a:pPr algn="l" indent="0" marL="0">
-              <a:lnSpc>
-                <a:spcPts val="1820"/>
-              </a:lnSpc>
-              <a:spcBef>
-                <a:spcPts val="300"/>
-              </a:spcBef>
-              <a:spcAft>
-                <a:spcPts val="300"/>
-              </a:spcAft>
-              <a:buNone/>
-            </a:pPr>
-            <a:r>
-              <a:rPr lang="en-US" sz="1300" dirty="0">
-                <a:solidFill>
-                  <a:srgbClr val="1C2833"/>
-                </a:solidFill>
-                <a:latin typeface="Georgia" pitchFamily="34" charset="0"/>
-                <a:ea typeface="Georgia" pitchFamily="34" charset="-122"/>
-                <a:cs typeface="Georgia" pitchFamily="34" charset="-120"/>
-              </a:rPr>
-              <a:t> — also the principal aromatic in actual clove. The plant produces it as a chemical defence.</a:t>
-            </a:r>
-            <a:endParaRPr lang="en-US" sz="1300" dirty="0"/>
-          </a:p>
-        </p:txBody>
-      </p:sp>
-      <p:sp>
-        <p:nvSpPr>
-          <p:cNvPr id="9" name="Text 7"/>
-          <p:cNvSpPr/>
-          <p:nvPr/>
-        </p:nvSpPr>
-        <p:spPr>
-          <a:xfrm>
-            <a:off x="692051" y="2574280"/>
-            <a:ext cx="7973389" cy="461963"/>
-          </a:xfrm>
-          <a:prstGeom prst="rect">
-            <a:avLst/>
-          </a:prstGeom>
-          <a:noFill/>
-          <a:ln/>
-        </p:spPr>
-        <p:txBody>
-          <a:bodyPr wrap="square" lIns="0" tIns="0" rIns="0" bIns="0" rtlCol="0" anchor="t"/>
-          <a:lstStyle/>
-          <a:p>
-            <a:pPr algn="l" indent="0" marL="0">
-              <a:lnSpc>
-                <a:spcPts val="1820"/>
-              </a:lnSpc>
-              <a:spcBef>
-                <a:spcPts val="300"/>
-              </a:spcBef>
-              <a:spcAft>
-                <a:spcPts val="300"/>
-              </a:spcAft>
-              <a:buNone/>
-            </a:pPr>
-            <a:r>
-              <a:rPr lang="en-US" sz="1300" b="1" i="1" dirty="0">
-                <a:solidFill>
-                  <a:srgbClr val="1C2833"/>
-                </a:solidFill>
-                <a:latin typeface="Georgia" pitchFamily="34" charset="0"/>
-                <a:ea typeface="Georgia" pitchFamily="34" charset="-122"/>
-                <a:cs typeface="Georgia" pitchFamily="34" charset="-120"/>
-              </a:rPr>
-              <a:t>Traditional uses:</a:t>
-            </a:r>
-            <a:pPr algn="l" indent="0" marL="0">
-              <a:lnSpc>
-                <a:spcPts val="1820"/>
-              </a:lnSpc>
-              <a:spcBef>
-                <a:spcPts val="300"/>
-              </a:spcBef>
-              <a:spcAft>
-                <a:spcPts val="300"/>
-              </a:spcAft>
-              <a:buNone/>
-            </a:pPr>
-            <a:r>
-              <a:rPr lang="en-US" sz="1300" dirty="0">
-                <a:solidFill>
-                  <a:srgbClr val="1C2833"/>
-                </a:solidFill>
-                <a:latin typeface="Georgia" pitchFamily="34" charset="0"/>
-                <a:ea typeface="Georgia" pitchFamily="34" charset="-122"/>
-                <a:cs typeface="Georgia" pitchFamily="34" charset="-120"/>
-              </a:rPr>
-              <a:t> Kitchen herb (tulsi tea, chutney), household plant, ingredient in some Ayurvedic cold-and-cough preparations.</a:t>
-            </a:r>
-            <a:endParaRPr lang="en-US" sz="1300" dirty="0"/>
-          </a:p>
-        </p:txBody>
-      </p:sp>
-      <p:sp>
-        <p:nvSpPr>
-          <p:cNvPr id="10" name="Text 8"/>
-          <p:cNvSpPr/>
-          <p:nvPr/>
-        </p:nvSpPr>
-        <p:spPr>
-          <a:xfrm>
-            <a:off x="692051" y="3074343"/>
-            <a:ext cx="7973389" cy="461963"/>
-          </a:xfrm>
-          <a:prstGeom prst="rect">
-            <a:avLst/>
-          </a:prstGeom>
-          <a:noFill/>
-          <a:ln/>
-        </p:spPr>
-        <p:txBody>
-          <a:bodyPr wrap="square" lIns="0" tIns="0" rIns="0" bIns="0" rtlCol="0" anchor="t"/>
-          <a:lstStyle/>
-          <a:p>
-            <a:pPr algn="l" indent="0" marL="0">
-              <a:lnSpc>
-                <a:spcPts val="1820"/>
-              </a:lnSpc>
-              <a:spcBef>
-                <a:spcPts val="300"/>
-              </a:spcBef>
-              <a:spcAft>
-                <a:spcPts val="300"/>
-              </a:spcAft>
-              <a:buNone/>
-            </a:pPr>
-            <a:r>
-              <a:rPr lang="en-US" sz="1300" b="1" i="1" dirty="0">
-                <a:solidFill>
-                  <a:srgbClr val="1C2833"/>
-                </a:solidFill>
-                <a:latin typeface="Georgia" pitchFamily="34" charset="0"/>
-                <a:ea typeface="Georgia" pitchFamily="34" charset="-122"/>
-                <a:cs typeface="Georgia" pitchFamily="34" charset="-120"/>
-              </a:rPr>
-              <a:t>What we don't say:</a:t>
-            </a:r>
-            <a:pPr algn="l" indent="0" marL="0">
-              <a:lnSpc>
-                <a:spcPts val="1820"/>
-              </a:lnSpc>
-              <a:spcBef>
-                <a:spcPts val="300"/>
-              </a:spcBef>
-              <a:spcAft>
-                <a:spcPts val="300"/>
-              </a:spcAft>
-              <a:buNone/>
-            </a:pPr>
-            <a:r>
-              <a:rPr lang="en-US" sz="1300" dirty="0">
-                <a:solidFill>
-                  <a:srgbClr val="1C2833"/>
-                </a:solidFill>
-                <a:latin typeface="Georgia" pitchFamily="34" charset="0"/>
-                <a:ea typeface="Georgia" pitchFamily="34" charset="-122"/>
-                <a:cs typeface="Georgia" pitchFamily="34" charset="-120"/>
-              </a:rPr>
-              <a:t> "Tulsi cures X." Folk use and preliminary evidence are not the same as clinical proof.</a:t>
-            </a:r>
-            <a:endParaRPr lang="en-US" sz="1300" dirty="0"/>
-          </a:p>
-        </p:txBody>
-      </p:sp>
-      <p:sp>
-        <p:nvSpPr>
-          <p:cNvPr id="11" name="Text 9"/>
+              <a:rPr lang="en-US" sz="1200" dirty="0">
+                <a:solidFill>
+                  <a:srgbClr val="1C2833"/>
+                </a:solidFill>
+                <a:latin typeface="Arial" pitchFamily="34" charset="0"/>
+                <a:ea typeface="Arial" pitchFamily="34" charset="-122"/>
+                <a:cs typeface="Arial" pitchFamily="34" charset="-120"/>
+              </a:rPr>
+              <a:t>Why does the plant make eugenol? Because it's the plant's chemical defence — eugenol discourages many insects from eating the leaves, and it has antibacterial effects in petri-dish studies. The plant doesn't make it for us; we just happened to find it useful.</a:t>
+            </a:r>
+            <a:endParaRPr lang="en-US" sz="1200" dirty="0"/>
+          </a:p>
+        </p:txBody>
+      </p:sp>
+      <p:sp>
+        <p:nvSpPr>
+          <p:cNvPr id="6" name="Text 4"/>
           <p:cNvSpPr/>
           <p:nvPr/>
         </p:nvSpPr>
@@ -5646,7 +8155,7 @@
                 <a:ea typeface="Georgia" pitchFamily="34" charset="-122"/>
                 <a:cs typeface="Georgia" pitchFamily="34" charset="-120"/>
               </a:rPr>
-              <a:t>Homework</a:t>
+              <a:t>Core (20 min) (cont.)</a:t>
             </a:r>
             <a:endParaRPr lang="en-US" sz="1800" dirty="0"/>
           </a:p>
@@ -5660,8 +8169,8 @@
         </p:nvSpPr>
         <p:spPr>
           <a:xfrm>
-            <a:off x="406301" y="870942"/>
-            <a:ext cx="8498026" cy="426541"/>
+            <a:off x="634901" y="883593"/>
+            <a:ext cx="8102798" cy="281880"/>
           </a:xfrm>
           <a:prstGeom prst="rect">
             <a:avLst/>
@@ -5673,13 +8182,31 @@
           <a:bodyPr wrap="square" lIns="0" tIns="0" rIns="0" bIns="0" rtlCol="0" anchor="t"/>
           <a:lstStyle/>
           <a:p>
-            <a:pPr algn="l" indent="0" marL="0">
-              <a:lnSpc>
-                <a:spcPts val="1680"/>
-              </a:lnSpc>
-              <a:spcBef>
-                <a:spcPts val="300"/>
-              </a:spcBef>
+            <a:pPr algn="l" marL="342900" indent="-342900">
+              <a:lnSpc>
+                <a:spcPts val="1620"/>
+              </a:lnSpc>
+              <a:spcAft>
+                <a:spcPts val="300"/>
+              </a:spcAft>
+              <a:buSzPct val="100000"/>
+              <a:buChar char="•"/>
+            </a:pPr>
+            <a:r>
+              <a:rPr lang="en-US" sz="1200" b="1" dirty="0">
+                <a:solidFill>
+                  <a:srgbClr val="1C2833"/>
+                </a:solidFill>
+                <a:latin typeface="Arial" pitchFamily="34" charset="0"/>
+                <a:ea typeface="Arial" pitchFamily="34" charset="-122"/>
+                <a:cs typeface="Arial" pitchFamily="34" charset="-120"/>
+              </a:rPr>
+              <a:t>Traditional uses.</a:t>
+            </a:r>
+            <a:pPr algn="l" indent="0" marL="0">
+              <a:lnSpc>
+                <a:spcPts val="1620"/>
+              </a:lnSpc>
               <a:spcAft>
                 <a:spcPts val="300"/>
               </a:spcAft>
@@ -5694,7 +8221,7 @@
                 <a:ea typeface="Arial" pitchFamily="34" charset="-122"/>
                 <a:cs typeface="Arial" pitchFamily="34" charset="-120"/>
               </a:rPr>
-              <a:t>– Find a tulsi plant — your own pot, a neighbour's, a temple's, a school garden. Sketch its leaf in your workbook from life (not from a picture). Write one identifying feature you observed in person.</a:t>
+              <a:t> Mention only:</a:t>
             </a:r>
             <a:endParaRPr lang="en-US" sz="1200" dirty="0"/>
           </a:p>
@@ -5703,6 +8230,220 @@
       <p:sp>
         <p:nvSpPr>
           <p:cNvPr id="5" name="Text 3"/>
+          <p:cNvSpPr/>
+          <p:nvPr/>
+        </p:nvSpPr>
+        <p:spPr>
+          <a:xfrm>
+            <a:off x="634901" y="1266974"/>
+            <a:ext cx="8102798" cy="975122"/>
+          </a:xfrm>
+          <a:prstGeom prst="rect">
+            <a:avLst/>
+          </a:prstGeom>
+          <a:noFill/>
+          <a:ln/>
+        </p:spPr>
+        <p:txBody>
+          <a:bodyPr wrap="square" lIns="0" tIns="0" rIns="0" bIns="0" rtlCol="0" anchor="t"/>
+          <a:lstStyle/>
+          <a:p>
+            <a:pPr algn="l" marL="342900" indent="-342900">
+              <a:lnSpc>
+                <a:spcPts val="1620"/>
+              </a:lnSpc>
+              <a:spcAft>
+                <a:spcPts val="300"/>
+              </a:spcAft>
+              <a:buSzPct val="100000"/>
+              <a:buChar char="•"/>
+            </a:pPr>
+            <a:r>
+              <a:rPr lang="en-US" sz="1200" dirty="0">
+                <a:solidFill>
+                  <a:srgbClr val="1C2833"/>
+                </a:solidFill>
+                <a:latin typeface="Arial" pitchFamily="34" charset="0"/>
+                <a:ea typeface="Arial" pitchFamily="34" charset="-122"/>
+                <a:cs typeface="Arial" pitchFamily="34" charset="-120"/>
+              </a:rPr>
+              <a:t>As a </a:t>
+            </a:r>
+            <a:pPr algn="l" indent="0" marL="0">
+              <a:lnSpc>
+                <a:spcPts val="1620"/>
+              </a:lnSpc>
+              <a:spcAft>
+                <a:spcPts val="300"/>
+              </a:spcAft>
+              <a:buNone/>
+            </a:pPr>
+            <a:r>
+              <a:rPr lang="en-US" sz="1200" i="1" dirty="0">
+                <a:solidFill>
+                  <a:srgbClr val="1C2833"/>
+                </a:solidFill>
+                <a:latin typeface="Arial" pitchFamily="34" charset="0"/>
+                <a:ea typeface="Arial" pitchFamily="34" charset="-122"/>
+                <a:cs typeface="Arial" pitchFamily="34" charset="-120"/>
+              </a:rPr>
+              <a:t>kitchen herb</a:t>
+            </a:r>
+            <a:pPr algn="l" indent="0" marL="0">
+              <a:lnSpc>
+                <a:spcPts val="1620"/>
+              </a:lnSpc>
+              <a:spcAft>
+                <a:spcPts val="300"/>
+              </a:spcAft>
+              <a:buNone/>
+            </a:pPr>
+            <a:r>
+              <a:rPr lang="en-US" sz="1200" dirty="0">
+                <a:solidFill>
+                  <a:srgbClr val="1C2833"/>
+                </a:solidFill>
+                <a:latin typeface="Arial" pitchFamily="34" charset="0"/>
+                <a:ea typeface="Arial" pitchFamily="34" charset="-122"/>
+                <a:cs typeface="Arial" pitchFamily="34" charset="-120"/>
+              </a:rPr>
+              <a:t> — in chutneys, drinks (tulsi tea — leaves steeped in water), sometimes a few leaves added to dal.</a:t>
+            </a:r>
+            <a:endParaRPr lang="en-US" sz="1200" dirty="0"/>
+          </a:p>
+          <a:p>
+            <a:pPr algn="l" marL="342900" indent="-342900">
+              <a:lnSpc>
+                <a:spcPts val="1620"/>
+              </a:lnSpc>
+              <a:spcAft>
+                <a:spcPts val="300"/>
+              </a:spcAft>
+              <a:buSzPct val="100000"/>
+              <a:buChar char="•"/>
+            </a:pPr>
+            <a:r>
+              <a:rPr lang="en-US" sz="1200" dirty="0">
+                <a:solidFill>
+                  <a:srgbClr val="1C2833"/>
+                </a:solidFill>
+                <a:latin typeface="Arial" pitchFamily="34" charset="0"/>
+                <a:ea typeface="Arial" pitchFamily="34" charset="-122"/>
+                <a:cs typeface="Arial" pitchFamily="34" charset="-120"/>
+              </a:rPr>
+              <a:t>As a </a:t>
+            </a:r>
+            <a:pPr algn="l" indent="0" marL="0">
+              <a:lnSpc>
+                <a:spcPts val="1620"/>
+              </a:lnSpc>
+              <a:spcAft>
+                <a:spcPts val="300"/>
+              </a:spcAft>
+              <a:buNone/>
+            </a:pPr>
+            <a:r>
+              <a:rPr lang="en-US" sz="1200" i="1" dirty="0">
+                <a:solidFill>
+                  <a:srgbClr val="1C2833"/>
+                </a:solidFill>
+                <a:latin typeface="Arial" pitchFamily="34" charset="0"/>
+                <a:ea typeface="Arial" pitchFamily="34" charset="-122"/>
+                <a:cs typeface="Arial" pitchFamily="34" charset="-120"/>
+              </a:rPr>
+              <a:t>household plant</a:t>
+            </a:r>
+            <a:pPr algn="l" indent="0" marL="0">
+              <a:lnSpc>
+                <a:spcPts val="1620"/>
+              </a:lnSpc>
+              <a:spcAft>
+                <a:spcPts val="300"/>
+              </a:spcAft>
+              <a:buNone/>
+            </a:pPr>
+            <a:r>
+              <a:rPr lang="en-US" sz="1200" dirty="0">
+                <a:solidFill>
+                  <a:srgbClr val="1C2833"/>
+                </a:solidFill>
+                <a:latin typeface="Arial" pitchFamily="34" charset="0"/>
+                <a:ea typeface="Arial" pitchFamily="34" charset="-122"/>
+                <a:cs typeface="Arial" pitchFamily="34" charset="-120"/>
+              </a:rPr>
+              <a:t> — many Indian homes keep a tulsi plant for its scent and its insect-repelling qualities.</a:t>
+            </a:r>
+            <a:endParaRPr lang="en-US" sz="1200" dirty="0"/>
+          </a:p>
+          <a:p>
+            <a:pPr algn="l" marL="342900" indent="-342900">
+              <a:lnSpc>
+                <a:spcPts val="1620"/>
+              </a:lnSpc>
+              <a:spcAft>
+                <a:spcPts val="300"/>
+              </a:spcAft>
+              <a:buSzPct val="100000"/>
+              <a:buChar char="•"/>
+            </a:pPr>
+            <a:r>
+              <a:rPr lang="en-US" sz="1200" dirty="0">
+                <a:solidFill>
+                  <a:srgbClr val="1C2833"/>
+                </a:solidFill>
+                <a:latin typeface="Arial" pitchFamily="34" charset="0"/>
+                <a:ea typeface="Arial" pitchFamily="34" charset="-122"/>
+                <a:cs typeface="Arial" pitchFamily="34" charset="-120"/>
+              </a:rPr>
+              <a:t>As an </a:t>
+            </a:r>
+            <a:pPr algn="l" indent="0" marL="0">
+              <a:lnSpc>
+                <a:spcPts val="1620"/>
+              </a:lnSpc>
+              <a:spcAft>
+                <a:spcPts val="300"/>
+              </a:spcAft>
+              <a:buNone/>
+            </a:pPr>
+            <a:r>
+              <a:rPr lang="en-US" sz="1200" i="1" dirty="0">
+                <a:solidFill>
+                  <a:srgbClr val="1C2833"/>
+                </a:solidFill>
+                <a:latin typeface="Arial" pitchFamily="34" charset="0"/>
+                <a:ea typeface="Arial" pitchFamily="34" charset="-122"/>
+                <a:cs typeface="Arial" pitchFamily="34" charset="-120"/>
+              </a:rPr>
+              <a:t>aromatic</a:t>
+            </a:r>
+            <a:pPr algn="l" indent="0" marL="0">
+              <a:lnSpc>
+                <a:spcPts val="1620"/>
+              </a:lnSpc>
+              <a:spcAft>
+                <a:spcPts val="300"/>
+              </a:spcAft>
+              <a:buNone/>
+            </a:pPr>
+            <a:r>
+              <a:rPr lang="en-US" sz="1200" dirty="0">
+                <a:solidFill>
+                  <a:srgbClr val="1C2833"/>
+                </a:solidFill>
+                <a:latin typeface="Arial" pitchFamily="34" charset="0"/>
+                <a:ea typeface="Arial" pitchFamily="34" charset="-122"/>
+                <a:cs typeface="Arial" pitchFamily="34" charset="-120"/>
+              </a:rPr>
+              <a:t> — in some traditional Ayurvedic preparations for cough and cold support. (Here, drop the safety reminder again — these preparations are formulated by practitioners; we are not recommending self-medication.)</a:t>
+            </a:r>
+            <a:endParaRPr lang="en-US" sz="1200" dirty="0"/>
+          </a:p>
+        </p:txBody>
+      </p:sp>
+      <p:sp>
+        <p:nvSpPr>
+          <p:cNvPr id="6" name="Text 4"/>
           <p:cNvSpPr/>
           <p:nvPr/>
         </p:nvSpPr>
